--- a/Day14/14-paev-andmetarkus-esitlus.pptx
+++ b/Day14/14-paev-andmetarkus-esitlus.pptx
@@ -5,10 +5,10 @@
     <p:sldMasterId id="2147483648" r:id="rId4"/>
   </p:sldMasterIdLst>
   <p:notesMasterIdLst>
-    <p:notesMasterId r:id="rId26"/>
+    <p:notesMasterId r:id="rId31"/>
   </p:notesMasterIdLst>
   <p:handoutMasterIdLst>
-    <p:handoutMasterId r:id="rId27"/>
+    <p:handoutMasterId r:id="rId32"/>
   </p:handoutMasterIdLst>
   <p:sldIdLst>
     <p:sldId id="417" r:id="rId5"/>
@@ -32,30 +32,35 @@
     <p:sldId id="577" r:id="rId23"/>
     <p:sldId id="568" r:id="rId24"/>
     <p:sldId id="647" r:id="rId25"/>
+    <p:sldId id="649" r:id="rId26"/>
+    <p:sldId id="574" r:id="rId27"/>
+    <p:sldId id="645" r:id="rId28"/>
+    <p:sldId id="538" r:id="rId29"/>
+    <p:sldId id="650" r:id="rId30"/>
   </p:sldIdLst>
   <p:sldSz cx="12192000" cy="6858000"/>
   <p:notesSz cx="6858000" cy="9144000"/>
   <p:embeddedFontLst>
     <p:embeddedFont>
       <p:font typeface="Inter" panose="020B0604020202020204" charset="0"/>
-      <p:regular r:id="rId28"/>
-      <p:bold r:id="rId29"/>
+      <p:regular r:id="rId33"/>
+      <p:bold r:id="rId34"/>
     </p:embeddedFont>
     <p:embeddedFont>
       <p:font typeface="Inter Bold" panose="020B0604020202020204" charset="0"/>
-      <p:bold r:id="rId30"/>
+      <p:bold r:id="rId35"/>
     </p:embeddedFont>
     <p:embeddedFont>
       <p:font typeface="Noto Serif" panose="02020600060500020200" pitchFamily="18" charset="0"/>
-      <p:regular r:id="rId31"/>
-      <p:bold r:id="rId32"/>
-      <p:italic r:id="rId33"/>
-      <p:boldItalic r:id="rId34"/>
+      <p:regular r:id="rId36"/>
+      <p:bold r:id="rId37"/>
+      <p:italic r:id="rId38"/>
+      <p:boldItalic r:id="rId39"/>
     </p:embeddedFont>
     <p:embeddedFont>
       <p:font typeface="Poppins SemiBold" panose="00000700000000000000" pitchFamily="2" charset="0"/>
-      <p:bold r:id="rId35"/>
-      <p:boldItalic r:id="rId36"/>
+      <p:bold r:id="rId40"/>
+      <p:boldItalic r:id="rId41"/>
     </p:embeddedFont>
   </p:embeddedFontLst>
   <p:defaultTextStyle>
@@ -164,17 +169,25 @@
 </p:presentation>
 </file>
 
+<file path=ppt/revisionInfo.xml><?xml version="1.0" encoding="utf-8"?>
+<p1510:revInfo xmlns:a="http://schemas.openxmlformats.org/drawingml/2006/main" xmlns:r="http://schemas.openxmlformats.org/officeDocument/2006/relationships" xmlns:p1510="http://schemas.microsoft.com/office/powerpoint/2015/10/main">
+  <p1510:revLst>
+    <p1510:client id="{1CEC6D2C-2DE5-4622-B5C9-CE21C0F1885C}" v="4" dt="2026-04-14T08:00:40.558"/>
+  </p1510:revLst>
+</p1510:revInfo>
+</file>
+
 <file path=ppt/changesInfos/changesInfo1.xml><?xml version="1.0" encoding="utf-8"?>
 <pc:chgInfo xmlns:a="http://schemas.openxmlformats.org/drawingml/2006/main" xmlns:r="http://schemas.openxmlformats.org/officeDocument/2006/relationships" xmlns:ac="http://schemas.microsoft.com/office/drawing/2013/main/command" xmlns:pc="http://schemas.microsoft.com/office/powerpoint/2013/main/command">
   <pc:docChgLst>
     <pc:chgData name="Virve Räni" userId="161a7437-7ef4-49ec-91bf-54882f313dfe" providerId="ADAL" clId="{6D754EED-65AA-4A21-B175-6769012CF487}"/>
     <pc:docChg chg="addSld delSld modSld sldOrd">
-      <pc:chgData name="Virve Räni" userId="161a7437-7ef4-49ec-91bf-54882f313dfe" providerId="ADAL" clId="{6D754EED-65AA-4A21-B175-6769012CF487}" dt="2026-03-18T07:45:31.134" v="200" actId="47"/>
+      <pc:chgData name="Virve Räni" userId="161a7437-7ef4-49ec-91bf-54882f313dfe" providerId="ADAL" clId="{6D754EED-65AA-4A21-B175-6769012CF487}" dt="2026-04-14T08:00:46.453" v="353" actId="255"/>
       <pc:docMkLst>
         <pc:docMk/>
       </pc:docMkLst>
       <pc:sldChg chg="modSp mod">
-        <pc:chgData name="Virve Räni" userId="161a7437-7ef4-49ec-91bf-54882f313dfe" providerId="ADAL" clId="{6D754EED-65AA-4A21-B175-6769012CF487}" dt="2026-03-18T07:41:45.385" v="196" actId="20577"/>
+        <pc:chgData name="Virve Räni" userId="161a7437-7ef4-49ec-91bf-54882f313dfe" providerId="ADAL" clId="{6D754EED-65AA-4A21-B175-6769012CF487}" dt="2026-04-14T07:54:41.652" v="271"/>
         <pc:sldMkLst>
           <pc:docMk/>
           <pc:sldMk cId="1135419376" sldId="493"/>
@@ -187,8 +200,8 @@
             <ac:spMk id="2" creationId="{11F10058-A289-F9F8-2CC8-43BAABEC6F7E}"/>
           </ac:spMkLst>
         </pc:spChg>
-        <pc:graphicFrameChg chg="modGraphic">
-          <ac:chgData name="Virve Räni" userId="161a7437-7ef4-49ec-91bf-54882f313dfe" providerId="ADAL" clId="{6D754EED-65AA-4A21-B175-6769012CF487}" dt="2026-03-18T07:41:45.385" v="196" actId="20577"/>
+        <pc:graphicFrameChg chg="mod modGraphic">
+          <ac:chgData name="Virve Räni" userId="161a7437-7ef4-49ec-91bf-54882f313dfe" providerId="ADAL" clId="{6D754EED-65AA-4A21-B175-6769012CF487}" dt="2026-04-14T07:54:41.652" v="271"/>
           <ac:graphicFrameMkLst>
             <pc:docMk/>
             <pc:sldMk cId="1135419376" sldId="493"/>
@@ -196,22 +209,15 @@
           </ac:graphicFrameMkLst>
         </pc:graphicFrameChg>
       </pc:sldChg>
-      <pc:sldChg chg="del">
-        <pc:chgData name="Virve Räni" userId="161a7437-7ef4-49ec-91bf-54882f313dfe" providerId="ADAL" clId="{6D754EED-65AA-4A21-B175-6769012CF487}" dt="2026-03-18T07:45:28.416" v="197" actId="47"/>
+      <pc:sldChg chg="add">
+        <pc:chgData name="Virve Räni" userId="161a7437-7ef4-49ec-91bf-54882f313dfe" providerId="ADAL" clId="{6D754EED-65AA-4A21-B175-6769012CF487}" dt="2026-04-14T07:59:42.079" v="308"/>
         <pc:sldMkLst>
           <pc:docMk/>
-          <pc:sldMk cId="1463216859" sldId="570"/>
+          <pc:sldMk cId="1694942831" sldId="538"/>
         </pc:sldMkLst>
       </pc:sldChg>
-      <pc:sldChg chg="del">
-        <pc:chgData name="Virve Räni" userId="161a7437-7ef4-49ec-91bf-54882f313dfe" providerId="ADAL" clId="{6D754EED-65AA-4A21-B175-6769012CF487}" dt="2026-03-18T07:45:30.501" v="199" actId="47"/>
-        <pc:sldMkLst>
-          <pc:docMk/>
-          <pc:sldMk cId="2505963611" sldId="573"/>
-        </pc:sldMkLst>
-      </pc:sldChg>
-      <pc:sldChg chg="del">
-        <pc:chgData name="Virve Räni" userId="161a7437-7ef4-49ec-91bf-54882f313dfe" providerId="ADAL" clId="{6D754EED-65AA-4A21-B175-6769012CF487}" dt="2026-03-18T07:45:29.100" v="198" actId="47"/>
+      <pc:sldChg chg="add">
+        <pc:chgData name="Virve Räni" userId="161a7437-7ef4-49ec-91bf-54882f313dfe" providerId="ADAL" clId="{6D754EED-65AA-4A21-B175-6769012CF487}" dt="2026-04-14T07:59:42.079" v="308"/>
         <pc:sldMkLst>
           <pc:docMk/>
           <pc:sldMk cId="645017635" sldId="574"/>
@@ -232,22 +238,8 @@
           </ac:spMkLst>
         </pc:spChg>
       </pc:sldChg>
-      <pc:sldChg chg="del">
-        <pc:chgData name="Virve Räni" userId="161a7437-7ef4-49ec-91bf-54882f313dfe" providerId="ADAL" clId="{6D754EED-65AA-4A21-B175-6769012CF487}" dt="2026-03-18T07:09:21.196" v="151" actId="47"/>
-        <pc:sldMkLst>
-          <pc:docMk/>
-          <pc:sldMk cId="4166333113" sldId="643"/>
-        </pc:sldMkLst>
-      </pc:sldChg>
-      <pc:sldChg chg="del">
-        <pc:chgData name="Virve Räni" userId="161a7437-7ef4-49ec-91bf-54882f313dfe" providerId="ADAL" clId="{6D754EED-65AA-4A21-B175-6769012CF487}" dt="2026-03-18T07:11:23.421" v="154" actId="47"/>
-        <pc:sldMkLst>
-          <pc:docMk/>
-          <pc:sldMk cId="2066132299" sldId="644"/>
-        </pc:sldMkLst>
-      </pc:sldChg>
-      <pc:sldChg chg="del">
-        <pc:chgData name="Virve Räni" userId="161a7437-7ef4-49ec-91bf-54882f313dfe" providerId="ADAL" clId="{6D754EED-65AA-4A21-B175-6769012CF487}" dt="2026-03-18T07:45:31.134" v="200" actId="47"/>
+      <pc:sldChg chg="add">
+        <pc:chgData name="Virve Räni" userId="161a7437-7ef4-49ec-91bf-54882f313dfe" providerId="ADAL" clId="{6D754EED-65AA-4A21-B175-6769012CF487}" dt="2026-04-14T07:59:42.079" v="308"/>
         <pc:sldMkLst>
           <pc:docMk/>
           <pc:sldMk cId="1674079011" sldId="645"/>
@@ -265,6 +257,59 @@
             <pc:docMk/>
             <pc:sldMk cId="1871966603" sldId="647"/>
             <ac:spMk id="3" creationId="{0F58F04F-79CF-D596-2442-C7AA52CDBB45}"/>
+          </ac:spMkLst>
+        </pc:spChg>
+      </pc:sldChg>
+      <pc:sldChg chg="modSp new del mod">
+        <pc:chgData name="Virve Räni" userId="161a7437-7ef4-49ec-91bf-54882f313dfe" providerId="ADAL" clId="{6D754EED-65AA-4A21-B175-6769012CF487}" dt="2026-04-14T07:59:46.607" v="309" actId="47"/>
+        <pc:sldMkLst>
+          <pc:docMk/>
+          <pc:sldMk cId="3046746180" sldId="648"/>
+        </pc:sldMkLst>
+        <pc:spChg chg="mod">
+          <ac:chgData name="Virve Räni" userId="161a7437-7ef4-49ec-91bf-54882f313dfe" providerId="ADAL" clId="{6D754EED-65AA-4A21-B175-6769012CF487}" dt="2026-04-14T07:55:26.861" v="307" actId="20577"/>
+          <ac:spMkLst>
+            <pc:docMk/>
+            <pc:sldMk cId="3046746180" sldId="648"/>
+            <ac:spMk id="2" creationId="{6A72FBA8-9375-0A43-3A3A-3ADB365D7C58}"/>
+          </ac:spMkLst>
+        </pc:spChg>
+      </pc:sldChg>
+      <pc:sldChg chg="modSp add mod">
+        <pc:chgData name="Virve Räni" userId="161a7437-7ef4-49ec-91bf-54882f313dfe" providerId="ADAL" clId="{6D754EED-65AA-4A21-B175-6769012CF487}" dt="2026-04-14T07:55:19.380" v="284" actId="20577"/>
+        <pc:sldMkLst>
+          <pc:docMk/>
+          <pc:sldMk cId="3267241536" sldId="649"/>
+        </pc:sldMkLst>
+        <pc:spChg chg="mod">
+          <ac:chgData name="Virve Räni" userId="161a7437-7ef4-49ec-91bf-54882f313dfe" providerId="ADAL" clId="{6D754EED-65AA-4A21-B175-6769012CF487}" dt="2026-04-14T07:55:19.380" v="284" actId="20577"/>
+          <ac:spMkLst>
+            <pc:docMk/>
+            <pc:sldMk cId="3267241536" sldId="649"/>
+            <ac:spMk id="5" creationId="{F302593E-1699-CD76-2AB7-FB29D7F743E7}"/>
+          </ac:spMkLst>
+        </pc:spChg>
+      </pc:sldChg>
+      <pc:sldChg chg="modSp new mod">
+        <pc:chgData name="Virve Räni" userId="161a7437-7ef4-49ec-91bf-54882f313dfe" providerId="ADAL" clId="{6D754EED-65AA-4A21-B175-6769012CF487}" dt="2026-04-14T08:00:46.453" v="353" actId="255"/>
+        <pc:sldMkLst>
+          <pc:docMk/>
+          <pc:sldMk cId="1519353560" sldId="650"/>
+        </pc:sldMkLst>
+        <pc:spChg chg="mod">
+          <ac:chgData name="Virve Räni" userId="161a7437-7ef4-49ec-91bf-54882f313dfe" providerId="ADAL" clId="{6D754EED-65AA-4A21-B175-6769012CF487}" dt="2026-04-14T08:00:37.653" v="345" actId="20577"/>
+          <ac:spMkLst>
+            <pc:docMk/>
+            <pc:sldMk cId="1519353560" sldId="650"/>
+            <ac:spMk id="2" creationId="{A93AD8D0-6DB4-575E-917E-EF1716356808}"/>
+          </ac:spMkLst>
+        </pc:spChg>
+        <pc:spChg chg="mod">
+          <ac:chgData name="Virve Räni" userId="161a7437-7ef4-49ec-91bf-54882f313dfe" providerId="ADAL" clId="{6D754EED-65AA-4A21-B175-6769012CF487}" dt="2026-04-14T08:00:46.453" v="353" actId="255"/>
+          <ac:spMkLst>
+            <pc:docMk/>
+            <pc:sldMk cId="1519353560" sldId="650"/>
+            <ac:spMk id="3" creationId="{4A604898-1A89-32D0-7964-55457B42E945}"/>
           </ac:spMkLst>
         </pc:spChg>
       </pc:sldChg>
@@ -367,7 +412,7 @@
           <a:p>
             <a:fld id="{F9D2AD6E-DEDD-49A0-A4BE-7A081A9112DA}" type="datetimeFigureOut">
               <a:rPr lang="en-US" smtClean="0"/>
-              <a:t>3/18/2026</a:t>
+              <a:t>4/14/2026</a:t>
             </a:fld>
             <a:endParaRPr lang="en-US"/>
           </a:p>
@@ -543,7 +588,7 @@
           </a:lstStyle>
           <a:p>
             <a:fld id="{2AF9C1A6-4321-41FA-B001-4140F0E2457F}" type="datetimeFigureOut">
-              <a:t>18.03.2026</a:t>
+              <a:t>14.04.2026</a:t>
             </a:fld>
             <a:endParaRPr lang="en-US"/>
           </a:p>
@@ -4349,6 +4394,309 @@
 </p:notes>
 </file>
 
+<file path=ppt/notesSlides/notesSlide6.xml><?xml version="1.0" encoding="utf-8"?>
+<p:notes xmlns:a="http://schemas.openxmlformats.org/drawingml/2006/main" xmlns:r="http://schemas.openxmlformats.org/officeDocument/2006/relationships" xmlns:p="http://schemas.openxmlformats.org/presentationml/2006/main">
+  <p:cSld>
+    <p:spTree>
+      <p:nvGrpSpPr>
+        <p:cNvPr id="1" name="">
+          <a:extLst>
+            <a:ext uri="{FF2B5EF4-FFF2-40B4-BE49-F238E27FC236}">
+              <a16:creationId xmlns:a16="http://schemas.microsoft.com/office/drawing/2014/main" id="{BB8DA34C-149A-57A8-DCCE-482263E209E7}"/>
+            </a:ext>
+          </a:extLst>
+        </p:cNvPr>
+        <p:cNvGrpSpPr/>
+        <p:nvPr/>
+      </p:nvGrpSpPr>
+      <p:grpSpPr>
+        <a:xfrm>
+          <a:off x="0" y="0"/>
+          <a:ext cx="0" cy="0"/>
+          <a:chOff x="0" y="0"/>
+          <a:chExt cx="0" cy="0"/>
+        </a:xfrm>
+      </p:grpSpPr>
+      <p:sp>
+        <p:nvSpPr>
+          <p:cNvPr id="2" name="Slide Image Placeholder 1">
+            <a:extLst>
+              <a:ext uri="{FF2B5EF4-FFF2-40B4-BE49-F238E27FC236}">
+                <a16:creationId xmlns:a16="http://schemas.microsoft.com/office/drawing/2014/main" id="{0212C817-AC27-CA90-93C2-204C3230EB4F}"/>
+              </a:ext>
+            </a:extLst>
+          </p:cNvPr>
+          <p:cNvSpPr>
+            <a:spLocks noGrp="1" noRot="1" noChangeAspect="1"/>
+          </p:cNvSpPr>
+          <p:nvPr>
+            <p:ph type="sldImg"/>
+          </p:nvPr>
+        </p:nvSpPr>
+        <p:spPr/>
+      </p:sp>
+      <p:sp>
+        <p:nvSpPr>
+          <p:cNvPr id="3" name="Notes Placeholder 2">
+            <a:extLst>
+              <a:ext uri="{FF2B5EF4-FFF2-40B4-BE49-F238E27FC236}">
+                <a16:creationId xmlns:a16="http://schemas.microsoft.com/office/drawing/2014/main" id="{73FC1774-130A-2B62-BCFA-16A9E5D06680}"/>
+              </a:ext>
+            </a:extLst>
+          </p:cNvPr>
+          <p:cNvSpPr>
+            <a:spLocks noGrp="1"/>
+          </p:cNvSpPr>
+          <p:nvPr>
+            <p:ph type="body" idx="1"/>
+          </p:nvPr>
+        </p:nvSpPr>
+        <p:spPr/>
+        <p:txBody>
+          <a:bodyPr/>
+          <a:lstStyle/>
+          <a:p>
+            <a:r>
+              <a:rPr lang="en-US" err="1">
+                <a:ea typeface="Calibri"/>
+                <a:cs typeface="Calibri"/>
+              </a:rPr>
+              <a:t>Milleks</a:t>
+            </a:r>
+            <a:r>
+              <a:rPr lang="en-US">
+                <a:ea typeface="Calibri"/>
+                <a:cs typeface="Calibri"/>
+              </a:rPr>
+              <a:t> </a:t>
+            </a:r>
+            <a:r>
+              <a:rPr lang="en-US" err="1">
+                <a:ea typeface="Calibri"/>
+                <a:cs typeface="Calibri"/>
+              </a:rPr>
+              <a:t>vajalik</a:t>
+            </a:r>
+            <a:r>
+              <a:rPr lang="en-US">
+                <a:ea typeface="Calibri"/>
+                <a:cs typeface="Calibri"/>
+              </a:rPr>
+              <a:t>? - Nii </a:t>
+            </a:r>
+            <a:r>
+              <a:rPr lang="en-US" err="1">
+                <a:ea typeface="Calibri"/>
+                <a:cs typeface="Calibri"/>
+              </a:rPr>
+              <a:t>enda</a:t>
+            </a:r>
+            <a:r>
+              <a:rPr lang="en-US">
+                <a:ea typeface="Calibri"/>
+                <a:cs typeface="Calibri"/>
+              </a:rPr>
+              <a:t> </a:t>
+            </a:r>
+            <a:r>
+              <a:rPr lang="en-US" err="1">
+                <a:ea typeface="Calibri"/>
+                <a:cs typeface="Calibri"/>
+              </a:rPr>
+              <a:t>kui</a:t>
+            </a:r>
+            <a:r>
+              <a:rPr lang="en-US">
+                <a:ea typeface="Calibri"/>
+                <a:cs typeface="Calibri"/>
+              </a:rPr>
+              <a:t> ka </a:t>
+            </a:r>
+            <a:r>
+              <a:rPr lang="en-US" err="1">
+                <a:ea typeface="Calibri"/>
+                <a:cs typeface="Calibri"/>
+              </a:rPr>
+              <a:t>kolleegide</a:t>
+            </a:r>
+            <a:r>
+              <a:rPr lang="en-US">
+                <a:ea typeface="Calibri"/>
+                <a:cs typeface="Calibri"/>
+              </a:rPr>
+              <a:t> </a:t>
+            </a:r>
+            <a:r>
+              <a:rPr lang="en-US" err="1">
+                <a:ea typeface="Calibri"/>
+                <a:cs typeface="Calibri"/>
+              </a:rPr>
+              <a:t>jaoks</a:t>
+            </a:r>
+            <a:r>
+              <a:rPr lang="en-US">
+                <a:ea typeface="Calibri"/>
+                <a:cs typeface="Calibri"/>
+              </a:rPr>
+              <a:t> </a:t>
+            </a:r>
+            <a:r>
+              <a:rPr lang="en-US" err="1">
+                <a:ea typeface="Calibri"/>
+                <a:cs typeface="Calibri"/>
+              </a:rPr>
+              <a:t>kirjeldamine</a:t>
+            </a:r>
+            <a:r>
+              <a:rPr lang="en-US">
+                <a:ea typeface="Calibri"/>
+                <a:cs typeface="Calibri"/>
+              </a:rPr>
+              <a:t>, </a:t>
+            </a:r>
+            <a:r>
+              <a:rPr lang="en-US" err="1">
+                <a:ea typeface="Calibri"/>
+                <a:cs typeface="Calibri"/>
+              </a:rPr>
+              <a:t>teada</a:t>
+            </a:r>
+            <a:r>
+              <a:rPr lang="en-US">
+                <a:ea typeface="Calibri"/>
+                <a:cs typeface="Calibri"/>
+              </a:rPr>
+              <a:t>, et </a:t>
+            </a:r>
+            <a:r>
+              <a:rPr lang="en-US" err="1">
+                <a:ea typeface="Calibri"/>
+                <a:cs typeface="Calibri"/>
+              </a:rPr>
+              <a:t>miks</a:t>
+            </a:r>
+            <a:r>
+              <a:rPr lang="en-US">
+                <a:ea typeface="Calibri"/>
+                <a:cs typeface="Calibri"/>
+              </a:rPr>
+              <a:t> ja </a:t>
+            </a:r>
+            <a:r>
+              <a:rPr lang="en-US" err="1">
+                <a:ea typeface="Calibri"/>
+                <a:cs typeface="Calibri"/>
+              </a:rPr>
+              <a:t>kuidas</a:t>
+            </a:r>
+            <a:r>
+              <a:rPr lang="en-US">
+                <a:ea typeface="Calibri"/>
+                <a:cs typeface="Calibri"/>
+              </a:rPr>
+              <a:t> </a:t>
+            </a:r>
+            <a:r>
+              <a:rPr lang="en-US" err="1">
+                <a:ea typeface="Calibri"/>
+                <a:cs typeface="Calibri"/>
+              </a:rPr>
+              <a:t>mingeid</a:t>
+            </a:r>
+            <a:r>
+              <a:rPr lang="en-US">
+                <a:ea typeface="Calibri"/>
+                <a:cs typeface="Calibri"/>
+              </a:rPr>
+              <a:t> </a:t>
+            </a:r>
+            <a:r>
+              <a:rPr lang="en-US" err="1">
+                <a:ea typeface="Calibri"/>
+                <a:cs typeface="Calibri"/>
+              </a:rPr>
+              <a:t>otsuseid</a:t>
+            </a:r>
+            <a:r>
+              <a:rPr lang="en-US">
+                <a:ea typeface="Calibri"/>
+                <a:cs typeface="Calibri"/>
+              </a:rPr>
+              <a:t> ja </a:t>
+            </a:r>
+            <a:r>
+              <a:rPr lang="en-US" err="1">
+                <a:ea typeface="Calibri"/>
+                <a:cs typeface="Calibri"/>
+              </a:rPr>
+              <a:t>muutusi</a:t>
+            </a:r>
+            <a:r>
+              <a:rPr lang="en-US">
+                <a:ea typeface="Calibri"/>
+                <a:cs typeface="Calibri"/>
+              </a:rPr>
+              <a:t> on </a:t>
+            </a:r>
+            <a:r>
+              <a:rPr lang="en-US" err="1">
+                <a:ea typeface="Calibri"/>
+                <a:cs typeface="Calibri"/>
+              </a:rPr>
+              <a:t>tehtud</a:t>
+            </a:r>
+            <a:r>
+              <a:rPr lang="en-US">
+                <a:ea typeface="Calibri"/>
+                <a:cs typeface="Calibri"/>
+              </a:rPr>
+              <a:t>.</a:t>
+            </a:r>
+          </a:p>
+        </p:txBody>
+      </p:sp>
+      <p:sp>
+        <p:nvSpPr>
+          <p:cNvPr id="4" name="Slide Number Placeholder 3">
+            <a:extLst>
+              <a:ext uri="{FF2B5EF4-FFF2-40B4-BE49-F238E27FC236}">
+                <a16:creationId xmlns:a16="http://schemas.microsoft.com/office/drawing/2014/main" id="{D12428F6-B692-59EB-721A-51F223C670DE}"/>
+              </a:ext>
+            </a:extLst>
+          </p:cNvPr>
+          <p:cNvSpPr>
+            <a:spLocks noGrp="1"/>
+          </p:cNvSpPr>
+          <p:nvPr>
+            <p:ph type="sldNum" sz="quarter" idx="5"/>
+          </p:nvPr>
+        </p:nvSpPr>
+        <p:spPr/>
+        <p:txBody>
+          <a:bodyPr/>
+          <a:lstStyle/>
+          <a:p>
+            <a:fld id="{46699514-027B-49BD-8B49-5054CA40ECF4}" type="slidenum">
+              <a:rPr lang="en-US"/>
+              <a:t>25</a:t>
+            </a:fld>
+            <a:endParaRPr lang="en-US"/>
+          </a:p>
+        </p:txBody>
+      </p:sp>
+    </p:spTree>
+    <p:extLst>
+      <p:ext uri="{BB962C8B-B14F-4D97-AF65-F5344CB8AC3E}">
+        <p14:creationId xmlns:p14="http://schemas.microsoft.com/office/powerpoint/2010/main" val="540613206"/>
+      </p:ext>
+    </p:extLst>
+  </p:cSld>
+  <p:clrMapOvr>
+    <a:masterClrMapping/>
+  </p:clrMapOvr>
+</p:notes>
+</file>
+
 <file path=ppt/slideLayouts/slideLayout1.xml><?xml version="1.0" encoding="utf-8"?>
 <p:sldLayout xmlns:a="http://schemas.openxmlformats.org/drawingml/2006/main" xmlns:r="http://schemas.openxmlformats.org/officeDocument/2006/relationships" xmlns:p="http://schemas.openxmlformats.org/presentationml/2006/main" preserve="1" userDrawn="1">
   <p:cSld name="Title_Large_Light">
@@ -4389,10 +4737,10 @@
           <p:nvPr userDrawn="1"/>
         </p:nvPicPr>
         <p:blipFill>
-          <a:blip r:embed="rId2">
+          <a:blip>
             <a:extLst>
               <a:ext uri="{96DAC541-7B7A-43D3-8B79-37D633B846F1}">
-                <asvg:svgBlip xmlns:asvg="http://schemas.microsoft.com/office/drawing/2016/SVG/main" r:embed="rId3"/>
+                <asvg:svgBlip xmlns:asvg="http://schemas.microsoft.com/office/drawing/2016/SVG/main" r:embed="rId2"/>
               </a:ext>
             </a:extLst>
           </a:blip>
@@ -13950,10 +14298,10 @@
             <a:ext cx="810000" cy="320400"/>
           </a:xfrm>
           <a:blipFill>
-            <a:blip r:embed="rId2">
+            <a:blip>
               <a:extLst>
                 <a:ext uri="{96DAC541-7B7A-43D3-8B79-37D633B846F1}">
-                  <asvg:svgBlip xmlns:asvg="http://schemas.microsoft.com/office/drawing/2016/SVG/main" r:embed="rId3"/>
+                  <asvg:svgBlip xmlns:asvg="http://schemas.microsoft.com/office/drawing/2016/SVG/main" r:embed="rId2"/>
                 </a:ext>
               </a:extLst>
             </a:blip>
@@ -15232,10 +15580,10 @@
             <a:ext cx="810000" cy="320400"/>
           </a:xfrm>
           <a:blipFill>
-            <a:blip r:embed="rId2">
+            <a:blip>
               <a:extLst>
                 <a:ext uri="{96DAC541-7B7A-43D3-8B79-37D633B846F1}">
-                  <asvg:svgBlip xmlns:asvg="http://schemas.microsoft.com/office/drawing/2016/SVG/main" r:embed="rId3"/>
+                  <asvg:svgBlip xmlns:asvg="http://schemas.microsoft.com/office/drawing/2016/SVG/main" r:embed="rId2"/>
                 </a:ext>
               </a:extLst>
             </a:blip>
@@ -15476,7 +15824,7 @@
           <a:p>
             <a:fld id="{DE840A40-73C8-4048-8140-49F5D65BB431}" type="datetimeFigureOut">
               <a:rPr lang="et-EE" smtClean="0"/>
-              <a:t>18.03.2026</a:t>
+              <a:t>14.04.2026</a:t>
             </a:fld>
             <a:endParaRPr lang="et-EE"/>
           </a:p>
@@ -15589,10 +15937,10 @@
           <p:nvPr userDrawn="1"/>
         </p:nvPicPr>
         <p:blipFill>
-          <a:blip r:embed="rId2">
+          <a:blip>
             <a:extLst>
               <a:ext uri="{96DAC541-7B7A-43D3-8B79-37D633B846F1}">
-                <asvg:svgBlip xmlns:asvg="http://schemas.microsoft.com/office/drawing/2016/SVG/main" r:embed="rId3"/>
+                <asvg:svgBlip xmlns:asvg="http://schemas.microsoft.com/office/drawing/2016/SVG/main" r:embed="rId2"/>
               </a:ext>
             </a:extLst>
           </a:blip>
@@ -22571,10 +22919,10 @@
             <a:ext cx="2302064" cy="927536"/>
           </a:xfrm>
           <a:blipFill>
-            <a:blip r:embed="rId2">
+            <a:blip>
               <a:extLst>
                 <a:ext uri="{96DAC541-7B7A-43D3-8B79-37D633B846F1}">
-                  <asvg:svgBlip xmlns:asvg="http://schemas.microsoft.com/office/drawing/2016/SVG/main" r:embed="rId3"/>
+                  <asvg:svgBlip xmlns:asvg="http://schemas.microsoft.com/office/drawing/2016/SVG/main" r:embed="rId2"/>
                 </a:ext>
               </a:extLst>
             </a:blip>
@@ -22757,10 +23105,10 @@
           <p:nvPr userDrawn="1"/>
         </p:nvPicPr>
         <p:blipFill>
-          <a:blip r:embed="rId2">
+          <a:blip>
             <a:extLst>
               <a:ext uri="{96DAC541-7B7A-43D3-8B79-37D633B846F1}">
-                <asvg:svgBlip xmlns:asvg="http://schemas.microsoft.com/office/drawing/2016/SVG/main" r:embed="rId3"/>
+                <asvg:svgBlip xmlns:asvg="http://schemas.microsoft.com/office/drawing/2016/SVG/main" r:embed="rId2"/>
               </a:ext>
             </a:extLst>
           </a:blip>
@@ -23491,10 +23839,10 @@
           <p:nvPr userDrawn="1"/>
         </p:nvPicPr>
         <p:blipFill>
-          <a:blip r:embed="rId2">
+          <a:blip>
             <a:extLst>
               <a:ext uri="{96DAC541-7B7A-43D3-8B79-37D633B846F1}">
-                <asvg:svgBlip xmlns:asvg="http://schemas.microsoft.com/office/drawing/2016/SVG/main" r:embed="rId3"/>
+                <asvg:svgBlip xmlns:asvg="http://schemas.microsoft.com/office/drawing/2016/SVG/main" r:embed="rId2"/>
               </a:ext>
             </a:extLst>
           </a:blip>
@@ -24280,10 +24628,10 @@
             <a:ext cx="810000" cy="320400"/>
           </a:xfrm>
           <a:blipFill>
-            <a:blip r:embed="rId2">
+            <a:blip>
               <a:extLst>
                 <a:ext uri="{96DAC541-7B7A-43D3-8B79-37D633B846F1}">
-                  <asvg:svgBlip xmlns:asvg="http://schemas.microsoft.com/office/drawing/2016/SVG/main" r:embed="rId3"/>
+                  <asvg:svgBlip xmlns:asvg="http://schemas.microsoft.com/office/drawing/2016/SVG/main" r:embed="rId2"/>
                 </a:ext>
               </a:extLst>
             </a:blip>
@@ -37221,7 +37569,7 @@
             <p:ph sz="quarter" idx="10"/>
             <p:extLst>
               <p:ext uri="{D42A27DB-BD31-4B8C-83A1-F6EECF244321}">
-                <p14:modId xmlns:p14="http://schemas.microsoft.com/office/powerpoint/2010/main" val="1587955701"/>
+                <p14:modId xmlns:p14="http://schemas.microsoft.com/office/powerpoint/2010/main" val="578815032"/>
               </p:ext>
             </p:extLst>
           </p:nvPr>
@@ -37701,25 +38049,22 @@
                           <a:effectLst/>
                           <a:latin typeface="Inter"/>
                         </a:rPr>
-                        <a:t>13:15 – 14:45 – Koolitus – </a:t>
+                        <a:t>13:15 – 15:15 – Koolitus – Kristina </a:t>
                       </a:r>
                       <a:r>
-                        <a:rPr lang="en-US" sz="2400" b="0" i="0" dirty="0" err="1">
+                        <a:rPr lang="et-EE" sz="2400" dirty="0"/>
+                        <a:t>Korobova </a:t>
+                      </a:r>
+                      <a:r>
+                        <a:rPr lang="en-US" sz="2400" b="0" i="0" dirty="0">
                           <a:solidFill>
                             <a:srgbClr val="121212"/>
                           </a:solidFill>
                           <a:effectLst/>
                           <a:latin typeface="Inter"/>
                         </a:rPr>
-                        <a:t>Külalisesineja</a:t>
+                        <a:t>(Bolt)</a:t>
                       </a:r>
-                      <a:endParaRPr lang="en-US" sz="2400" b="0" i="0" dirty="0">
-                        <a:solidFill>
-                          <a:srgbClr val="121212"/>
-                        </a:solidFill>
-                        <a:effectLst/>
-                        <a:latin typeface="Inter"/>
-                      </a:endParaRPr>
                     </a:p>
                   </a:txBody>
                   <a:tcPr marL="99060" marR="99060" marT="49530" marB="49530" anchor="ctr">
@@ -37789,7 +38134,7 @@
                           <a:effectLst/>
                           <a:latin typeface="Inter"/>
                         </a:rPr>
-                        <a:t>14:45 – 15:00 – Paus </a:t>
+                        <a:t>15:15 – 15:30 – Paus </a:t>
                       </a:r>
                       <a:endParaRPr lang="en-US" b="0" i="0" dirty="0">
                         <a:solidFill>
@@ -37867,7 +38212,7 @@
                           <a:effectLst/>
                           <a:latin typeface="Inter"/>
                         </a:rPr>
-                        <a:t>15:00 – 16:30 – Koolitus – </a:t>
+                        <a:t>15:30 – 16:30 – Koolitus – </a:t>
                       </a:r>
                       <a:r>
                         <a:rPr lang="en-US" sz="2400" b="0" i="0" dirty="0" err="1">
@@ -37877,7 +38222,47 @@
                           <a:effectLst/>
                           <a:latin typeface="Inter"/>
                         </a:rPr>
-                        <a:t>Külalisesineja</a:t>
+                        <a:t>Lõputööde</a:t>
+                      </a:r>
+                      <a:r>
+                        <a:rPr lang="en-US" sz="2400" b="0" i="0" dirty="0">
+                          <a:solidFill>
+                            <a:srgbClr val="121212"/>
+                          </a:solidFill>
+                          <a:effectLst/>
+                          <a:latin typeface="Inter"/>
+                        </a:rPr>
+                        <a:t> </a:t>
+                      </a:r>
+                      <a:r>
+                        <a:rPr lang="en-US" sz="2400" b="0" i="0" dirty="0" err="1">
+                          <a:solidFill>
+                            <a:srgbClr val="121212"/>
+                          </a:solidFill>
+                          <a:effectLst/>
+                          <a:latin typeface="Inter"/>
+                        </a:rPr>
+                        <a:t>projektidega</a:t>
+                      </a:r>
+                      <a:r>
+                        <a:rPr lang="en-US" sz="2400" b="0" i="0" dirty="0">
+                          <a:solidFill>
+                            <a:srgbClr val="121212"/>
+                          </a:solidFill>
+                          <a:effectLst/>
+                          <a:latin typeface="Inter"/>
+                        </a:rPr>
+                        <a:t> </a:t>
+                      </a:r>
+                      <a:r>
+                        <a:rPr lang="en-US" sz="2400" b="0" i="0" dirty="0" err="1">
+                          <a:solidFill>
+                            <a:srgbClr val="121212"/>
+                          </a:solidFill>
+                          <a:effectLst/>
+                          <a:latin typeface="Inter"/>
+                        </a:rPr>
+                        <a:t>alustamine</a:t>
                       </a:r>
                       <a:endParaRPr lang="en-US" sz="2400" b="0" i="0" dirty="0">
                         <a:solidFill>
@@ -38146,6 +38531,2460 @@
     <p:extLst>
       <p:ext uri="{BB962C8B-B14F-4D97-AF65-F5344CB8AC3E}">
         <p14:creationId xmlns:p14="http://schemas.microsoft.com/office/powerpoint/2010/main" val="1871966603"/>
+      </p:ext>
+    </p:extLst>
+  </p:cSld>
+  <p:clrMapOvr>
+    <a:masterClrMapping/>
+  </p:clrMapOvr>
+</p:sld>
+</file>
+
+<file path=ppt/slides/slide22.xml><?xml version="1.0" encoding="utf-8"?>
+<p:sld xmlns:a="http://schemas.openxmlformats.org/drawingml/2006/main" xmlns:r="http://schemas.openxmlformats.org/officeDocument/2006/relationships" xmlns:p="http://schemas.openxmlformats.org/presentationml/2006/main">
+  <p:cSld>
+    <p:spTree>
+      <p:nvGrpSpPr>
+        <p:cNvPr id="1" name="">
+          <a:extLst>
+            <a:ext uri="{FF2B5EF4-FFF2-40B4-BE49-F238E27FC236}">
+              <a16:creationId xmlns:a16="http://schemas.microsoft.com/office/drawing/2014/main" id="{A0AAEDE8-4802-6D47-FC8C-0D71004BFD9B}"/>
+            </a:ext>
+          </a:extLst>
+        </p:cNvPr>
+        <p:cNvGrpSpPr/>
+        <p:nvPr/>
+      </p:nvGrpSpPr>
+      <p:grpSpPr>
+        <a:xfrm>
+          <a:off x="0" y="0"/>
+          <a:ext cx="0" cy="0"/>
+          <a:chOff x="0" y="0"/>
+          <a:chExt cx="0" cy="0"/>
+        </a:xfrm>
+      </p:grpSpPr>
+      <p:sp>
+        <p:nvSpPr>
+          <p:cNvPr id="3" name="Content Placeholder 2">
+            <a:extLst>
+              <a:ext uri="{FF2B5EF4-FFF2-40B4-BE49-F238E27FC236}">
+                <a16:creationId xmlns:a16="http://schemas.microsoft.com/office/drawing/2014/main" id="{EDBF3FF4-C04B-25BA-46AE-8BE14DC04A1D}"/>
+              </a:ext>
+            </a:extLst>
+          </p:cNvPr>
+          <p:cNvSpPr>
+            <a:spLocks noGrp="1"/>
+          </p:cNvSpPr>
+          <p:nvPr>
+            <p:ph sz="quarter" idx="10"/>
+          </p:nvPr>
+        </p:nvSpPr>
+        <p:spPr/>
+        <p:txBody>
+          <a:bodyPr/>
+          <a:lstStyle/>
+          <a:p>
+            <a:pPr marL="0" indent="0">
+              <a:lnSpc>
+                <a:spcPct val="150000"/>
+              </a:lnSpc>
+              <a:buNone/>
+            </a:pPr>
+            <a:endParaRPr lang="en-US" sz="2800">
+              <a:ea typeface="Inter"/>
+            </a:endParaRPr>
+          </a:p>
+          <a:p>
+            <a:pPr marL="457200" lvl="1" indent="0">
+              <a:lnSpc>
+                <a:spcPct val="150000"/>
+              </a:lnSpc>
+              <a:buNone/>
+            </a:pPr>
+            <a:endParaRPr lang="en-US" sz="2000">
+              <a:ea typeface="Inter"/>
+            </a:endParaRPr>
+          </a:p>
+        </p:txBody>
+      </p:sp>
+      <p:sp>
+        <p:nvSpPr>
+          <p:cNvPr id="5" name="Title 4">
+            <a:extLst>
+              <a:ext uri="{FF2B5EF4-FFF2-40B4-BE49-F238E27FC236}">
+                <a16:creationId xmlns:a16="http://schemas.microsoft.com/office/drawing/2014/main" id="{F302593E-1699-CD76-2AB7-FB29D7F743E7}"/>
+              </a:ext>
+            </a:extLst>
+          </p:cNvPr>
+          <p:cNvSpPr>
+            <a:spLocks noGrp="1"/>
+          </p:cNvSpPr>
+          <p:nvPr>
+            <p:ph type="ctrTitle"/>
+          </p:nvPr>
+        </p:nvSpPr>
+        <p:spPr>
+          <a:xfrm>
+            <a:off x="3461336" y="2675333"/>
+            <a:ext cx="6575007" cy="357043"/>
+          </a:xfrm>
+        </p:spPr>
+        <p:txBody>
+          <a:bodyPr/>
+          <a:lstStyle/>
+          <a:p>
+            <a:r>
+              <a:rPr lang="en-US" dirty="0"/>
+              <a:t>Paus 15:15-15:30</a:t>
+            </a:r>
+          </a:p>
+        </p:txBody>
+      </p:sp>
+    </p:spTree>
+    <p:extLst>
+      <p:ext uri="{BB962C8B-B14F-4D97-AF65-F5344CB8AC3E}">
+        <p14:creationId xmlns:p14="http://schemas.microsoft.com/office/powerpoint/2010/main" val="3267241536"/>
+      </p:ext>
+    </p:extLst>
+  </p:cSld>
+  <p:clrMapOvr>
+    <a:masterClrMapping/>
+  </p:clrMapOvr>
+</p:sld>
+</file>
+
+<file path=ppt/slides/slide23.xml><?xml version="1.0" encoding="utf-8"?>
+<p:sld xmlns:a="http://schemas.openxmlformats.org/drawingml/2006/main" xmlns:r="http://schemas.openxmlformats.org/officeDocument/2006/relationships" xmlns:p="http://schemas.openxmlformats.org/presentationml/2006/main">
+  <p:cSld>
+    <p:spTree>
+      <p:nvGrpSpPr>
+        <p:cNvPr id="1" name="">
+          <a:extLst>
+            <a:ext uri="{FF2B5EF4-FFF2-40B4-BE49-F238E27FC236}">
+              <a16:creationId xmlns:a16="http://schemas.microsoft.com/office/drawing/2014/main" id="{15FF916F-3A2C-85BA-9906-09B4A79C0272}"/>
+            </a:ext>
+          </a:extLst>
+        </p:cNvPr>
+        <p:cNvGrpSpPr/>
+        <p:nvPr/>
+      </p:nvGrpSpPr>
+      <p:grpSpPr>
+        <a:xfrm>
+          <a:off x="0" y="0"/>
+          <a:ext cx="0" cy="0"/>
+          <a:chOff x="0" y="0"/>
+          <a:chExt cx="0" cy="0"/>
+        </a:xfrm>
+      </p:grpSpPr>
+      <p:sp>
+        <p:nvSpPr>
+          <p:cNvPr id="2" name="Title 1">
+            <a:extLst>
+              <a:ext uri="{FF2B5EF4-FFF2-40B4-BE49-F238E27FC236}">
+                <a16:creationId xmlns:a16="http://schemas.microsoft.com/office/drawing/2014/main" id="{D4725537-CB3E-C083-F8A7-F00B6AE12D6E}"/>
+              </a:ext>
+            </a:extLst>
+          </p:cNvPr>
+          <p:cNvSpPr>
+            <a:spLocks noGrp="1"/>
+          </p:cNvSpPr>
+          <p:nvPr>
+            <p:ph type="ctrTitle"/>
+          </p:nvPr>
+        </p:nvSpPr>
+        <p:spPr>
+          <a:xfrm>
+            <a:off x="614923" y="479570"/>
+            <a:ext cx="10044112" cy="357043"/>
+          </a:xfrm>
+        </p:spPr>
+        <p:txBody>
+          <a:bodyPr/>
+          <a:lstStyle/>
+          <a:p>
+            <a:r>
+              <a:rPr lang="en-US" b="1" err="1"/>
+              <a:t>Grupitöö</a:t>
+            </a:r>
+            <a:r>
+              <a:rPr lang="en-US" b="1"/>
+              <a:t> </a:t>
+            </a:r>
+            <a:r>
+              <a:rPr lang="en-US" b="1" err="1"/>
+              <a:t>osad</a:t>
+            </a:r>
+            <a:endParaRPr lang="en-US" err="1"/>
+          </a:p>
+        </p:txBody>
+      </p:sp>
+      <p:sp>
+        <p:nvSpPr>
+          <p:cNvPr id="3" name="Content Placeholder 2">
+            <a:extLst>
+              <a:ext uri="{FF2B5EF4-FFF2-40B4-BE49-F238E27FC236}">
+                <a16:creationId xmlns:a16="http://schemas.microsoft.com/office/drawing/2014/main" id="{721CFECB-31FC-C645-D35E-8C1758638C04}"/>
+              </a:ext>
+            </a:extLst>
+          </p:cNvPr>
+          <p:cNvSpPr>
+            <a:spLocks noGrp="1"/>
+          </p:cNvSpPr>
+          <p:nvPr>
+            <p:ph sz="quarter" idx="10"/>
+          </p:nvPr>
+        </p:nvSpPr>
+        <p:spPr/>
+        <p:txBody>
+          <a:bodyPr/>
+          <a:lstStyle/>
+          <a:p>
+            <a:pPr marL="457200" indent="-457200">
+              <a:lnSpc>
+                <a:spcPct val="150000"/>
+              </a:lnSpc>
+              <a:buAutoNum type="arabicPeriod"/>
+            </a:pPr>
+            <a:r>
+              <a:rPr lang="en-US" sz="2000" err="1">
+                <a:ea typeface="Inter"/>
+                <a:cs typeface="Noto Serif"/>
+              </a:rPr>
+              <a:t>Ettevõtte</a:t>
+            </a:r>
+            <a:r>
+              <a:rPr lang="en-US" sz="2000">
+                <a:ea typeface="Inter"/>
+                <a:cs typeface="Noto Serif"/>
+              </a:rPr>
+              <a:t> ja </a:t>
+            </a:r>
+            <a:r>
+              <a:rPr lang="en-US" sz="2000" err="1">
+                <a:ea typeface="Inter"/>
+                <a:cs typeface="Noto Serif"/>
+              </a:rPr>
+              <a:t>uurimisprobleemi</a:t>
+            </a:r>
+            <a:r>
+              <a:rPr lang="en-US" sz="2000">
+                <a:ea typeface="Inter"/>
+                <a:cs typeface="Noto Serif"/>
+              </a:rPr>
+              <a:t> </a:t>
+            </a:r>
+            <a:r>
+              <a:rPr lang="en-US" sz="2000" err="1">
+                <a:ea typeface="Inter"/>
+                <a:cs typeface="Noto Serif"/>
+              </a:rPr>
+              <a:t>tutvustus</a:t>
+            </a:r>
+            <a:endParaRPr lang="en-US" sz="2000" err="1">
+              <a:cs typeface="Noto Serif"/>
+            </a:endParaRPr>
+          </a:p>
+          <a:p>
+            <a:pPr marL="457200" indent="-457200">
+              <a:lnSpc>
+                <a:spcPct val="150000"/>
+              </a:lnSpc>
+              <a:buClr>
+                <a:srgbClr val="121212"/>
+              </a:buClr>
+              <a:buAutoNum type="arabicPeriod"/>
+            </a:pPr>
+            <a:r>
+              <a:rPr lang="en-US" sz="2000" err="1">
+                <a:ea typeface="Inter"/>
+                <a:cs typeface="Noto Serif"/>
+              </a:rPr>
+              <a:t>Uurimisplaan</a:t>
+            </a:r>
+            <a:endParaRPr lang="en-US" sz="2000" err="1">
+              <a:cs typeface="Noto Serif"/>
+            </a:endParaRPr>
+          </a:p>
+          <a:p>
+            <a:pPr marL="457200" indent="-457200">
+              <a:lnSpc>
+                <a:spcPct val="150000"/>
+              </a:lnSpc>
+              <a:buClr>
+                <a:srgbClr val="121212"/>
+              </a:buClr>
+              <a:buAutoNum type="arabicPeriod"/>
+            </a:pPr>
+            <a:r>
+              <a:rPr lang="en-US" sz="2000" err="1">
+                <a:ea typeface="Inter"/>
+                <a:cs typeface="Noto Serif"/>
+              </a:rPr>
+              <a:t>Andmekaitse</a:t>
+            </a:r>
+            <a:r>
+              <a:rPr lang="en-US" sz="2000">
+                <a:ea typeface="Inter"/>
+                <a:cs typeface="Noto Serif"/>
+              </a:rPr>
+              <a:t> </a:t>
+            </a:r>
+            <a:r>
+              <a:rPr lang="en-US" sz="2000" err="1">
+                <a:ea typeface="Inter"/>
+                <a:cs typeface="Noto Serif"/>
+              </a:rPr>
+              <a:t>kirjeldus</a:t>
+            </a:r>
+            <a:r>
+              <a:rPr lang="en-US" sz="2000">
+                <a:ea typeface="Inter"/>
+                <a:cs typeface="Noto Serif"/>
+              </a:rPr>
+              <a:t> – mis </a:t>
+            </a:r>
+            <a:r>
+              <a:rPr lang="en-US" sz="2000" err="1">
+                <a:ea typeface="Inter"/>
+                <a:cs typeface="Noto Serif"/>
+              </a:rPr>
+              <a:t>alustel</a:t>
+            </a:r>
+            <a:r>
+              <a:rPr lang="en-US" sz="2000">
+                <a:ea typeface="Inter"/>
+                <a:cs typeface="Noto Serif"/>
+              </a:rPr>
+              <a:t> </a:t>
+            </a:r>
+            <a:r>
+              <a:rPr lang="en-US" sz="2000" err="1">
+                <a:ea typeface="Inter"/>
+                <a:cs typeface="Noto Serif"/>
+              </a:rPr>
+              <a:t>andmeid</a:t>
+            </a:r>
+            <a:r>
+              <a:rPr lang="en-US" sz="2000">
+                <a:ea typeface="Inter"/>
+                <a:cs typeface="Noto Serif"/>
+              </a:rPr>
+              <a:t> </a:t>
+            </a:r>
+            <a:r>
+              <a:rPr lang="en-US" sz="2000" err="1">
+                <a:ea typeface="Inter"/>
+                <a:cs typeface="Noto Serif"/>
+              </a:rPr>
+              <a:t>töödeldakse</a:t>
+            </a:r>
+            <a:r>
+              <a:rPr lang="en-US" sz="2000">
+                <a:ea typeface="Inter"/>
+                <a:cs typeface="Noto Serif"/>
+              </a:rPr>
+              <a:t>?</a:t>
+            </a:r>
+            <a:endParaRPr lang="en-US" sz="2000">
+              <a:cs typeface="Noto Serif"/>
+            </a:endParaRPr>
+          </a:p>
+          <a:p>
+            <a:pPr marL="457200" indent="-457200">
+              <a:lnSpc>
+                <a:spcPct val="150000"/>
+              </a:lnSpc>
+              <a:buClr>
+                <a:srgbClr val="121212"/>
+              </a:buClr>
+              <a:buAutoNum type="arabicPeriod"/>
+            </a:pPr>
+            <a:r>
+              <a:rPr lang="en-US" sz="2000" err="1">
+                <a:ea typeface="Inter"/>
+                <a:cs typeface="Noto Serif"/>
+              </a:rPr>
+              <a:t>Ärisõnastik</a:t>
+            </a:r>
+            <a:r>
+              <a:rPr lang="en-US" sz="2000">
+                <a:ea typeface="Inter"/>
+                <a:cs typeface="Noto Serif"/>
+              </a:rPr>
+              <a:t>, </a:t>
+            </a:r>
+            <a:r>
+              <a:rPr lang="en-US" sz="2000" err="1">
+                <a:ea typeface="Inter"/>
+                <a:cs typeface="Noto Serif"/>
+              </a:rPr>
+              <a:t>andmemudel</a:t>
+            </a:r>
+            <a:r>
+              <a:rPr lang="en-US" sz="2000">
+                <a:ea typeface="Inter"/>
+                <a:cs typeface="Noto Serif"/>
+              </a:rPr>
+              <a:t>, </a:t>
+            </a:r>
+            <a:r>
+              <a:rPr lang="en-US" sz="2000" err="1">
+                <a:ea typeface="Inter"/>
+                <a:cs typeface="Noto Serif"/>
+              </a:rPr>
+              <a:t>andmesõnastik</a:t>
+            </a:r>
+            <a:endParaRPr lang="en-US" sz="2000" err="1">
+              <a:cs typeface="Noto Serif"/>
+            </a:endParaRPr>
+          </a:p>
+          <a:p>
+            <a:pPr marL="457200" indent="-457200">
+              <a:lnSpc>
+                <a:spcPct val="150000"/>
+              </a:lnSpc>
+              <a:buClr>
+                <a:srgbClr val="121212"/>
+              </a:buClr>
+              <a:buAutoNum type="arabicPeriod"/>
+            </a:pPr>
+            <a:r>
+              <a:rPr lang="en-US" sz="2000" err="1">
+                <a:ea typeface="Inter"/>
+                <a:cs typeface="Noto Serif"/>
+              </a:rPr>
+              <a:t>Andmevoog</a:t>
+            </a:r>
+            <a:endParaRPr lang="en-US" sz="2000" err="1">
+              <a:cs typeface="Noto Serif"/>
+            </a:endParaRPr>
+          </a:p>
+          <a:p>
+            <a:pPr marL="457200" indent="-457200">
+              <a:lnSpc>
+                <a:spcPct val="150000"/>
+              </a:lnSpc>
+              <a:buClr>
+                <a:srgbClr val="121212"/>
+              </a:buClr>
+              <a:buAutoNum type="arabicPeriod"/>
+            </a:pPr>
+            <a:r>
+              <a:rPr lang="en-US" sz="2000" err="1">
+                <a:ea typeface="Inter"/>
+                <a:cs typeface="Noto Serif"/>
+              </a:rPr>
+              <a:t>Näidisandmestiku</a:t>
+            </a:r>
+            <a:r>
+              <a:rPr lang="en-US" sz="2000">
+                <a:ea typeface="Inter"/>
+                <a:cs typeface="Noto Serif"/>
+              </a:rPr>
+              <a:t> </a:t>
+            </a:r>
+            <a:r>
+              <a:rPr lang="en-US" sz="2000" err="1">
+                <a:ea typeface="Inter"/>
+                <a:cs typeface="Noto Serif"/>
+              </a:rPr>
+              <a:t>loomine</a:t>
+            </a:r>
+            <a:endParaRPr lang="en-US" sz="2000" err="1">
+              <a:cs typeface="Noto Serif"/>
+            </a:endParaRPr>
+          </a:p>
+          <a:p>
+            <a:pPr marL="457200" indent="-457200">
+              <a:lnSpc>
+                <a:spcPct val="150000"/>
+              </a:lnSpc>
+              <a:buClr>
+                <a:srgbClr val="121212"/>
+              </a:buClr>
+              <a:buAutoNum type="arabicPeriod"/>
+            </a:pPr>
+            <a:r>
+              <a:rPr lang="en-US" sz="2000" err="1">
+                <a:ea typeface="Inter"/>
+                <a:cs typeface="Noto Serif"/>
+              </a:rPr>
+              <a:t>Andmete</a:t>
+            </a:r>
+            <a:r>
+              <a:rPr lang="en-US" sz="2000">
+                <a:ea typeface="Inter"/>
+                <a:cs typeface="Noto Serif"/>
+              </a:rPr>
+              <a:t> </a:t>
+            </a:r>
+            <a:r>
+              <a:rPr lang="en-US" sz="2000" err="1">
+                <a:ea typeface="Inter"/>
+                <a:cs typeface="Noto Serif"/>
+              </a:rPr>
+              <a:t>kvaliteedi</a:t>
+            </a:r>
+            <a:r>
+              <a:rPr lang="en-US" sz="2000">
+                <a:ea typeface="Inter"/>
+                <a:cs typeface="Noto Serif"/>
+              </a:rPr>
+              <a:t> </a:t>
+            </a:r>
+            <a:r>
+              <a:rPr lang="en-US" sz="2000" err="1">
+                <a:ea typeface="Inter"/>
+                <a:cs typeface="Noto Serif"/>
+              </a:rPr>
+              <a:t>kontroll</a:t>
+            </a:r>
+            <a:endParaRPr lang="en-US" sz="2000">
+              <a:cs typeface="Noto Serif"/>
+            </a:endParaRPr>
+          </a:p>
+          <a:p>
+            <a:pPr marL="457200" indent="-457200">
+              <a:lnSpc>
+                <a:spcPct val="150000"/>
+              </a:lnSpc>
+              <a:buClr>
+                <a:srgbClr val="121212"/>
+              </a:buClr>
+              <a:buAutoNum type="arabicPeriod"/>
+            </a:pPr>
+            <a:r>
+              <a:rPr lang="en-US" sz="2000" err="1">
+                <a:ea typeface="Inter"/>
+                <a:cs typeface="Noto Serif"/>
+              </a:rPr>
+              <a:t>Andmete</a:t>
+            </a:r>
+            <a:r>
+              <a:rPr lang="en-US" sz="2000">
+                <a:ea typeface="Inter"/>
+                <a:cs typeface="Noto Serif"/>
+              </a:rPr>
+              <a:t> </a:t>
+            </a:r>
+            <a:r>
+              <a:rPr lang="en-US" sz="2000" err="1">
+                <a:ea typeface="Inter"/>
+                <a:cs typeface="Noto Serif"/>
+              </a:rPr>
+              <a:t>eksploratiivne</a:t>
+            </a:r>
+            <a:r>
+              <a:rPr lang="en-US" sz="2000">
+                <a:ea typeface="Inter"/>
+                <a:cs typeface="Noto Serif"/>
+              </a:rPr>
+              <a:t> </a:t>
+            </a:r>
+            <a:r>
+              <a:rPr lang="en-US" sz="2000" err="1">
+                <a:ea typeface="Inter"/>
+                <a:cs typeface="Noto Serif"/>
+              </a:rPr>
+              <a:t>analüüs</a:t>
+            </a:r>
+            <a:endParaRPr lang="en-US" sz="2000">
+              <a:cs typeface="Noto Serif"/>
+            </a:endParaRPr>
+          </a:p>
+          <a:p>
+            <a:pPr marL="457200" indent="-457200">
+              <a:lnSpc>
+                <a:spcPct val="150000"/>
+              </a:lnSpc>
+              <a:buClr>
+                <a:srgbClr val="121212"/>
+              </a:buClr>
+              <a:buAutoNum type="arabicPeriod"/>
+            </a:pPr>
+            <a:r>
+              <a:rPr lang="en-US" sz="2000" err="1">
+                <a:ea typeface="Inter"/>
+                <a:cs typeface="Noto Serif"/>
+              </a:rPr>
+              <a:t>Andmete</a:t>
+            </a:r>
+            <a:r>
+              <a:rPr lang="en-US" sz="2000">
+                <a:ea typeface="Inter"/>
+                <a:cs typeface="Noto Serif"/>
+              </a:rPr>
+              <a:t> </a:t>
+            </a:r>
+            <a:r>
+              <a:rPr lang="en-US" sz="2000" err="1">
+                <a:ea typeface="Inter"/>
+                <a:cs typeface="Noto Serif"/>
+              </a:rPr>
+              <a:t>statistiline</a:t>
+            </a:r>
+            <a:r>
+              <a:rPr lang="en-US" sz="2000">
+                <a:ea typeface="Inter"/>
+                <a:cs typeface="Noto Serif"/>
+              </a:rPr>
+              <a:t> </a:t>
+            </a:r>
+            <a:r>
+              <a:rPr lang="en-US" sz="2000" err="1">
+                <a:ea typeface="Inter"/>
+                <a:cs typeface="Noto Serif"/>
+              </a:rPr>
+              <a:t>analüüs</a:t>
+            </a:r>
+            <a:endParaRPr lang="en-US" sz="2000" err="1">
+              <a:cs typeface="Noto Serif"/>
+            </a:endParaRPr>
+          </a:p>
+          <a:p>
+            <a:pPr marL="457200" indent="-457200">
+              <a:lnSpc>
+                <a:spcPct val="150000"/>
+              </a:lnSpc>
+              <a:buClr>
+                <a:srgbClr val="121212"/>
+              </a:buClr>
+              <a:buAutoNum type="arabicPeriod"/>
+            </a:pPr>
+            <a:r>
+              <a:rPr lang="en-US" sz="2000" err="1">
+                <a:ea typeface="Inter"/>
+                <a:cs typeface="Noto Serif"/>
+              </a:rPr>
+              <a:t>Kirjeldav</a:t>
+            </a:r>
+            <a:r>
+              <a:rPr lang="en-US" sz="2000">
+                <a:ea typeface="Inter"/>
+                <a:cs typeface="Noto Serif"/>
+              </a:rPr>
+              <a:t> </a:t>
+            </a:r>
+            <a:r>
+              <a:rPr lang="en-US" sz="2000" err="1">
+                <a:ea typeface="Inter"/>
+                <a:cs typeface="Noto Serif"/>
+              </a:rPr>
+              <a:t>raport</a:t>
+            </a:r>
+            <a:r>
+              <a:rPr lang="en-US" sz="2000">
+                <a:ea typeface="Inter"/>
+                <a:cs typeface="Noto Serif"/>
+              </a:rPr>
+              <a:t> / </a:t>
+            </a:r>
+            <a:r>
+              <a:rPr lang="en-US" sz="2000" err="1">
+                <a:ea typeface="Inter"/>
+                <a:cs typeface="Noto Serif"/>
+              </a:rPr>
+              <a:t>analüüs</a:t>
+            </a:r>
+            <a:endParaRPr lang="en-US" sz="2000" err="1">
+              <a:cs typeface="Noto Serif"/>
+            </a:endParaRPr>
+          </a:p>
+          <a:p>
+            <a:pPr marL="457200" indent="-457200">
+              <a:lnSpc>
+                <a:spcPct val="150000"/>
+              </a:lnSpc>
+              <a:buClr>
+                <a:srgbClr val="121212"/>
+              </a:buClr>
+              <a:buAutoNum type="arabicPeriod"/>
+            </a:pPr>
+            <a:r>
+              <a:rPr lang="en-US" sz="2000" err="1">
+                <a:ea typeface="Inter"/>
+                <a:cs typeface="Noto Serif"/>
+              </a:rPr>
+              <a:t>Andmelugu</a:t>
+            </a:r>
+            <a:r>
+              <a:rPr lang="en-US" sz="2000">
+                <a:ea typeface="Inter"/>
+                <a:cs typeface="Noto Serif"/>
+              </a:rPr>
+              <a:t>, </a:t>
+            </a:r>
+            <a:r>
+              <a:rPr lang="en-US" sz="2000" err="1">
+                <a:ea typeface="Inter"/>
+                <a:cs typeface="Noto Serif"/>
+              </a:rPr>
+              <a:t>järeldused</a:t>
+            </a:r>
+            <a:endParaRPr lang="en-US" sz="2000" err="1">
+              <a:cs typeface="Noto Serif"/>
+            </a:endParaRPr>
+          </a:p>
+          <a:p>
+            <a:pPr marL="342900" indent="-342900">
+              <a:lnSpc>
+                <a:spcPct val="150000"/>
+              </a:lnSpc>
+              <a:buClr>
+                <a:srgbClr val="121212"/>
+              </a:buClr>
+              <a:buFont typeface="Inter" panose="020B0502030000000004" pitchFamily="34" charset="0"/>
+              <a:buAutoNum type="arabicPeriod"/>
+            </a:pPr>
+            <a:endParaRPr lang="en-US" sz="2400">
+              <a:cs typeface="Noto Serif"/>
+            </a:endParaRPr>
+          </a:p>
+          <a:p>
+            <a:pPr marL="342900" indent="-342900">
+              <a:lnSpc>
+                <a:spcPct val="150000"/>
+              </a:lnSpc>
+              <a:buClr>
+                <a:srgbClr val="121212"/>
+              </a:buClr>
+              <a:buFont typeface="Inter" panose="020B0502030000000004" pitchFamily="34" charset="0"/>
+              <a:buAutoNum type="arabicPeriod"/>
+            </a:pPr>
+            <a:endParaRPr lang="en-US" sz="2400">
+              <a:cs typeface="Arial"/>
+            </a:endParaRPr>
+          </a:p>
+          <a:p>
+            <a:pPr marL="857250" lvl="1" indent="-342900">
+              <a:lnSpc>
+                <a:spcPct val="150000"/>
+              </a:lnSpc>
+              <a:buFont typeface="Arial,Sans-Serif" panose="020B0502030000000004" pitchFamily="34" charset="0"/>
+              <a:buChar char="o"/>
+            </a:pPr>
+            <a:endParaRPr lang="en-US" sz="2400">
+              <a:cs typeface="Arial"/>
+            </a:endParaRPr>
+          </a:p>
+          <a:p>
+            <a:pPr marL="342900" indent="-342900">
+              <a:lnSpc>
+                <a:spcPct val="150000"/>
+              </a:lnSpc>
+              <a:buAutoNum type="arabicPeriod"/>
+            </a:pPr>
+            <a:endParaRPr lang="en-US" sz="2400">
+              <a:cs typeface="Arial"/>
+            </a:endParaRPr>
+          </a:p>
+          <a:p>
+            <a:pPr marL="514350" indent="-514350">
+              <a:lnSpc>
+                <a:spcPct val="150000"/>
+              </a:lnSpc>
+              <a:buAutoNum type="arabicPeriod"/>
+            </a:pPr>
+            <a:endParaRPr lang="en-US" sz="2800">
+              <a:cs typeface="Arial"/>
+            </a:endParaRPr>
+          </a:p>
+          <a:p>
+            <a:pPr marL="0" indent="0">
+              <a:lnSpc>
+                <a:spcPct val="150000"/>
+              </a:lnSpc>
+              <a:buNone/>
+            </a:pPr>
+            <a:endParaRPr lang="en-US" sz="2800"/>
+          </a:p>
+        </p:txBody>
+      </p:sp>
+    </p:spTree>
+    <p:extLst>
+      <p:ext uri="{BB962C8B-B14F-4D97-AF65-F5344CB8AC3E}">
+        <p14:creationId xmlns:p14="http://schemas.microsoft.com/office/powerpoint/2010/main" val="645017635"/>
+      </p:ext>
+    </p:extLst>
+  </p:cSld>
+  <p:clrMapOvr>
+    <a:masterClrMapping/>
+  </p:clrMapOvr>
+</p:sld>
+</file>
+
+<file path=ppt/slides/slide24.xml><?xml version="1.0" encoding="utf-8"?>
+<p:sld xmlns:a="http://schemas.openxmlformats.org/drawingml/2006/main" xmlns:r="http://schemas.openxmlformats.org/officeDocument/2006/relationships" xmlns:p="http://schemas.openxmlformats.org/presentationml/2006/main">
+  <p:cSld>
+    <p:spTree>
+      <p:nvGrpSpPr>
+        <p:cNvPr id="1" name="">
+          <a:extLst>
+            <a:ext uri="{FF2B5EF4-FFF2-40B4-BE49-F238E27FC236}">
+              <a16:creationId xmlns:a16="http://schemas.microsoft.com/office/drawing/2014/main" id="{8ED024B8-E587-E3FE-2649-C69E942C14B4}"/>
+            </a:ext>
+          </a:extLst>
+        </p:cNvPr>
+        <p:cNvGrpSpPr/>
+        <p:nvPr/>
+      </p:nvGrpSpPr>
+      <p:grpSpPr>
+        <a:xfrm>
+          <a:off x="0" y="0"/>
+          <a:ext cx="0" cy="0"/>
+          <a:chOff x="0" y="0"/>
+          <a:chExt cx="0" cy="0"/>
+        </a:xfrm>
+      </p:grpSpPr>
+      <p:sp>
+        <p:nvSpPr>
+          <p:cNvPr id="2" name="Title 1">
+            <a:extLst>
+              <a:ext uri="{FF2B5EF4-FFF2-40B4-BE49-F238E27FC236}">
+                <a16:creationId xmlns:a16="http://schemas.microsoft.com/office/drawing/2014/main" id="{EF462382-376F-D403-218E-FAD6D454E702}"/>
+              </a:ext>
+            </a:extLst>
+          </p:cNvPr>
+          <p:cNvSpPr>
+            <a:spLocks noGrp="1"/>
+          </p:cNvSpPr>
+          <p:nvPr>
+            <p:ph type="ctrTitle"/>
+          </p:nvPr>
+        </p:nvSpPr>
+        <p:spPr>
+          <a:xfrm>
+            <a:off x="614923" y="479570"/>
+            <a:ext cx="10044112" cy="357043"/>
+          </a:xfrm>
+        </p:spPr>
+        <p:txBody>
+          <a:bodyPr/>
+          <a:lstStyle/>
+          <a:p>
+            <a:r>
+              <a:rPr lang="en-US" b="1" dirty="0" err="1"/>
+              <a:t>Grupitöö</a:t>
+            </a:r>
+            <a:r>
+              <a:rPr lang="en-US" b="1" dirty="0"/>
+              <a:t> - GitHub</a:t>
+            </a:r>
+            <a:endParaRPr lang="en-US" dirty="0"/>
+          </a:p>
+        </p:txBody>
+      </p:sp>
+      <p:sp>
+        <p:nvSpPr>
+          <p:cNvPr id="3" name="Content Placeholder 2">
+            <a:extLst>
+              <a:ext uri="{FF2B5EF4-FFF2-40B4-BE49-F238E27FC236}">
+                <a16:creationId xmlns:a16="http://schemas.microsoft.com/office/drawing/2014/main" id="{16CF7352-F93B-EE31-220C-F9E2EC9BDA2D}"/>
+              </a:ext>
+            </a:extLst>
+          </p:cNvPr>
+          <p:cNvSpPr>
+            <a:spLocks noGrp="1"/>
+          </p:cNvSpPr>
+          <p:nvPr>
+            <p:ph sz="quarter" idx="10"/>
+          </p:nvPr>
+        </p:nvSpPr>
+        <p:spPr/>
+        <p:txBody>
+          <a:bodyPr/>
+          <a:lstStyle/>
+          <a:p>
+            <a:pPr marL="342900" indent="-342900">
+              <a:lnSpc>
+                <a:spcPct val="150000"/>
+              </a:lnSpc>
+              <a:buFont typeface="Arial,Sans-Serif" panose="020B0502030000000004" pitchFamily="34" charset="0"/>
+              <a:buChar char="•"/>
+            </a:pPr>
+            <a:r>
+              <a:rPr lang="en-US" sz="2400" dirty="0" err="1">
+                <a:ea typeface="Inter"/>
+                <a:cs typeface="Noto Serif"/>
+              </a:rPr>
+              <a:t>Looge</a:t>
+            </a:r>
+            <a:r>
+              <a:rPr lang="en-US" sz="2400" dirty="0">
+                <a:ea typeface="Inter"/>
+                <a:cs typeface="Noto Serif"/>
+              </a:rPr>
+              <a:t> </a:t>
+            </a:r>
+            <a:r>
+              <a:rPr lang="en-US" sz="2400" dirty="0" err="1">
+                <a:ea typeface="Inter"/>
+                <a:cs typeface="Noto Serif"/>
+              </a:rPr>
+              <a:t>Githubi</a:t>
+            </a:r>
+            <a:r>
+              <a:rPr lang="en-US" sz="2400" dirty="0">
+                <a:ea typeface="Inter"/>
+                <a:cs typeface="Noto Serif"/>
+              </a:rPr>
+              <a:t> </a:t>
+            </a:r>
+            <a:r>
+              <a:rPr lang="en-US" sz="2400" dirty="0" err="1">
+                <a:ea typeface="Inter"/>
+                <a:cs typeface="Noto Serif"/>
+              </a:rPr>
+              <a:t>projekt</a:t>
+            </a:r>
+            <a:r>
+              <a:rPr lang="en-US" sz="2400" dirty="0">
+                <a:ea typeface="Inter"/>
+                <a:cs typeface="Noto Serif"/>
+              </a:rPr>
+              <a:t> – </a:t>
+            </a:r>
+            <a:r>
+              <a:rPr lang="en-US" sz="2400" dirty="0" err="1">
+                <a:ea typeface="Inter"/>
+                <a:cs typeface="Noto Serif"/>
+              </a:rPr>
+              <a:t>avalik</a:t>
+            </a:r>
+            <a:r>
+              <a:rPr lang="en-US" sz="2400" dirty="0">
+                <a:ea typeface="Inter"/>
+                <a:cs typeface="Noto Serif"/>
+              </a:rPr>
+              <a:t> repository </a:t>
+            </a:r>
+            <a:r>
+              <a:rPr lang="en-US" sz="2400" dirty="0" err="1">
+                <a:ea typeface="Inter"/>
+                <a:cs typeface="Noto Serif"/>
+              </a:rPr>
+              <a:t>mõne</a:t>
+            </a:r>
+            <a:r>
+              <a:rPr lang="en-US" sz="2400" dirty="0">
+                <a:ea typeface="Inter"/>
+                <a:cs typeface="Noto Serif"/>
+              </a:rPr>
+              <a:t> </a:t>
+            </a:r>
+            <a:r>
+              <a:rPr lang="en-US" sz="2400" dirty="0" err="1">
+                <a:ea typeface="Inter"/>
+                <a:cs typeface="Noto Serif"/>
+              </a:rPr>
+              <a:t>grupiliikme</a:t>
+            </a:r>
+            <a:r>
+              <a:rPr lang="en-US" sz="2400" dirty="0">
+                <a:ea typeface="Inter"/>
+                <a:cs typeface="Noto Serif"/>
+              </a:rPr>
+              <a:t> </a:t>
+            </a:r>
+            <a:r>
+              <a:rPr lang="en-US" sz="2400" dirty="0" err="1">
+                <a:ea typeface="Inter"/>
+                <a:cs typeface="Noto Serif"/>
+              </a:rPr>
+              <a:t>Githubis</a:t>
+            </a:r>
+            <a:endParaRPr lang="en-US" sz="2400" dirty="0">
+              <a:ea typeface="Inter"/>
+              <a:cs typeface="Noto Serif"/>
+            </a:endParaRPr>
+          </a:p>
+          <a:p>
+            <a:pPr marL="342900" indent="-342900">
+              <a:lnSpc>
+                <a:spcPct val="150000"/>
+              </a:lnSpc>
+              <a:buFont typeface="Arial,Sans-Serif" panose="020B0502030000000004" pitchFamily="34" charset="0"/>
+              <a:buChar char="•"/>
+            </a:pPr>
+            <a:r>
+              <a:rPr lang="en-US" sz="2400" dirty="0" err="1">
+                <a:ea typeface="Inter"/>
+                <a:cs typeface="Noto Serif"/>
+              </a:rPr>
+              <a:t>Lisage</a:t>
+            </a:r>
+            <a:r>
+              <a:rPr lang="en-US" sz="2400" dirty="0">
+                <a:ea typeface="Inter"/>
+                <a:cs typeface="Noto Serif"/>
+              </a:rPr>
+              <a:t> </a:t>
+            </a:r>
+            <a:r>
+              <a:rPr lang="en-US" sz="2400" dirty="0" err="1">
+                <a:ea typeface="Inter"/>
+                <a:cs typeface="Noto Serif"/>
+              </a:rPr>
+              <a:t>teised</a:t>
+            </a:r>
+            <a:r>
+              <a:rPr lang="en-US" sz="2400" dirty="0">
+                <a:ea typeface="Inter"/>
+                <a:cs typeface="Noto Serif"/>
+              </a:rPr>
+              <a:t> </a:t>
+            </a:r>
+            <a:r>
+              <a:rPr lang="en-US" sz="2400" dirty="0" err="1">
+                <a:ea typeface="Inter"/>
+                <a:cs typeface="Noto Serif"/>
+              </a:rPr>
+              <a:t>grupiliikmed</a:t>
+            </a:r>
+            <a:r>
+              <a:rPr lang="en-US" sz="2400" dirty="0">
+                <a:ea typeface="Inter"/>
+                <a:cs typeface="Noto Serif"/>
+              </a:rPr>
+              <a:t> Collaborators </a:t>
+            </a:r>
+            <a:r>
+              <a:rPr lang="en-US" sz="2400" dirty="0" err="1">
+                <a:ea typeface="Inter"/>
+                <a:cs typeface="Noto Serif"/>
+              </a:rPr>
+              <a:t>alla</a:t>
+            </a:r>
+            <a:endParaRPr lang="en-US" dirty="0">
+              <a:cs typeface="Noto Serif"/>
+            </a:endParaRPr>
+          </a:p>
+          <a:p>
+            <a:pPr marL="342900" indent="-342900">
+              <a:lnSpc>
+                <a:spcPct val="150000"/>
+              </a:lnSpc>
+              <a:buClr>
+                <a:srgbClr val="121212"/>
+              </a:buClr>
+              <a:buFont typeface="Arial,Sans-Serif" panose="020B0502030000000004" pitchFamily="34" charset="0"/>
+              <a:buChar char="•"/>
+            </a:pPr>
+            <a:r>
+              <a:rPr lang="en-US" sz="2400" dirty="0">
+                <a:ea typeface="Inter"/>
+                <a:cs typeface="Noto Serif"/>
+              </a:rPr>
+              <a:t>Clone repository </a:t>
+            </a:r>
+            <a:r>
+              <a:rPr lang="en-US" sz="2400" dirty="0" err="1">
+                <a:ea typeface="Inter"/>
+                <a:cs typeface="Noto Serif"/>
+              </a:rPr>
+              <a:t>oma</a:t>
+            </a:r>
+            <a:r>
+              <a:rPr lang="en-US" sz="2400" dirty="0">
+                <a:ea typeface="Inter"/>
+                <a:cs typeface="Noto Serif"/>
+              </a:rPr>
+              <a:t> </a:t>
+            </a:r>
+            <a:r>
+              <a:rPr lang="en-US" sz="2400" dirty="0" err="1">
+                <a:ea typeface="Inter"/>
+                <a:cs typeface="Noto Serif"/>
+              </a:rPr>
+              <a:t>kohalikku</a:t>
+            </a:r>
+            <a:r>
+              <a:rPr lang="en-US" sz="2400" dirty="0">
+                <a:ea typeface="Inter"/>
+                <a:cs typeface="Noto Serif"/>
+              </a:rPr>
+              <a:t> </a:t>
+            </a:r>
+            <a:r>
+              <a:rPr lang="en-US" sz="2400" dirty="0" err="1">
+                <a:ea typeface="Inter"/>
+                <a:cs typeface="Noto Serif"/>
+              </a:rPr>
+              <a:t>arvutisse</a:t>
+            </a:r>
+            <a:endParaRPr lang="en-US" sz="2400" dirty="0" err="1">
+              <a:cs typeface="Noto Serif"/>
+            </a:endParaRPr>
+          </a:p>
+          <a:p>
+            <a:pPr marL="342900" indent="-342900">
+              <a:lnSpc>
+                <a:spcPct val="150000"/>
+              </a:lnSpc>
+              <a:buClr>
+                <a:srgbClr val="121212"/>
+              </a:buClr>
+              <a:buFont typeface="Arial,Sans-Serif" panose="020B0502030000000004" pitchFamily="34" charset="0"/>
+              <a:buChar char="•"/>
+            </a:pPr>
+            <a:r>
+              <a:rPr lang="en-US" sz="2400" dirty="0" err="1">
+                <a:ea typeface="Inter"/>
+                <a:cs typeface="Noto Serif"/>
+              </a:rPr>
+              <a:t>Leppige</a:t>
+            </a:r>
+            <a:r>
+              <a:rPr lang="en-US" sz="2400" dirty="0">
+                <a:ea typeface="Inter"/>
+                <a:cs typeface="Noto Serif"/>
+              </a:rPr>
+              <a:t> </a:t>
+            </a:r>
+            <a:r>
+              <a:rPr lang="en-US" sz="2400" dirty="0" err="1">
+                <a:ea typeface="Inter"/>
+                <a:cs typeface="Noto Serif"/>
+              </a:rPr>
+              <a:t>kokku</a:t>
+            </a:r>
+            <a:r>
+              <a:rPr lang="en-US" sz="2400" dirty="0">
+                <a:ea typeface="Inter"/>
+                <a:cs typeface="Noto Serif"/>
+              </a:rPr>
+              <a:t>, </a:t>
+            </a:r>
+            <a:r>
+              <a:rPr lang="en-US" sz="2400" dirty="0" err="1">
+                <a:ea typeface="Inter"/>
+                <a:cs typeface="Noto Serif"/>
+              </a:rPr>
+              <a:t>kuidas</a:t>
+            </a:r>
+            <a:r>
+              <a:rPr lang="en-US" sz="2400" dirty="0">
+                <a:ea typeface="Inter"/>
+                <a:cs typeface="Noto Serif"/>
+              </a:rPr>
+              <a:t> </a:t>
+            </a:r>
+            <a:r>
+              <a:rPr lang="en-US" sz="2400" dirty="0" err="1">
+                <a:ea typeface="Inter"/>
+                <a:cs typeface="Noto Serif"/>
+              </a:rPr>
+              <a:t>muutusi</a:t>
+            </a:r>
+            <a:r>
+              <a:rPr lang="en-US" sz="2400" dirty="0">
+                <a:ea typeface="Inter"/>
+                <a:cs typeface="Noto Serif"/>
+              </a:rPr>
+              <a:t> </a:t>
+            </a:r>
+            <a:r>
+              <a:rPr lang="en-US" sz="2400" dirty="0" err="1">
+                <a:ea typeface="Inter"/>
+                <a:cs typeface="Noto Serif"/>
+              </a:rPr>
+              <a:t>üles</a:t>
+            </a:r>
+            <a:r>
+              <a:rPr lang="en-US" sz="2400" dirty="0">
+                <a:ea typeface="Inter"/>
+                <a:cs typeface="Noto Serif"/>
+              </a:rPr>
+              <a:t> </a:t>
+            </a:r>
+            <a:r>
+              <a:rPr lang="en-US" sz="2400" dirty="0" err="1">
+                <a:ea typeface="Inter"/>
+                <a:cs typeface="Noto Serif"/>
+              </a:rPr>
+              <a:t>laete</a:t>
+            </a:r>
+            <a:endParaRPr lang="en-US" sz="2400" dirty="0" err="1">
+              <a:cs typeface="Noto Serif"/>
+            </a:endParaRPr>
+          </a:p>
+          <a:p>
+            <a:pPr marL="857250" lvl="1" indent="-342900">
+              <a:lnSpc>
+                <a:spcPct val="150000"/>
+              </a:lnSpc>
+              <a:buFont typeface="Arial,Sans-Serif" panose="020B0502030000000004" pitchFamily="34" charset="0"/>
+              <a:buChar char="o"/>
+            </a:pPr>
+            <a:r>
+              <a:rPr lang="en-US" sz="2400" dirty="0" err="1">
+                <a:ea typeface="Inter"/>
+                <a:cs typeface="Noto Serif"/>
+              </a:rPr>
+              <a:t>Nt</a:t>
+            </a:r>
+            <a:r>
+              <a:rPr lang="en-US" sz="2400" dirty="0">
+                <a:ea typeface="Inter"/>
+                <a:cs typeface="Noto Serif"/>
+              </a:rPr>
+              <a:t> </a:t>
+            </a:r>
+            <a:r>
+              <a:rPr lang="en-US" sz="2400" dirty="0" err="1">
+                <a:ea typeface="Inter"/>
+                <a:cs typeface="Noto Serif"/>
+              </a:rPr>
+              <a:t>iga</a:t>
+            </a:r>
+            <a:r>
+              <a:rPr lang="en-US" sz="2400" dirty="0">
+                <a:ea typeface="Inter"/>
+                <a:cs typeface="Noto Serif"/>
+              </a:rPr>
+              <a:t> </a:t>
+            </a:r>
+            <a:r>
+              <a:rPr lang="en-US" sz="2400" dirty="0" err="1">
+                <a:ea typeface="Inter"/>
+                <a:cs typeface="Noto Serif"/>
+              </a:rPr>
+              <a:t>uue</a:t>
+            </a:r>
+            <a:r>
+              <a:rPr lang="en-US" sz="2400" dirty="0">
+                <a:ea typeface="Inter"/>
+                <a:cs typeface="Noto Serif"/>
+              </a:rPr>
+              <a:t> </a:t>
+            </a:r>
+            <a:r>
+              <a:rPr lang="en-US" sz="2400" dirty="0" err="1">
+                <a:ea typeface="Inter"/>
+                <a:cs typeface="Noto Serif"/>
+              </a:rPr>
+              <a:t>funktsionaalsuse</a:t>
+            </a:r>
+            <a:r>
+              <a:rPr lang="en-US" sz="2400" dirty="0">
+                <a:ea typeface="Inter"/>
+                <a:cs typeface="Noto Serif"/>
+              </a:rPr>
+              <a:t> </a:t>
+            </a:r>
+            <a:r>
+              <a:rPr lang="en-US" sz="2400" dirty="0" err="1">
+                <a:ea typeface="Inter"/>
+                <a:cs typeface="Noto Serif"/>
+              </a:rPr>
+              <a:t>jaoks</a:t>
+            </a:r>
+            <a:r>
+              <a:rPr lang="en-US" sz="2400" dirty="0">
+                <a:ea typeface="Inter"/>
+                <a:cs typeface="Noto Serif"/>
+              </a:rPr>
+              <a:t> </a:t>
+            </a:r>
+            <a:r>
+              <a:rPr lang="en-US" sz="2400" dirty="0" err="1">
+                <a:ea typeface="Inter"/>
+                <a:cs typeface="Noto Serif"/>
+              </a:rPr>
+              <a:t>eraldi</a:t>
+            </a:r>
+            <a:r>
+              <a:rPr lang="en-US" sz="2400" dirty="0">
+                <a:ea typeface="Inter"/>
+                <a:cs typeface="Noto Serif"/>
+              </a:rPr>
+              <a:t> "feature/..." Branch</a:t>
+            </a:r>
+            <a:endParaRPr lang="en-US" sz="2400" dirty="0">
+              <a:cs typeface="Noto Serif"/>
+            </a:endParaRPr>
+          </a:p>
+          <a:p>
+            <a:pPr marL="857250" lvl="1" indent="-342900">
+              <a:lnSpc>
+                <a:spcPct val="150000"/>
+              </a:lnSpc>
+              <a:buFont typeface="Arial,Sans-Serif" panose="020B0502030000000004" pitchFamily="34" charset="0"/>
+              <a:buChar char="o"/>
+            </a:pPr>
+            <a:r>
+              <a:rPr lang="en-US" sz="2400" dirty="0">
+                <a:ea typeface="Inter"/>
+                <a:cs typeface="Noto Serif"/>
+              </a:rPr>
+              <a:t>Kui </a:t>
+            </a:r>
+            <a:r>
+              <a:rPr lang="en-US" sz="2400" dirty="0" err="1">
+                <a:ea typeface="Inter"/>
+                <a:cs typeface="Noto Serif"/>
+              </a:rPr>
+              <a:t>iga</a:t>
+            </a:r>
+            <a:r>
+              <a:rPr lang="en-US" sz="2400" dirty="0">
+                <a:ea typeface="Inter"/>
+                <a:cs typeface="Noto Serif"/>
+              </a:rPr>
+              <a:t> </a:t>
+            </a:r>
+            <a:r>
+              <a:rPr lang="en-US" sz="2400" dirty="0" err="1">
+                <a:ea typeface="Inter"/>
+                <a:cs typeface="Noto Serif"/>
+              </a:rPr>
+              <a:t>funktsionaalsuse</a:t>
+            </a:r>
+            <a:r>
+              <a:rPr lang="en-US" sz="2400" dirty="0">
+                <a:ea typeface="Inter"/>
+                <a:cs typeface="Noto Serif"/>
+              </a:rPr>
+              <a:t> </a:t>
+            </a:r>
+            <a:r>
+              <a:rPr lang="en-US" sz="2400" dirty="0" err="1">
+                <a:ea typeface="Inter"/>
+                <a:cs typeface="Noto Serif"/>
+              </a:rPr>
+              <a:t>jaoks</a:t>
+            </a:r>
+            <a:r>
+              <a:rPr lang="en-US" sz="2400" dirty="0">
+                <a:ea typeface="Inter"/>
+                <a:cs typeface="Noto Serif"/>
+              </a:rPr>
+              <a:t> </a:t>
+            </a:r>
+            <a:r>
+              <a:rPr lang="en-US" sz="2400" dirty="0" err="1">
+                <a:ea typeface="Inter"/>
+                <a:cs typeface="Noto Serif"/>
+              </a:rPr>
+              <a:t>eraldi</a:t>
+            </a:r>
+            <a:r>
+              <a:rPr lang="en-US" sz="2400" dirty="0">
+                <a:ea typeface="Inter"/>
+                <a:cs typeface="Noto Serif"/>
+              </a:rPr>
+              <a:t> branch, </a:t>
+            </a:r>
+            <a:r>
+              <a:rPr lang="en-US" sz="2400" dirty="0" err="1">
+                <a:ea typeface="Inter"/>
+                <a:cs typeface="Noto Serif"/>
+              </a:rPr>
+              <a:t>siis</a:t>
+            </a:r>
+            <a:r>
+              <a:rPr lang="en-US" sz="2400" dirty="0">
+                <a:ea typeface="Inter"/>
+                <a:cs typeface="Noto Serif"/>
+              </a:rPr>
+              <a:t> </a:t>
+            </a:r>
+            <a:r>
+              <a:rPr lang="en-US" sz="2400" dirty="0" err="1">
+                <a:ea typeface="Inter"/>
+                <a:cs typeface="Noto Serif"/>
+              </a:rPr>
+              <a:t>pärast</a:t>
+            </a:r>
+            <a:r>
+              <a:rPr lang="en-US" sz="2400" dirty="0">
+                <a:ea typeface="Inter"/>
+                <a:cs typeface="Noto Serif"/>
+              </a:rPr>
+              <a:t> Pull </a:t>
+            </a:r>
+            <a:r>
+              <a:rPr lang="en-US" sz="2400" dirty="0" err="1">
+                <a:ea typeface="Inter"/>
+                <a:cs typeface="Noto Serif"/>
+              </a:rPr>
+              <a:t>Request'I</a:t>
+            </a:r>
+            <a:r>
+              <a:rPr lang="en-US" sz="2400" dirty="0">
+                <a:ea typeface="Inter"/>
+                <a:cs typeface="Noto Serif"/>
+              </a:rPr>
+              <a:t> </a:t>
+            </a:r>
+            <a:r>
+              <a:rPr lang="en-US" sz="2400" dirty="0" err="1">
+                <a:ea typeface="Inter"/>
+                <a:cs typeface="Noto Serif"/>
+              </a:rPr>
+              <a:t>kustutada</a:t>
+            </a:r>
+            <a:r>
+              <a:rPr lang="en-US" sz="2400" dirty="0">
+                <a:ea typeface="Inter"/>
+                <a:cs typeface="Noto Serif"/>
+              </a:rPr>
+              <a:t> feature branch</a:t>
+            </a:r>
+            <a:endParaRPr lang="en-US" sz="2400" dirty="0">
+              <a:cs typeface="Noto Serif"/>
+            </a:endParaRPr>
+          </a:p>
+          <a:p>
+            <a:pPr marL="342900" indent="-342900">
+              <a:lnSpc>
+                <a:spcPct val="150000"/>
+              </a:lnSpc>
+              <a:buClr>
+                <a:srgbClr val="121212"/>
+              </a:buClr>
+              <a:buFont typeface="Arial,Sans-Serif" panose="020B0502030000000004" pitchFamily="34" charset="0"/>
+              <a:buChar char="•"/>
+            </a:pPr>
+            <a:endParaRPr lang="en-US" sz="2400" dirty="0">
+              <a:cs typeface="Noto Serif"/>
+            </a:endParaRPr>
+          </a:p>
+          <a:p>
+            <a:pPr marL="342900" indent="-342900">
+              <a:lnSpc>
+                <a:spcPct val="150000"/>
+              </a:lnSpc>
+              <a:buClr>
+                <a:srgbClr val="121212"/>
+              </a:buClr>
+              <a:buFont typeface="Arial,Sans-Serif" panose="020B0502030000000004" pitchFamily="34" charset="0"/>
+              <a:buChar char="•"/>
+            </a:pPr>
+            <a:endParaRPr lang="en-US" sz="2400" dirty="0">
+              <a:cs typeface="Arial"/>
+            </a:endParaRPr>
+          </a:p>
+          <a:p>
+            <a:pPr marL="857250" lvl="1" indent="-342900">
+              <a:lnSpc>
+                <a:spcPct val="150000"/>
+              </a:lnSpc>
+              <a:buFont typeface="Arial,Sans-Serif" panose="020B0502030000000004" pitchFamily="34" charset="0"/>
+              <a:buChar char="o"/>
+            </a:pPr>
+            <a:endParaRPr lang="en-US" sz="2400" dirty="0">
+              <a:cs typeface="Arial"/>
+            </a:endParaRPr>
+          </a:p>
+          <a:p>
+            <a:pPr marL="342900" indent="-342900">
+              <a:lnSpc>
+                <a:spcPct val="150000"/>
+              </a:lnSpc>
+              <a:buFont typeface="Arial,Sans-Serif" panose="020B0502030000000004" pitchFamily="34" charset="0"/>
+              <a:buChar char="•"/>
+            </a:pPr>
+            <a:endParaRPr lang="en-US" sz="2400" dirty="0">
+              <a:cs typeface="Arial"/>
+            </a:endParaRPr>
+          </a:p>
+          <a:p>
+            <a:pPr marL="514350" indent="-514350">
+              <a:lnSpc>
+                <a:spcPct val="150000"/>
+              </a:lnSpc>
+            </a:pPr>
+            <a:endParaRPr lang="en-US" sz="2800" dirty="0">
+              <a:cs typeface="Arial"/>
+            </a:endParaRPr>
+          </a:p>
+          <a:p>
+            <a:pPr marL="0" indent="0">
+              <a:lnSpc>
+                <a:spcPct val="150000"/>
+              </a:lnSpc>
+              <a:buNone/>
+            </a:pPr>
+            <a:endParaRPr lang="en-US" sz="2800" dirty="0"/>
+          </a:p>
+        </p:txBody>
+      </p:sp>
+    </p:spTree>
+    <p:extLst>
+      <p:ext uri="{BB962C8B-B14F-4D97-AF65-F5344CB8AC3E}">
+        <p14:creationId xmlns:p14="http://schemas.microsoft.com/office/powerpoint/2010/main" val="1674079011"/>
+      </p:ext>
+    </p:extLst>
+  </p:cSld>
+  <p:clrMapOvr>
+    <a:masterClrMapping/>
+  </p:clrMapOvr>
+</p:sld>
+</file>
+
+<file path=ppt/slides/slide25.xml><?xml version="1.0" encoding="utf-8"?>
+<p:sld xmlns:a="http://schemas.openxmlformats.org/drawingml/2006/main" xmlns:r="http://schemas.openxmlformats.org/officeDocument/2006/relationships" xmlns:p="http://schemas.openxmlformats.org/presentationml/2006/main">
+  <p:cSld>
+    <p:spTree>
+      <p:nvGrpSpPr>
+        <p:cNvPr id="1" name="">
+          <a:extLst>
+            <a:ext uri="{FF2B5EF4-FFF2-40B4-BE49-F238E27FC236}">
+              <a16:creationId xmlns:a16="http://schemas.microsoft.com/office/drawing/2014/main" id="{AA80EE9B-3020-A266-14D5-3A10FD23920C}"/>
+            </a:ext>
+          </a:extLst>
+        </p:cNvPr>
+        <p:cNvGrpSpPr/>
+        <p:nvPr/>
+      </p:nvGrpSpPr>
+      <p:grpSpPr>
+        <a:xfrm>
+          <a:off x="0" y="0"/>
+          <a:ext cx="0" cy="0"/>
+          <a:chOff x="0" y="0"/>
+          <a:chExt cx="0" cy="0"/>
+        </a:xfrm>
+      </p:grpSpPr>
+      <p:sp>
+        <p:nvSpPr>
+          <p:cNvPr id="2" name="Title 1">
+            <a:extLst>
+              <a:ext uri="{FF2B5EF4-FFF2-40B4-BE49-F238E27FC236}">
+                <a16:creationId xmlns:a16="http://schemas.microsoft.com/office/drawing/2014/main" id="{09CB3CE6-A314-B235-7804-1DB6617CEBB9}"/>
+              </a:ext>
+            </a:extLst>
+          </p:cNvPr>
+          <p:cNvSpPr>
+            <a:spLocks noGrp="1"/>
+          </p:cNvSpPr>
+          <p:nvPr>
+            <p:ph type="ctrTitle"/>
+          </p:nvPr>
+        </p:nvSpPr>
+        <p:spPr/>
+        <p:txBody>
+          <a:bodyPr/>
+          <a:lstStyle/>
+          <a:p>
+            <a:r>
+              <a:rPr lang="en-US" dirty="0" err="1"/>
+              <a:t>Versioonihaldus</a:t>
+            </a:r>
+            <a:r>
+              <a:rPr lang="en-US" dirty="0"/>
+              <a:t> – </a:t>
+            </a:r>
+            <a:r>
+              <a:rPr lang="en-US" dirty="0" err="1"/>
+              <a:t>muutuste</a:t>
+            </a:r>
+            <a:r>
+              <a:rPr lang="en-US" dirty="0"/>
+              <a:t> </a:t>
+            </a:r>
+            <a:r>
+              <a:rPr lang="en-US" dirty="0" err="1"/>
+              <a:t>üles</a:t>
+            </a:r>
+            <a:r>
+              <a:rPr lang="en-US" dirty="0"/>
+              <a:t> </a:t>
+            </a:r>
+            <a:r>
+              <a:rPr lang="en-US" dirty="0" err="1"/>
+              <a:t>laadimine</a:t>
+            </a:r>
+          </a:p>
+        </p:txBody>
+      </p:sp>
+      <p:sp>
+        <p:nvSpPr>
+          <p:cNvPr id="3" name="Content Placeholder 2">
+            <a:extLst>
+              <a:ext uri="{FF2B5EF4-FFF2-40B4-BE49-F238E27FC236}">
+                <a16:creationId xmlns:a16="http://schemas.microsoft.com/office/drawing/2014/main" id="{CF773C7E-895D-19CD-768D-5D677901F556}"/>
+              </a:ext>
+            </a:extLst>
+          </p:cNvPr>
+          <p:cNvSpPr>
+            <a:spLocks noGrp="1"/>
+          </p:cNvSpPr>
+          <p:nvPr>
+            <p:ph sz="quarter" idx="10"/>
+          </p:nvPr>
+        </p:nvSpPr>
+        <p:spPr/>
+        <p:txBody>
+          <a:bodyPr/>
+          <a:lstStyle/>
+          <a:p>
+            <a:pPr marL="457200" indent="-457200">
+              <a:lnSpc>
+                <a:spcPct val="150000"/>
+              </a:lnSpc>
+              <a:buClr>
+                <a:srgbClr val="121212"/>
+              </a:buClr>
+              <a:buAutoNum type="arabicPeriod"/>
+            </a:pPr>
+            <a:r>
+              <a:rPr lang="en-US" sz="2400" dirty="0">
+                <a:ea typeface="Inter"/>
+              </a:rPr>
+              <a:t>Tee </a:t>
+            </a:r>
+            <a:r>
+              <a:rPr lang="en-US" sz="2400" dirty="0" err="1">
+                <a:ea typeface="Inter"/>
+              </a:rPr>
+              <a:t>muutused</a:t>
+            </a:r>
+            <a:r>
+              <a:rPr lang="en-US" sz="2400" dirty="0">
+                <a:ea typeface="Inter"/>
+              </a:rPr>
+              <a:t> </a:t>
+            </a:r>
+            <a:r>
+              <a:rPr lang="en-US" sz="2400" dirty="0" err="1">
+                <a:ea typeface="Inter"/>
+              </a:rPr>
+              <a:t>kohalikus</a:t>
+            </a:r>
+            <a:r>
+              <a:rPr lang="en-US" sz="2400" dirty="0">
+                <a:ea typeface="Inter"/>
+              </a:rPr>
+              <a:t> </a:t>
+            </a:r>
+            <a:r>
+              <a:rPr lang="en-US" sz="2400" dirty="0" err="1">
+                <a:ea typeface="Inter"/>
+              </a:rPr>
+              <a:t>kaustas</a:t>
+            </a:r>
+            <a:endParaRPr lang="en-US" sz="2400" dirty="0">
+              <a:ea typeface="Inter"/>
+            </a:endParaRPr>
+          </a:p>
+          <a:p>
+            <a:pPr marL="400050" indent="-457200">
+              <a:lnSpc>
+                <a:spcPct val="150000"/>
+              </a:lnSpc>
+              <a:buClr>
+                <a:srgbClr val="121212"/>
+              </a:buClr>
+              <a:buAutoNum type="arabicPeriod"/>
+            </a:pPr>
+            <a:r>
+              <a:rPr lang="en-US" sz="2400" dirty="0">
+                <a:ea typeface="Inter"/>
+              </a:rPr>
+              <a:t>Vali </a:t>
+            </a:r>
+            <a:r>
+              <a:rPr lang="en-US" sz="2400" dirty="0" err="1">
+                <a:ea typeface="Inter"/>
+              </a:rPr>
+              <a:t>enda</a:t>
+            </a:r>
+            <a:r>
+              <a:rPr lang="en-US" sz="2400" dirty="0">
+                <a:ea typeface="Inter"/>
+              </a:rPr>
+              <a:t> Branch</a:t>
+            </a:r>
+            <a:endParaRPr lang="en-US" dirty="0"/>
+          </a:p>
+          <a:p>
+            <a:pPr marL="400050" indent="-457200">
+              <a:lnSpc>
+                <a:spcPct val="150000"/>
+              </a:lnSpc>
+              <a:buClr>
+                <a:srgbClr val="121212"/>
+              </a:buClr>
+              <a:buAutoNum type="arabicPeriod"/>
+            </a:pPr>
+            <a:r>
+              <a:rPr lang="en-US" sz="2400" dirty="0">
+                <a:ea typeface="Inter"/>
+              </a:rPr>
+              <a:t>VS Code: Pull from main</a:t>
+            </a:r>
+            <a:endParaRPr lang="en-US" dirty="0"/>
+          </a:p>
+          <a:p>
+            <a:pPr marL="400050" indent="-457200">
+              <a:lnSpc>
+                <a:spcPct val="150000"/>
+              </a:lnSpc>
+              <a:buClr>
+                <a:srgbClr val="121212"/>
+              </a:buClr>
+              <a:buAutoNum type="arabicPeriod"/>
+            </a:pPr>
+            <a:r>
+              <a:rPr lang="en-US" sz="2400" dirty="0">
+                <a:ea typeface="Inter"/>
+              </a:rPr>
+              <a:t>VS Code: Lisa </a:t>
+            </a:r>
+            <a:r>
+              <a:rPr lang="en-US" sz="2400" err="1">
+                <a:ea typeface="Inter"/>
+              </a:rPr>
+              <a:t>kommentaar</a:t>
+            </a:r>
+            <a:r>
+              <a:rPr lang="en-US" sz="2400" dirty="0">
+                <a:ea typeface="Inter"/>
+              </a:rPr>
+              <a:t> ja Commit</a:t>
+            </a:r>
+            <a:endParaRPr lang="en-US" sz="2400" dirty="0"/>
+          </a:p>
+          <a:p>
+            <a:pPr marL="400050" indent="-457200">
+              <a:lnSpc>
+                <a:spcPct val="150000"/>
+              </a:lnSpc>
+              <a:buClr>
+                <a:srgbClr val="121212"/>
+              </a:buClr>
+              <a:buAutoNum type="arabicPeriod"/>
+            </a:pPr>
+            <a:r>
+              <a:rPr lang="en-US" sz="2400" dirty="0">
+                <a:ea typeface="Inter"/>
+              </a:rPr>
+              <a:t>VS Code: Sync Changes</a:t>
+            </a:r>
+            <a:endParaRPr lang="en-US" sz="2400" dirty="0"/>
+          </a:p>
+          <a:p>
+            <a:pPr marL="400050" indent="-457200">
+              <a:lnSpc>
+                <a:spcPct val="150000"/>
+              </a:lnSpc>
+              <a:buClr>
+                <a:srgbClr val="121212"/>
+              </a:buClr>
+              <a:buAutoNum type="arabicPeriod"/>
+            </a:pPr>
+            <a:r>
+              <a:rPr lang="en-US" sz="2400" err="1">
+                <a:ea typeface="Inter"/>
+              </a:rPr>
+              <a:t>Github</a:t>
+            </a:r>
+            <a:r>
+              <a:rPr lang="en-US" sz="2400" dirty="0">
+                <a:ea typeface="Inter"/>
+              </a:rPr>
+              <a:t>: Vali </a:t>
+            </a:r>
+            <a:r>
+              <a:rPr lang="en-US" sz="2400" err="1">
+                <a:ea typeface="Inter"/>
+              </a:rPr>
+              <a:t>enda</a:t>
+            </a:r>
+            <a:r>
+              <a:rPr lang="en-US" sz="2400" dirty="0">
+                <a:ea typeface="Inter"/>
+              </a:rPr>
+              <a:t> Branch</a:t>
+            </a:r>
+          </a:p>
+          <a:p>
+            <a:pPr marL="400050" indent="-457200">
+              <a:lnSpc>
+                <a:spcPct val="150000"/>
+              </a:lnSpc>
+              <a:buClr>
+                <a:srgbClr val="121212"/>
+              </a:buClr>
+              <a:buAutoNum type="arabicPeriod"/>
+            </a:pPr>
+            <a:r>
+              <a:rPr lang="en-US" sz="2400" dirty="0" err="1">
+                <a:ea typeface="Inter"/>
+              </a:rPr>
+              <a:t>Github</a:t>
+            </a:r>
+            <a:r>
+              <a:rPr lang="en-US" sz="2400" dirty="0">
+                <a:ea typeface="Inter"/>
+              </a:rPr>
+              <a:t>: </a:t>
+            </a:r>
+            <a:r>
+              <a:rPr lang="en-US" sz="2400" dirty="0" err="1">
+                <a:ea typeface="Inter"/>
+              </a:rPr>
+              <a:t>Kliki</a:t>
+            </a:r>
+            <a:r>
+              <a:rPr lang="en-US" sz="2400" dirty="0">
+                <a:ea typeface="Inter"/>
+              </a:rPr>
+              <a:t> "This branch is 1 commit ahead"</a:t>
+            </a:r>
+          </a:p>
+          <a:p>
+            <a:pPr marL="400050" indent="-457200">
+              <a:lnSpc>
+                <a:spcPct val="150000"/>
+              </a:lnSpc>
+              <a:buClr>
+                <a:srgbClr val="121212"/>
+              </a:buClr>
+              <a:buAutoNum type="arabicPeriod"/>
+            </a:pPr>
+            <a:r>
+              <a:rPr lang="en-US" sz="2400" dirty="0">
+                <a:ea typeface="Inter"/>
+              </a:rPr>
+              <a:t>GitHub: Create Pull Request</a:t>
+            </a:r>
+            <a:endParaRPr lang="en-US" sz="2400" dirty="0"/>
+          </a:p>
+          <a:p>
+            <a:pPr marL="400050" indent="-457200">
+              <a:lnSpc>
+                <a:spcPct val="150000"/>
+              </a:lnSpc>
+              <a:buClr>
+                <a:srgbClr val="121212"/>
+              </a:buClr>
+              <a:buAutoNum type="arabicPeriod"/>
+            </a:pPr>
+            <a:r>
+              <a:rPr lang="en-US" sz="2400" dirty="0">
+                <a:ea typeface="Inter"/>
+              </a:rPr>
+              <a:t>GitHub: Merge Pull Request</a:t>
+            </a:r>
+            <a:endParaRPr lang="en-US" sz="2400" dirty="0"/>
+          </a:p>
+          <a:p>
+            <a:pPr>
+              <a:buClr>
+                <a:srgbClr val="121212"/>
+              </a:buClr>
+              <a:buAutoNum type="arabicPeriod"/>
+            </a:pPr>
+            <a:endParaRPr lang="en-US"/>
+          </a:p>
+        </p:txBody>
+      </p:sp>
+    </p:spTree>
+    <p:extLst>
+      <p:ext uri="{BB962C8B-B14F-4D97-AF65-F5344CB8AC3E}">
+        <p14:creationId xmlns:p14="http://schemas.microsoft.com/office/powerpoint/2010/main" val="1694942831"/>
+      </p:ext>
+    </p:extLst>
+  </p:cSld>
+  <p:clrMapOvr>
+    <a:masterClrMapping/>
+  </p:clrMapOvr>
+  <p:timing>
+    <p:tnLst>
+      <p:par>
+        <p:cTn id="1" dur="indefinite" restart="never" nodeType="tmRoot">
+          <p:childTnLst>
+            <p:seq concurrent="1" nextAc="seek">
+              <p:cTn id="2" dur="indefinite" nodeType="mainSeq">
+                <p:childTnLst>
+                  <p:par>
+                    <p:cTn id="3" fill="hold">
+                      <p:stCondLst>
+                        <p:cond delay="indefinite"/>
+                      </p:stCondLst>
+                      <p:childTnLst>
+                        <p:par>
+                          <p:cTn id="4" fill="hold">
+                            <p:stCondLst>
+                              <p:cond delay="0"/>
+                            </p:stCondLst>
+                            <p:childTnLst>
+                              <p:par>
+                                <p:cTn id="5" presetID="1" presetClass="entr" presetSubtype="0" fill="hold" grpId="0" nodeType="clickEffect">
+                                  <p:stCondLst>
+                                    <p:cond delay="0"/>
+                                  </p:stCondLst>
+                                  <p:childTnLst>
+                                    <p:set>
+                                      <p:cBhvr>
+                                        <p:cTn id="6" dur="1" fill="hold">
+                                          <p:stCondLst>
+                                            <p:cond delay="0"/>
+                                          </p:stCondLst>
+                                        </p:cTn>
+                                        <p:tgtEl>
+                                          <p:spTgt spid="3">
+                                            <p:txEl>
+                                              <p:pRg st="0" end="0"/>
+                                            </p:txEl>
+                                          </p:spTgt>
+                                        </p:tgtEl>
+                                        <p:attrNameLst>
+                                          <p:attrName>style.visibility</p:attrName>
+                                        </p:attrNameLst>
+                                      </p:cBhvr>
+                                      <p:to>
+                                        <p:strVal val="visible"/>
+                                      </p:to>
+                                    </p:set>
+                                  </p:childTnLst>
+                                </p:cTn>
+                              </p:par>
+                            </p:childTnLst>
+                          </p:cTn>
+                        </p:par>
+                      </p:childTnLst>
+                    </p:cTn>
+                  </p:par>
+                  <p:par>
+                    <p:cTn id="7" fill="hold">
+                      <p:stCondLst>
+                        <p:cond delay="indefinite"/>
+                      </p:stCondLst>
+                      <p:childTnLst>
+                        <p:par>
+                          <p:cTn id="8" fill="hold">
+                            <p:stCondLst>
+                              <p:cond delay="0"/>
+                            </p:stCondLst>
+                            <p:childTnLst>
+                              <p:par>
+                                <p:cTn id="9" presetID="1" presetClass="entr" presetSubtype="0" fill="hold" grpId="0" nodeType="clickEffect">
+                                  <p:stCondLst>
+                                    <p:cond delay="0"/>
+                                  </p:stCondLst>
+                                  <p:childTnLst>
+                                    <p:set>
+                                      <p:cBhvr>
+                                        <p:cTn id="10" dur="1" fill="hold">
+                                          <p:stCondLst>
+                                            <p:cond delay="0"/>
+                                          </p:stCondLst>
+                                        </p:cTn>
+                                        <p:tgtEl>
+                                          <p:spTgt spid="3">
+                                            <p:txEl>
+                                              <p:pRg st="1" end="1"/>
+                                            </p:txEl>
+                                          </p:spTgt>
+                                        </p:tgtEl>
+                                        <p:attrNameLst>
+                                          <p:attrName>style.visibility</p:attrName>
+                                        </p:attrNameLst>
+                                      </p:cBhvr>
+                                      <p:to>
+                                        <p:strVal val="visible"/>
+                                      </p:to>
+                                    </p:set>
+                                  </p:childTnLst>
+                                </p:cTn>
+                              </p:par>
+                            </p:childTnLst>
+                          </p:cTn>
+                        </p:par>
+                      </p:childTnLst>
+                    </p:cTn>
+                  </p:par>
+                  <p:par>
+                    <p:cTn id="11" fill="hold">
+                      <p:stCondLst>
+                        <p:cond delay="indefinite"/>
+                      </p:stCondLst>
+                      <p:childTnLst>
+                        <p:par>
+                          <p:cTn id="12" fill="hold">
+                            <p:stCondLst>
+                              <p:cond delay="0"/>
+                            </p:stCondLst>
+                            <p:childTnLst>
+                              <p:par>
+                                <p:cTn id="13" presetID="1" presetClass="entr" presetSubtype="0" fill="hold" grpId="0" nodeType="clickEffect">
+                                  <p:stCondLst>
+                                    <p:cond delay="0"/>
+                                  </p:stCondLst>
+                                  <p:childTnLst>
+                                    <p:set>
+                                      <p:cBhvr>
+                                        <p:cTn id="14" dur="1" fill="hold">
+                                          <p:stCondLst>
+                                            <p:cond delay="0"/>
+                                          </p:stCondLst>
+                                        </p:cTn>
+                                        <p:tgtEl>
+                                          <p:spTgt spid="3">
+                                            <p:txEl>
+                                              <p:pRg st="2" end="2"/>
+                                            </p:txEl>
+                                          </p:spTgt>
+                                        </p:tgtEl>
+                                        <p:attrNameLst>
+                                          <p:attrName>style.visibility</p:attrName>
+                                        </p:attrNameLst>
+                                      </p:cBhvr>
+                                      <p:to>
+                                        <p:strVal val="visible"/>
+                                      </p:to>
+                                    </p:set>
+                                  </p:childTnLst>
+                                </p:cTn>
+                              </p:par>
+                            </p:childTnLst>
+                          </p:cTn>
+                        </p:par>
+                      </p:childTnLst>
+                    </p:cTn>
+                  </p:par>
+                  <p:par>
+                    <p:cTn id="15" fill="hold">
+                      <p:stCondLst>
+                        <p:cond delay="indefinite"/>
+                      </p:stCondLst>
+                      <p:childTnLst>
+                        <p:par>
+                          <p:cTn id="16" fill="hold">
+                            <p:stCondLst>
+                              <p:cond delay="0"/>
+                            </p:stCondLst>
+                            <p:childTnLst>
+                              <p:par>
+                                <p:cTn id="17" presetID="1" presetClass="entr" presetSubtype="0" fill="hold" grpId="0" nodeType="clickEffect">
+                                  <p:stCondLst>
+                                    <p:cond delay="0"/>
+                                  </p:stCondLst>
+                                  <p:childTnLst>
+                                    <p:set>
+                                      <p:cBhvr>
+                                        <p:cTn id="18" dur="1" fill="hold">
+                                          <p:stCondLst>
+                                            <p:cond delay="0"/>
+                                          </p:stCondLst>
+                                        </p:cTn>
+                                        <p:tgtEl>
+                                          <p:spTgt spid="3">
+                                            <p:txEl>
+                                              <p:pRg st="3" end="3"/>
+                                            </p:txEl>
+                                          </p:spTgt>
+                                        </p:tgtEl>
+                                        <p:attrNameLst>
+                                          <p:attrName>style.visibility</p:attrName>
+                                        </p:attrNameLst>
+                                      </p:cBhvr>
+                                      <p:to>
+                                        <p:strVal val="visible"/>
+                                      </p:to>
+                                    </p:set>
+                                  </p:childTnLst>
+                                </p:cTn>
+                              </p:par>
+                            </p:childTnLst>
+                          </p:cTn>
+                        </p:par>
+                      </p:childTnLst>
+                    </p:cTn>
+                  </p:par>
+                  <p:par>
+                    <p:cTn id="19" fill="hold">
+                      <p:stCondLst>
+                        <p:cond delay="indefinite"/>
+                      </p:stCondLst>
+                      <p:childTnLst>
+                        <p:par>
+                          <p:cTn id="20" fill="hold">
+                            <p:stCondLst>
+                              <p:cond delay="0"/>
+                            </p:stCondLst>
+                            <p:childTnLst>
+                              <p:par>
+                                <p:cTn id="21" presetID="1" presetClass="entr" presetSubtype="0" fill="hold" grpId="0" nodeType="clickEffect">
+                                  <p:stCondLst>
+                                    <p:cond delay="0"/>
+                                  </p:stCondLst>
+                                  <p:childTnLst>
+                                    <p:set>
+                                      <p:cBhvr>
+                                        <p:cTn id="22" dur="1" fill="hold">
+                                          <p:stCondLst>
+                                            <p:cond delay="0"/>
+                                          </p:stCondLst>
+                                        </p:cTn>
+                                        <p:tgtEl>
+                                          <p:spTgt spid="3">
+                                            <p:txEl>
+                                              <p:pRg st="4" end="4"/>
+                                            </p:txEl>
+                                          </p:spTgt>
+                                        </p:tgtEl>
+                                        <p:attrNameLst>
+                                          <p:attrName>style.visibility</p:attrName>
+                                        </p:attrNameLst>
+                                      </p:cBhvr>
+                                      <p:to>
+                                        <p:strVal val="visible"/>
+                                      </p:to>
+                                    </p:set>
+                                  </p:childTnLst>
+                                </p:cTn>
+                              </p:par>
+                            </p:childTnLst>
+                          </p:cTn>
+                        </p:par>
+                      </p:childTnLst>
+                    </p:cTn>
+                  </p:par>
+                  <p:par>
+                    <p:cTn id="23" fill="hold">
+                      <p:stCondLst>
+                        <p:cond delay="indefinite"/>
+                      </p:stCondLst>
+                      <p:childTnLst>
+                        <p:par>
+                          <p:cTn id="24" fill="hold">
+                            <p:stCondLst>
+                              <p:cond delay="0"/>
+                            </p:stCondLst>
+                            <p:childTnLst>
+                              <p:par>
+                                <p:cTn id="25" presetID="1" presetClass="entr" presetSubtype="0" fill="hold" grpId="0" nodeType="clickEffect">
+                                  <p:stCondLst>
+                                    <p:cond delay="0"/>
+                                  </p:stCondLst>
+                                  <p:childTnLst>
+                                    <p:set>
+                                      <p:cBhvr>
+                                        <p:cTn id="26" dur="1" fill="hold">
+                                          <p:stCondLst>
+                                            <p:cond delay="0"/>
+                                          </p:stCondLst>
+                                        </p:cTn>
+                                        <p:tgtEl>
+                                          <p:spTgt spid="3">
+                                            <p:txEl>
+                                              <p:pRg st="5" end="5"/>
+                                            </p:txEl>
+                                          </p:spTgt>
+                                        </p:tgtEl>
+                                        <p:attrNameLst>
+                                          <p:attrName>style.visibility</p:attrName>
+                                        </p:attrNameLst>
+                                      </p:cBhvr>
+                                      <p:to>
+                                        <p:strVal val="visible"/>
+                                      </p:to>
+                                    </p:set>
+                                  </p:childTnLst>
+                                </p:cTn>
+                              </p:par>
+                            </p:childTnLst>
+                          </p:cTn>
+                        </p:par>
+                      </p:childTnLst>
+                    </p:cTn>
+                  </p:par>
+                  <p:par>
+                    <p:cTn id="27" fill="hold">
+                      <p:stCondLst>
+                        <p:cond delay="indefinite"/>
+                      </p:stCondLst>
+                      <p:childTnLst>
+                        <p:par>
+                          <p:cTn id="28" fill="hold">
+                            <p:stCondLst>
+                              <p:cond delay="0"/>
+                            </p:stCondLst>
+                            <p:childTnLst>
+                              <p:par>
+                                <p:cTn id="29" presetID="1" presetClass="entr" presetSubtype="0" fill="hold" grpId="0" nodeType="clickEffect">
+                                  <p:stCondLst>
+                                    <p:cond delay="0"/>
+                                  </p:stCondLst>
+                                  <p:childTnLst>
+                                    <p:set>
+                                      <p:cBhvr>
+                                        <p:cTn id="30" dur="1" fill="hold">
+                                          <p:stCondLst>
+                                            <p:cond delay="0"/>
+                                          </p:stCondLst>
+                                        </p:cTn>
+                                        <p:tgtEl>
+                                          <p:spTgt spid="3">
+                                            <p:txEl>
+                                              <p:pRg st="6" end="6"/>
+                                            </p:txEl>
+                                          </p:spTgt>
+                                        </p:tgtEl>
+                                        <p:attrNameLst>
+                                          <p:attrName>style.visibility</p:attrName>
+                                        </p:attrNameLst>
+                                      </p:cBhvr>
+                                      <p:to>
+                                        <p:strVal val="visible"/>
+                                      </p:to>
+                                    </p:set>
+                                  </p:childTnLst>
+                                </p:cTn>
+                              </p:par>
+                            </p:childTnLst>
+                          </p:cTn>
+                        </p:par>
+                      </p:childTnLst>
+                    </p:cTn>
+                  </p:par>
+                  <p:par>
+                    <p:cTn id="31" fill="hold">
+                      <p:stCondLst>
+                        <p:cond delay="indefinite"/>
+                      </p:stCondLst>
+                      <p:childTnLst>
+                        <p:par>
+                          <p:cTn id="32" fill="hold">
+                            <p:stCondLst>
+                              <p:cond delay="0"/>
+                            </p:stCondLst>
+                            <p:childTnLst>
+                              <p:par>
+                                <p:cTn id="33" presetID="1" presetClass="entr" presetSubtype="0" fill="hold" grpId="0" nodeType="clickEffect">
+                                  <p:stCondLst>
+                                    <p:cond delay="0"/>
+                                  </p:stCondLst>
+                                  <p:childTnLst>
+                                    <p:set>
+                                      <p:cBhvr>
+                                        <p:cTn id="34" dur="1" fill="hold">
+                                          <p:stCondLst>
+                                            <p:cond delay="0"/>
+                                          </p:stCondLst>
+                                        </p:cTn>
+                                        <p:tgtEl>
+                                          <p:spTgt spid="3">
+                                            <p:txEl>
+                                              <p:pRg st="7" end="7"/>
+                                            </p:txEl>
+                                          </p:spTgt>
+                                        </p:tgtEl>
+                                        <p:attrNameLst>
+                                          <p:attrName>style.visibility</p:attrName>
+                                        </p:attrNameLst>
+                                      </p:cBhvr>
+                                      <p:to>
+                                        <p:strVal val="visible"/>
+                                      </p:to>
+                                    </p:set>
+                                  </p:childTnLst>
+                                </p:cTn>
+                              </p:par>
+                            </p:childTnLst>
+                          </p:cTn>
+                        </p:par>
+                      </p:childTnLst>
+                    </p:cTn>
+                  </p:par>
+                  <p:par>
+                    <p:cTn id="35" fill="hold">
+                      <p:stCondLst>
+                        <p:cond delay="indefinite"/>
+                      </p:stCondLst>
+                      <p:childTnLst>
+                        <p:par>
+                          <p:cTn id="36" fill="hold">
+                            <p:stCondLst>
+                              <p:cond delay="0"/>
+                            </p:stCondLst>
+                            <p:childTnLst>
+                              <p:par>
+                                <p:cTn id="37" presetID="1" presetClass="entr" presetSubtype="0" fill="hold" grpId="0" nodeType="clickEffect">
+                                  <p:stCondLst>
+                                    <p:cond delay="0"/>
+                                  </p:stCondLst>
+                                  <p:childTnLst>
+                                    <p:set>
+                                      <p:cBhvr>
+                                        <p:cTn id="38" dur="1" fill="hold">
+                                          <p:stCondLst>
+                                            <p:cond delay="0"/>
+                                          </p:stCondLst>
+                                        </p:cTn>
+                                        <p:tgtEl>
+                                          <p:spTgt spid="3">
+                                            <p:txEl>
+                                              <p:pRg st="8" end="8"/>
+                                            </p:txEl>
+                                          </p:spTgt>
+                                        </p:tgtEl>
+                                        <p:attrNameLst>
+                                          <p:attrName>style.visibility</p:attrName>
+                                        </p:attrNameLst>
+                                      </p:cBhvr>
+                                      <p:to>
+                                        <p:strVal val="visible"/>
+                                      </p:to>
+                                    </p:set>
+                                  </p:childTnLst>
+                                </p:cTn>
+                              </p:par>
+                            </p:childTnLst>
+                          </p:cTn>
+                        </p:par>
+                      </p:childTnLst>
+                    </p:cTn>
+                  </p:par>
+                </p:childTnLst>
+              </p:cTn>
+              <p:prevCondLst>
+                <p:cond evt="onPrev" delay="0">
+                  <p:tgtEl>
+                    <p:sldTgt/>
+                  </p:tgtEl>
+                </p:cond>
+              </p:prevCondLst>
+              <p:nextCondLst>
+                <p:cond evt="onNext" delay="0">
+                  <p:tgtEl>
+                    <p:sldTgt/>
+                  </p:tgtEl>
+                </p:cond>
+              </p:nextCondLst>
+            </p:seq>
+          </p:childTnLst>
+        </p:cTn>
+      </p:par>
+    </p:tnLst>
+    <p:bldLst>
+      <p:bldP spid="3" grpId="0" build="p"/>
+    </p:bldLst>
+  </p:timing>
+</p:sld>
+</file>
+
+<file path=ppt/slides/slide26.xml><?xml version="1.0" encoding="utf-8"?>
+<p:sld xmlns:a="http://schemas.openxmlformats.org/drawingml/2006/main" xmlns:r="http://schemas.openxmlformats.org/officeDocument/2006/relationships" xmlns:p="http://schemas.openxmlformats.org/presentationml/2006/main">
+  <p:cSld>
+    <p:spTree>
+      <p:nvGrpSpPr>
+        <p:cNvPr id="1" name=""/>
+        <p:cNvGrpSpPr/>
+        <p:nvPr/>
+      </p:nvGrpSpPr>
+      <p:grpSpPr>
+        <a:xfrm>
+          <a:off x="0" y="0"/>
+          <a:ext cx="0" cy="0"/>
+          <a:chOff x="0" y="0"/>
+          <a:chExt cx="0" cy="0"/>
+        </a:xfrm>
+      </p:grpSpPr>
+      <p:sp>
+        <p:nvSpPr>
+          <p:cNvPr id="2" name="Title 1">
+            <a:extLst>
+              <a:ext uri="{FF2B5EF4-FFF2-40B4-BE49-F238E27FC236}">
+                <a16:creationId xmlns:a16="http://schemas.microsoft.com/office/drawing/2014/main" id="{A93AD8D0-6DB4-575E-917E-EF1716356808}"/>
+              </a:ext>
+            </a:extLst>
+          </p:cNvPr>
+          <p:cNvSpPr>
+            <a:spLocks noGrp="1"/>
+          </p:cNvSpPr>
+          <p:nvPr>
+            <p:ph type="ctrTitle"/>
+          </p:nvPr>
+        </p:nvSpPr>
+        <p:spPr/>
+        <p:txBody>
+          <a:bodyPr/>
+          <a:lstStyle/>
+          <a:p>
+            <a:endParaRPr lang="et-EE" dirty="0"/>
+          </a:p>
+        </p:txBody>
+      </p:sp>
+      <p:sp>
+        <p:nvSpPr>
+          <p:cNvPr id="3" name="Content Placeholder 2">
+            <a:extLst>
+              <a:ext uri="{FF2B5EF4-FFF2-40B4-BE49-F238E27FC236}">
+                <a16:creationId xmlns:a16="http://schemas.microsoft.com/office/drawing/2014/main" id="{4A604898-1A89-32D0-7964-55457B42E945}"/>
+              </a:ext>
+            </a:extLst>
+          </p:cNvPr>
+          <p:cNvSpPr>
+            <a:spLocks noGrp="1"/>
+          </p:cNvSpPr>
+          <p:nvPr>
+            <p:ph sz="quarter" idx="10"/>
+          </p:nvPr>
+        </p:nvSpPr>
+        <p:spPr/>
+        <p:txBody>
+          <a:bodyPr/>
+          <a:lstStyle/>
+          <a:p>
+            <a:endParaRPr lang="en-US" dirty="0"/>
+          </a:p>
+          <a:p>
+            <a:endParaRPr lang="en-US" dirty="0"/>
+          </a:p>
+          <a:p>
+            <a:endParaRPr lang="en-US" dirty="0"/>
+          </a:p>
+          <a:p>
+            <a:endParaRPr lang="en-US" dirty="0"/>
+          </a:p>
+          <a:p>
+            <a:endParaRPr lang="en-US" dirty="0"/>
+          </a:p>
+          <a:p>
+            <a:endParaRPr lang="en-US" dirty="0"/>
+          </a:p>
+          <a:p>
+            <a:r>
+              <a:rPr lang="en-US" sz="2400" dirty="0" err="1"/>
+              <a:t>Leppime</a:t>
+            </a:r>
+            <a:r>
+              <a:rPr lang="en-US" sz="2400" dirty="0"/>
+              <a:t> </a:t>
+            </a:r>
+            <a:r>
+              <a:rPr lang="en-US" sz="2400" dirty="0" err="1"/>
+              <a:t>kokku</a:t>
+            </a:r>
+            <a:r>
+              <a:rPr lang="en-US" sz="2400" dirty="0"/>
+              <a:t> </a:t>
+            </a:r>
+            <a:r>
+              <a:rPr lang="en-US" sz="2400" dirty="0" err="1"/>
+              <a:t>kohtumised</a:t>
+            </a:r>
+            <a:r>
+              <a:rPr lang="en-US" sz="2400" dirty="0"/>
+              <a:t> </a:t>
+            </a:r>
+            <a:r>
+              <a:rPr lang="en-US" sz="2400" dirty="0" err="1"/>
+              <a:t>kliendiga</a:t>
+            </a:r>
+            <a:endParaRPr lang="et-EE" sz="2400" dirty="0"/>
+          </a:p>
+        </p:txBody>
+      </p:sp>
+    </p:spTree>
+    <p:extLst>
+      <p:ext uri="{BB962C8B-B14F-4D97-AF65-F5344CB8AC3E}">
+        <p14:creationId xmlns:p14="http://schemas.microsoft.com/office/powerpoint/2010/main" val="1519353560"/>
       </p:ext>
     </p:extLst>
   </p:cSld>
@@ -45389,6 +48228,12 @@
 </file>
 
 <file path=customXml/item1.xml><?xml version="1.0" encoding="utf-8"?>
+<p:properties xmlns:p="http://schemas.microsoft.com/office/2006/metadata/properties" xmlns:xsi="http://www.w3.org/2001/XMLSchema-instance" xmlns:pc="http://schemas.microsoft.com/office/infopath/2007/PartnerControls">
+  <documentManagement/>
+</p:properties>
+</file>
+
+<file path=customXml/item2.xml><?xml version="1.0" encoding="utf-8"?>
 <ct:contentTypeSchema xmlns:ct="http://schemas.microsoft.com/office/2006/metadata/contentType" xmlns:ma="http://schemas.microsoft.com/office/2006/metadata/properties/metaAttributes" ct:_="" ma:_="" ma:contentTypeName="Document" ma:contentTypeID="0x010100C4D27B8FA8976546BCD79313C588588D" ma:contentTypeVersion="8" ma:contentTypeDescription="Create a new document." ma:contentTypeScope="" ma:versionID="a112c56f6fe148a79025c76584832af0">
   <xsd:schema xmlns:xsd="http://www.w3.org/2001/XMLSchema" xmlns:xs="http://www.w3.org/2001/XMLSchema" xmlns:p="http://schemas.microsoft.com/office/2006/metadata/properties" xmlns:ns2="a1a2d923-8fea-42f1-bd41-9cdfff65694e" targetNamespace="http://schemas.microsoft.com/office/2006/metadata/properties" ma:root="true" ma:fieldsID="97c8655d467eaa9470a714421e7268c0" ns2:_="">
     <xsd:import namespace="a1a2d923-8fea-42f1-bd41-9cdfff65694e"/>
@@ -45556,12 +48401,6 @@
 </ct:contentTypeSchema>
 </file>
 
-<file path=customXml/item2.xml><?xml version="1.0" encoding="utf-8"?>
-<p:properties xmlns:p="http://schemas.microsoft.com/office/2006/metadata/properties" xmlns:xsi="http://www.w3.org/2001/XMLSchema-instance" xmlns:pc="http://schemas.microsoft.com/office/infopath/2007/PartnerControls">
-  <documentManagement/>
-</p:properties>
-</file>
-
 <file path=customXml/item3.xml><?xml version="1.0" encoding="utf-8"?>
 <?mso-contentType ?>
 <FormTemplates xmlns="http://schemas.microsoft.com/sharepoint/v3/contenttype/forms">
@@ -45572,6 +48411,15 @@
 </file>
 
 <file path=customXml/itemProps1.xml><?xml version="1.0" encoding="utf-8"?>
+<ds:datastoreItem xmlns:ds="http://schemas.openxmlformats.org/officeDocument/2006/customXml" ds:itemID="{5BDF4908-A52A-47DD-A794-6E02D71942FC}">
+  <ds:schemaRefs>
+    <ds:schemaRef ds:uri="http://schemas.microsoft.com/office/2006/metadata/properties"/>
+    <ds:schemaRef ds:uri="http://schemas.microsoft.com/office/infopath/2007/PartnerControls"/>
+  </ds:schemaRefs>
+</ds:datastoreItem>
+</file>
+
+<file path=customXml/itemProps2.xml><?xml version="1.0" encoding="utf-8"?>
 <ds:datastoreItem xmlns:ds="http://schemas.openxmlformats.org/officeDocument/2006/customXml" ds:itemID="{9CF4F972-2392-44D0-AA45-41AC4FDC4A59}">
   <ds:schemaRefs>
     <ds:schemaRef ds:uri="a1a2d923-8fea-42f1-bd41-9cdfff65694e"/>
@@ -45589,15 +48437,6 @@
 </ds:datastoreItem>
 </file>
 
-<file path=customXml/itemProps2.xml><?xml version="1.0" encoding="utf-8"?>
-<ds:datastoreItem xmlns:ds="http://schemas.openxmlformats.org/officeDocument/2006/customXml" ds:itemID="{5BDF4908-A52A-47DD-A794-6E02D71942FC}">
-  <ds:schemaRefs>
-    <ds:schemaRef ds:uri="http://schemas.microsoft.com/office/2006/metadata/properties"/>
-    <ds:schemaRef ds:uri="http://schemas.microsoft.com/office/infopath/2007/PartnerControls"/>
-  </ds:schemaRefs>
-</ds:datastoreItem>
-</file>
-
 <file path=customXml/itemProps3.xml><?xml version="1.0" encoding="utf-8"?>
 <ds:datastoreItem xmlns:ds="http://schemas.openxmlformats.org/officeDocument/2006/customXml" ds:itemID="{9DC439CA-6F1C-4005-ACA6-A52E04DEE0A7}">
   <ds:schemaRefs>

--- a/Day14/14-paev-andmetarkus-esitlus.pptx
+++ b/Day14/14-paev-andmetarkus-esitlus.pptx
@@ -5,10 +5,10 @@
     <p:sldMasterId id="2147483648" r:id="rId4"/>
   </p:sldMasterIdLst>
   <p:notesMasterIdLst>
-    <p:notesMasterId r:id="rId31"/>
+    <p:notesMasterId r:id="rId32"/>
   </p:notesMasterIdLst>
   <p:handoutMasterIdLst>
-    <p:handoutMasterId r:id="rId32"/>
+    <p:handoutMasterId r:id="rId33"/>
   </p:handoutMasterIdLst>
   <p:sldIdLst>
     <p:sldId id="417" r:id="rId5"/>
@@ -33,34 +33,35 @@
     <p:sldId id="568" r:id="rId24"/>
     <p:sldId id="647" r:id="rId25"/>
     <p:sldId id="649" r:id="rId26"/>
-    <p:sldId id="574" r:id="rId27"/>
-    <p:sldId id="645" r:id="rId28"/>
-    <p:sldId id="538" r:id="rId29"/>
-    <p:sldId id="650" r:id="rId30"/>
+    <p:sldId id="651" r:id="rId27"/>
+    <p:sldId id="574" r:id="rId28"/>
+    <p:sldId id="645" r:id="rId29"/>
+    <p:sldId id="538" r:id="rId30"/>
+    <p:sldId id="650" r:id="rId31"/>
   </p:sldIdLst>
   <p:sldSz cx="12192000" cy="6858000"/>
   <p:notesSz cx="6858000" cy="9144000"/>
   <p:embeddedFontLst>
     <p:embeddedFont>
       <p:font typeface="Inter" panose="020B0604020202020204" charset="0"/>
-      <p:regular r:id="rId33"/>
-      <p:bold r:id="rId34"/>
+      <p:regular r:id="rId34"/>
+      <p:bold r:id="rId35"/>
     </p:embeddedFont>
     <p:embeddedFont>
       <p:font typeface="Inter Bold" panose="020B0604020202020204" charset="0"/>
-      <p:bold r:id="rId35"/>
+      <p:bold r:id="rId36"/>
     </p:embeddedFont>
     <p:embeddedFont>
       <p:font typeface="Noto Serif" panose="02020600060500020200" pitchFamily="18" charset="0"/>
-      <p:regular r:id="rId36"/>
-      <p:bold r:id="rId37"/>
-      <p:italic r:id="rId38"/>
-      <p:boldItalic r:id="rId39"/>
+      <p:regular r:id="rId37"/>
+      <p:bold r:id="rId38"/>
+      <p:italic r:id="rId39"/>
+      <p:boldItalic r:id="rId40"/>
     </p:embeddedFont>
     <p:embeddedFont>
       <p:font typeface="Poppins SemiBold" panose="00000700000000000000" pitchFamily="2" charset="0"/>
-      <p:bold r:id="rId40"/>
-      <p:boldItalic r:id="rId41"/>
+      <p:bold r:id="rId41"/>
+      <p:boldItalic r:id="rId42"/>
     </p:embeddedFont>
   </p:embeddedFontLst>
   <p:defaultTextStyle>
@@ -172,7 +173,7 @@
 <file path=ppt/revisionInfo.xml><?xml version="1.0" encoding="utf-8"?>
 <p1510:revInfo xmlns:a="http://schemas.openxmlformats.org/drawingml/2006/main" xmlns:r="http://schemas.openxmlformats.org/officeDocument/2006/relationships" xmlns:p1510="http://schemas.microsoft.com/office/powerpoint/2015/10/main">
   <p1510:revLst>
-    <p1510:client id="{1CEC6D2C-2DE5-4622-B5C9-CE21C0F1885C}" v="4" dt="2026-04-14T08:00:40.558"/>
+    <p1510:client id="{1CEC6D2C-2DE5-4622-B5C9-CE21C0F1885C}" v="70" dt="2026-04-14T12:28:30.502"/>
   </p1510:revLst>
 </p1510:revInfo>
 </file>
@@ -182,7 +183,7 @@
   <pc:docChgLst>
     <pc:chgData name="Virve Räni" userId="161a7437-7ef4-49ec-91bf-54882f313dfe" providerId="ADAL" clId="{6D754EED-65AA-4A21-B175-6769012CF487}"/>
     <pc:docChg chg="addSld delSld modSld sldOrd">
-      <pc:chgData name="Virve Räni" userId="161a7437-7ef4-49ec-91bf-54882f313dfe" providerId="ADAL" clId="{6D754EED-65AA-4A21-B175-6769012CF487}" dt="2026-04-14T08:00:46.453" v="353" actId="255"/>
+      <pc:chgData name="Virve Räni" userId="161a7437-7ef4-49ec-91bf-54882f313dfe" providerId="ADAL" clId="{6D754EED-65AA-4A21-B175-6769012CF487}" dt="2026-04-14T13:34:56.379" v="457" actId="20577"/>
       <pc:docMkLst>
         <pc:docMk/>
       </pc:docMkLst>
@@ -209,12 +210,20 @@
           </ac:graphicFrameMkLst>
         </pc:graphicFrameChg>
       </pc:sldChg>
-      <pc:sldChg chg="add">
-        <pc:chgData name="Virve Räni" userId="161a7437-7ef4-49ec-91bf-54882f313dfe" providerId="ADAL" clId="{6D754EED-65AA-4A21-B175-6769012CF487}" dt="2026-04-14T07:59:42.079" v="308"/>
+      <pc:sldChg chg="modSp add modAnim">
+        <pc:chgData name="Virve Räni" userId="161a7437-7ef4-49ec-91bf-54882f313dfe" providerId="ADAL" clId="{6D754EED-65AA-4A21-B175-6769012CF487}" dt="2026-04-14T12:28:30.502" v="419" actId="20577"/>
         <pc:sldMkLst>
           <pc:docMk/>
           <pc:sldMk cId="1694942831" sldId="538"/>
         </pc:sldMkLst>
+        <pc:spChg chg="mod">
+          <ac:chgData name="Virve Räni" userId="161a7437-7ef4-49ec-91bf-54882f313dfe" providerId="ADAL" clId="{6D754EED-65AA-4A21-B175-6769012CF487}" dt="2026-04-14T12:28:30.502" v="419" actId="20577"/>
+          <ac:spMkLst>
+            <pc:docMk/>
+            <pc:sldMk cId="1694942831" sldId="538"/>
+            <ac:spMk id="3" creationId="{CF773C7E-895D-19CD-768D-5D677901F556}"/>
+          </ac:spMkLst>
+        </pc:spChg>
       </pc:sldChg>
       <pc:sldChg chg="add">
         <pc:chgData name="Virve Räni" userId="161a7437-7ef4-49ec-91bf-54882f313dfe" providerId="ADAL" clId="{6D754EED-65AA-4A21-B175-6769012CF487}" dt="2026-04-14T07:59:42.079" v="308"/>
@@ -238,12 +247,20 @@
           </ac:spMkLst>
         </pc:spChg>
       </pc:sldChg>
-      <pc:sldChg chg="add">
-        <pc:chgData name="Virve Räni" userId="161a7437-7ef4-49ec-91bf-54882f313dfe" providerId="ADAL" clId="{6D754EED-65AA-4A21-B175-6769012CF487}" dt="2026-04-14T07:59:42.079" v="308"/>
+      <pc:sldChg chg="modSp add mod">
+        <pc:chgData name="Virve Räni" userId="161a7437-7ef4-49ec-91bf-54882f313dfe" providerId="ADAL" clId="{6D754EED-65AA-4A21-B175-6769012CF487}" dt="2026-04-14T13:34:56.379" v="457" actId="20577"/>
         <pc:sldMkLst>
           <pc:docMk/>
           <pc:sldMk cId="1674079011" sldId="645"/>
         </pc:sldMkLst>
+        <pc:spChg chg="mod">
+          <ac:chgData name="Virve Räni" userId="161a7437-7ef4-49ec-91bf-54882f313dfe" providerId="ADAL" clId="{6D754EED-65AA-4A21-B175-6769012CF487}" dt="2026-04-14T13:34:56.379" v="457" actId="20577"/>
+          <ac:spMkLst>
+            <pc:docMk/>
+            <pc:sldMk cId="1674079011" sldId="645"/>
+            <ac:spMk id="3" creationId="{16CF7352-F93B-EE31-220C-F9E2EC9BDA2D}"/>
+          </ac:spMkLst>
+        </pc:spChg>
       </pc:sldChg>
       <pc:sldChg chg="modSp mod">
         <pc:chgData name="Virve Räni" userId="161a7437-7ef4-49ec-91bf-54882f313dfe" providerId="ADAL" clId="{6D754EED-65AA-4A21-B175-6769012CF487}" dt="2026-03-18T07:14:04.301" v="168" actId="20577"/>
@@ -291,7 +308,7 @@
         </pc:spChg>
       </pc:sldChg>
       <pc:sldChg chg="modSp new mod">
-        <pc:chgData name="Virve Räni" userId="161a7437-7ef4-49ec-91bf-54882f313dfe" providerId="ADAL" clId="{6D754EED-65AA-4A21-B175-6769012CF487}" dt="2026-04-14T08:00:46.453" v="353" actId="255"/>
+        <pc:chgData name="Virve Räni" userId="161a7437-7ef4-49ec-91bf-54882f313dfe" providerId="ADAL" clId="{6D754EED-65AA-4A21-B175-6769012CF487}" dt="2026-04-14T13:08:26.560" v="425" actId="20577"/>
         <pc:sldMkLst>
           <pc:docMk/>
           <pc:sldMk cId="1519353560" sldId="650"/>
@@ -305,11 +322,26 @@
           </ac:spMkLst>
         </pc:spChg>
         <pc:spChg chg="mod">
-          <ac:chgData name="Virve Räni" userId="161a7437-7ef4-49ec-91bf-54882f313dfe" providerId="ADAL" clId="{6D754EED-65AA-4A21-B175-6769012CF487}" dt="2026-04-14T08:00:46.453" v="353" actId="255"/>
+          <ac:chgData name="Virve Räni" userId="161a7437-7ef4-49ec-91bf-54882f313dfe" providerId="ADAL" clId="{6D754EED-65AA-4A21-B175-6769012CF487}" dt="2026-04-14T13:08:26.560" v="425" actId="20577"/>
           <ac:spMkLst>
             <pc:docMk/>
             <pc:sldMk cId="1519353560" sldId="650"/>
             <ac:spMk id="3" creationId="{4A604898-1A89-32D0-7964-55457B42E945}"/>
+          </ac:spMkLst>
+        </pc:spChg>
+      </pc:sldChg>
+      <pc:sldChg chg="modSp new mod">
+        <pc:chgData name="Virve Räni" userId="161a7437-7ef4-49ec-91bf-54882f313dfe" providerId="ADAL" clId="{6D754EED-65AA-4A21-B175-6769012CF487}" dt="2026-04-14T13:22:02.128" v="455" actId="255"/>
+        <pc:sldMkLst>
+          <pc:docMk/>
+          <pc:sldMk cId="4040495421" sldId="651"/>
+        </pc:sldMkLst>
+        <pc:spChg chg="mod">
+          <ac:chgData name="Virve Räni" userId="161a7437-7ef4-49ec-91bf-54882f313dfe" providerId="ADAL" clId="{6D754EED-65AA-4A21-B175-6769012CF487}" dt="2026-04-14T13:22:02.128" v="455" actId="255"/>
+          <ac:spMkLst>
+            <pc:docMk/>
+            <pc:sldMk cId="4040495421" sldId="651"/>
+            <ac:spMk id="3" creationId="{50FB47EC-5600-1AFF-8D51-BA5BBCCFFAA5}"/>
           </ac:spMkLst>
         </pc:spChg>
       </pc:sldChg>
@@ -4678,7 +4710,7 @@
           <a:p>
             <a:fld id="{46699514-027B-49BD-8B49-5054CA40ECF4}" type="slidenum">
               <a:rPr lang="en-US"/>
-              <a:t>25</a:t>
+              <a:t>26</a:t>
             </a:fld>
             <a:endParaRPr lang="en-US"/>
           </a:p>
@@ -38658,6 +38690,115 @@
   <p:cSld>
     <p:spTree>
       <p:nvGrpSpPr>
+        <p:cNvPr id="1" name=""/>
+        <p:cNvGrpSpPr/>
+        <p:nvPr/>
+      </p:nvGrpSpPr>
+      <p:grpSpPr>
+        <a:xfrm>
+          <a:off x="0" y="0"/>
+          <a:ext cx="0" cy="0"/>
+          <a:chOff x="0" y="0"/>
+          <a:chExt cx="0" cy="0"/>
+        </a:xfrm>
+      </p:grpSpPr>
+      <p:sp>
+        <p:nvSpPr>
+          <p:cNvPr id="2" name="Title 1">
+            <a:extLst>
+              <a:ext uri="{FF2B5EF4-FFF2-40B4-BE49-F238E27FC236}">
+                <a16:creationId xmlns:a16="http://schemas.microsoft.com/office/drawing/2014/main" id="{565434A3-72D8-5D29-2448-58E6D1B714FE}"/>
+              </a:ext>
+            </a:extLst>
+          </p:cNvPr>
+          <p:cNvSpPr>
+            <a:spLocks noGrp="1"/>
+          </p:cNvSpPr>
+          <p:nvPr>
+            <p:ph type="ctrTitle"/>
+          </p:nvPr>
+        </p:nvSpPr>
+        <p:spPr/>
+        <p:txBody>
+          <a:bodyPr/>
+          <a:lstStyle/>
+          <a:p>
+            <a:endParaRPr lang="et-EE"/>
+          </a:p>
+        </p:txBody>
+      </p:sp>
+      <p:sp>
+        <p:nvSpPr>
+          <p:cNvPr id="3" name="Content Placeholder 2">
+            <a:extLst>
+              <a:ext uri="{FF2B5EF4-FFF2-40B4-BE49-F238E27FC236}">
+                <a16:creationId xmlns:a16="http://schemas.microsoft.com/office/drawing/2014/main" id="{50FB47EC-5600-1AFF-8D51-BA5BBCCFFAA5}"/>
+              </a:ext>
+            </a:extLst>
+          </p:cNvPr>
+          <p:cNvSpPr>
+            <a:spLocks noGrp="1"/>
+          </p:cNvSpPr>
+          <p:nvPr>
+            <p:ph sz="quarter" idx="10"/>
+          </p:nvPr>
+        </p:nvSpPr>
+        <p:spPr/>
+        <p:txBody>
+          <a:bodyPr/>
+          <a:lstStyle/>
+          <a:p>
+            <a:endParaRPr lang="en-US" dirty="0"/>
+          </a:p>
+          <a:p>
+            <a:endParaRPr lang="en-US" dirty="0"/>
+          </a:p>
+          <a:p>
+            <a:endParaRPr lang="en-US" dirty="0"/>
+          </a:p>
+          <a:p>
+            <a:r>
+              <a:rPr lang="en-US" sz="3200" dirty="0" err="1"/>
+              <a:t>Grupitööde</a:t>
+            </a:r>
+            <a:r>
+              <a:rPr lang="en-US" sz="3200" dirty="0"/>
+              <a:t> </a:t>
+            </a:r>
+            <a:r>
+              <a:rPr lang="en-US" sz="3200" dirty="0" err="1"/>
+              <a:t>teemade</a:t>
+            </a:r>
+            <a:r>
+              <a:rPr lang="en-US" sz="3200" dirty="0"/>
+              <a:t> </a:t>
+            </a:r>
+            <a:r>
+              <a:rPr lang="en-US" sz="3200" dirty="0" err="1"/>
+              <a:t>valik</a:t>
+            </a:r>
+            <a:endParaRPr lang="et-EE" sz="3200" dirty="0"/>
+          </a:p>
+        </p:txBody>
+      </p:sp>
+    </p:spTree>
+    <p:extLst>
+      <p:ext uri="{BB962C8B-B14F-4D97-AF65-F5344CB8AC3E}">
+        <p14:creationId xmlns:p14="http://schemas.microsoft.com/office/powerpoint/2010/main" val="4040495421"/>
+      </p:ext>
+    </p:extLst>
+  </p:cSld>
+  <p:clrMapOvr>
+    <a:masterClrMapping/>
+  </p:clrMapOvr>
+</p:sld>
+</file>
+
+<file path=ppt/slides/slide24.xml><?xml version="1.0" encoding="utf-8"?>
+<p:sld xmlns:a="http://schemas.openxmlformats.org/drawingml/2006/main" xmlns:r="http://schemas.openxmlformats.org/officeDocument/2006/relationships" xmlns:p="http://schemas.openxmlformats.org/presentationml/2006/main">
+  <p:cSld>
+    <p:spTree>
+      <p:nvGrpSpPr>
         <p:cNvPr id="1" name="">
           <a:extLst>
             <a:ext uri="{FF2B5EF4-FFF2-40B4-BE49-F238E27FC236}">
@@ -39313,7 +39454,7 @@
 </p:sld>
 </file>
 
-<file path=ppt/slides/slide24.xml><?xml version="1.0" encoding="utf-8"?>
+<file path=ppt/slides/slide25.xml><?xml version="1.0" encoding="utf-8"?>
 <p:sld xmlns:a="http://schemas.openxmlformats.org/drawingml/2006/main" xmlns:r="http://schemas.openxmlformats.org/officeDocument/2006/relationships" xmlns:p="http://schemas.openxmlformats.org/presentationml/2006/main">
   <p:cSld>
     <p:spTree>
@@ -39421,7 +39562,7 @@
                 <a:ea typeface="Inter"/>
                 <a:cs typeface="Noto Serif"/>
               </a:rPr>
-              <a:t>Githubi</a:t>
+              <a:t>GitHubi</a:t>
             </a:r>
             <a:r>
               <a:rPr lang="en-US" sz="2400" dirty="0">
@@ -39491,7 +39632,7 @@
                 <a:ea typeface="Inter"/>
                 <a:cs typeface="Noto Serif"/>
               </a:rPr>
-              <a:t>Githubis</a:t>
+              <a:t>GitHubis</a:t>
             </a:r>
             <a:endParaRPr lang="en-US" sz="2400" dirty="0">
               <a:ea typeface="Inter"/>
@@ -40023,7 +40164,7 @@
 </p:sld>
 </file>
 
-<file path=ppt/slides/slide25.xml><?xml version="1.0" encoding="utf-8"?>
+<file path=ppt/slides/slide26.xml><?xml version="1.0" encoding="utf-8"?>
 <p:sld xmlns:a="http://schemas.openxmlformats.org/drawingml/2006/main" xmlns:r="http://schemas.openxmlformats.org/officeDocument/2006/relationships" xmlns:p="http://schemas.openxmlformats.org/presentationml/2006/main">
   <p:cSld>
     <p:spTree>
@@ -40182,7 +40323,7 @@
               <a:rPr lang="en-US" sz="2400" dirty="0">
                 <a:ea typeface="Inter"/>
               </a:rPr>
-              <a:t>Vali </a:t>
+              <a:t>VS Code: Vali </a:t>
             </a:r>
             <a:r>
               <a:rPr lang="en-US" sz="2400" dirty="0" err="1">
@@ -40194,7 +40335,31 @@
               <a:rPr lang="en-US" sz="2400" dirty="0">
                 <a:ea typeface="Inter"/>
               </a:rPr>
-              <a:t> Branch</a:t>
+              <a:t> Branch </a:t>
+            </a:r>
+            <a:r>
+              <a:rPr lang="en-US" sz="2400" dirty="0" err="1">
+                <a:ea typeface="Inter"/>
+              </a:rPr>
+              <a:t>või</a:t>
+            </a:r>
+            <a:r>
+              <a:rPr lang="en-US" sz="2400" dirty="0">
+                <a:ea typeface="Inter"/>
+              </a:rPr>
+              <a:t> loo </a:t>
+            </a:r>
+            <a:r>
+              <a:rPr lang="en-US" sz="2400" dirty="0" err="1">
+                <a:ea typeface="Inter"/>
+              </a:rPr>
+              <a:t>uus</a:t>
+            </a:r>
+            <a:r>
+              <a:rPr lang="en-US" sz="2400" dirty="0">
+                <a:ea typeface="Inter"/>
+              </a:rPr>
+              <a:t> “feature/..” branch</a:t>
             </a:r>
             <a:endParaRPr lang="en-US" dirty="0"/>
           </a:p>
@@ -40233,7 +40398,7 @@
               <a:t>VS Code: Lisa </a:t>
             </a:r>
             <a:r>
-              <a:rPr lang="en-US" sz="2400" err="1">
+              <a:rPr lang="en-US" sz="2400" dirty="0" err="1">
                 <a:ea typeface="Inter"/>
               </a:rPr>
               <a:t>kommentaar</a:t>
@@ -40275,7 +40440,7 @@
               <a:buAutoNum type="arabicPeriod"/>
             </a:pPr>
             <a:r>
-              <a:rPr lang="en-US" sz="2400" err="1">
+              <a:rPr lang="en-US" sz="2400" dirty="0" err="1">
                 <a:ea typeface="Inter"/>
               </a:rPr>
               <a:t>Github</a:t>
@@ -40287,10 +40452,10 @@
               <a:t>: Vali </a:t>
             </a:r>
             <a:r>
-              <a:rPr lang="en-US" sz="2400" err="1">
-                <a:ea typeface="Inter"/>
-              </a:rPr>
-              <a:t>enda</a:t>
+              <a:rPr lang="en-US" sz="2400" dirty="0" err="1">
+                <a:ea typeface="Inter"/>
+              </a:rPr>
+              <a:t>loodud</a:t>
             </a:r>
             <a:r>
               <a:rPr lang="en-US" sz="2400" dirty="0">
@@ -40377,7 +40542,7 @@
               </a:buClr>
               <a:buAutoNum type="arabicPeriod"/>
             </a:pPr>
-            <a:endParaRPr lang="en-US"/>
+            <a:endParaRPr lang="en-US" dirty="0"/>
           </a:p>
         </p:txBody>
       </p:sp>
@@ -40868,7 +41033,7 @@
 </p:sld>
 </file>
 
-<file path=ppt/slides/slide26.xml><?xml version="1.0" encoding="utf-8"?>
+<file path=ppt/slides/slide27.xml><?xml version="1.0" encoding="utf-8"?>
 <p:sld xmlns:a="http://schemas.openxmlformats.org/drawingml/2006/main" xmlns:r="http://schemas.openxmlformats.org/officeDocument/2006/relationships" xmlns:p="http://schemas.openxmlformats.org/presentationml/2006/main">
   <p:cSld>
     <p:spTree>
@@ -40967,7 +41132,15 @@
             </a:r>
             <a:r>
               <a:rPr lang="en-US" sz="2400" dirty="0" err="1"/>
-              <a:t>kohtumised</a:t>
+              <a:t>kohtumise</a:t>
+            </a:r>
+            <a:r>
+              <a:rPr lang="en-US" sz="2400" dirty="0"/>
+              <a:t> </a:t>
+            </a:r>
+            <a:r>
+              <a:rPr lang="en-US" sz="2400" dirty="0" err="1"/>
+              <a:t>ajad</a:t>
             </a:r>
             <a:r>
               <a:rPr lang="en-US" sz="2400" dirty="0"/>
@@ -48228,12 +48401,6 @@
 </file>
 
 <file path=customXml/item1.xml><?xml version="1.0" encoding="utf-8"?>
-<p:properties xmlns:p="http://schemas.microsoft.com/office/2006/metadata/properties" xmlns:xsi="http://www.w3.org/2001/XMLSchema-instance" xmlns:pc="http://schemas.microsoft.com/office/infopath/2007/PartnerControls">
-  <documentManagement/>
-</p:properties>
-</file>
-
-<file path=customXml/item2.xml><?xml version="1.0" encoding="utf-8"?>
 <ct:contentTypeSchema xmlns:ct="http://schemas.microsoft.com/office/2006/metadata/contentType" xmlns:ma="http://schemas.microsoft.com/office/2006/metadata/properties/metaAttributes" ct:_="" ma:_="" ma:contentTypeName="Document" ma:contentTypeID="0x010100C4D27B8FA8976546BCD79313C588588D" ma:contentTypeVersion="8" ma:contentTypeDescription="Create a new document." ma:contentTypeScope="" ma:versionID="a112c56f6fe148a79025c76584832af0">
   <xsd:schema xmlns:xsd="http://www.w3.org/2001/XMLSchema" xmlns:xs="http://www.w3.org/2001/XMLSchema" xmlns:p="http://schemas.microsoft.com/office/2006/metadata/properties" xmlns:ns2="a1a2d923-8fea-42f1-bd41-9cdfff65694e" targetNamespace="http://schemas.microsoft.com/office/2006/metadata/properties" ma:root="true" ma:fieldsID="97c8655d467eaa9470a714421e7268c0" ns2:_="">
     <xsd:import namespace="a1a2d923-8fea-42f1-bd41-9cdfff65694e"/>
@@ -48401,6 +48568,12 @@
 </ct:contentTypeSchema>
 </file>
 
+<file path=customXml/item2.xml><?xml version="1.0" encoding="utf-8"?>
+<p:properties xmlns:p="http://schemas.microsoft.com/office/2006/metadata/properties" xmlns:xsi="http://www.w3.org/2001/XMLSchema-instance" xmlns:pc="http://schemas.microsoft.com/office/infopath/2007/PartnerControls">
+  <documentManagement/>
+</p:properties>
+</file>
+
 <file path=customXml/item3.xml><?xml version="1.0" encoding="utf-8"?>
 <?mso-contentType ?>
 <FormTemplates xmlns="http://schemas.microsoft.com/sharepoint/v3/contenttype/forms">
@@ -48411,15 +48584,6 @@
 </file>
 
 <file path=customXml/itemProps1.xml><?xml version="1.0" encoding="utf-8"?>
-<ds:datastoreItem xmlns:ds="http://schemas.openxmlformats.org/officeDocument/2006/customXml" ds:itemID="{5BDF4908-A52A-47DD-A794-6E02D71942FC}">
-  <ds:schemaRefs>
-    <ds:schemaRef ds:uri="http://schemas.microsoft.com/office/2006/metadata/properties"/>
-    <ds:schemaRef ds:uri="http://schemas.microsoft.com/office/infopath/2007/PartnerControls"/>
-  </ds:schemaRefs>
-</ds:datastoreItem>
-</file>
-
-<file path=customXml/itemProps2.xml><?xml version="1.0" encoding="utf-8"?>
 <ds:datastoreItem xmlns:ds="http://schemas.openxmlformats.org/officeDocument/2006/customXml" ds:itemID="{9CF4F972-2392-44D0-AA45-41AC4FDC4A59}">
   <ds:schemaRefs>
     <ds:schemaRef ds:uri="a1a2d923-8fea-42f1-bd41-9cdfff65694e"/>
@@ -48437,6 +48601,15 @@
 </ds:datastoreItem>
 </file>
 
+<file path=customXml/itemProps2.xml><?xml version="1.0" encoding="utf-8"?>
+<ds:datastoreItem xmlns:ds="http://schemas.openxmlformats.org/officeDocument/2006/customXml" ds:itemID="{5BDF4908-A52A-47DD-A794-6E02D71942FC}">
+  <ds:schemaRefs>
+    <ds:schemaRef ds:uri="http://schemas.microsoft.com/office/2006/metadata/properties"/>
+    <ds:schemaRef ds:uri="http://schemas.microsoft.com/office/infopath/2007/PartnerControls"/>
+  </ds:schemaRefs>
+</ds:datastoreItem>
+</file>
+
 <file path=customXml/itemProps3.xml><?xml version="1.0" encoding="utf-8"?>
 <ds:datastoreItem xmlns:ds="http://schemas.openxmlformats.org/officeDocument/2006/customXml" ds:itemID="{9DC439CA-6F1C-4005-ACA6-A52E04DEE0A7}">
   <ds:schemaRefs>

--- a/Day14/14-paev-andmetarkus-esitlus.pptx
+++ b/Day14/14-paev-andmetarkus-esitlus.pptx
@@ -5,10 +5,10 @@
     <p:sldMasterId id="2147483648" r:id="rId4"/>
   </p:sldMasterIdLst>
   <p:notesMasterIdLst>
-    <p:notesMasterId r:id="rId32"/>
+    <p:notesMasterId r:id="rId34"/>
   </p:notesMasterIdLst>
   <p:handoutMasterIdLst>
-    <p:handoutMasterId r:id="rId33"/>
+    <p:handoutMasterId r:id="rId35"/>
   </p:handoutMasterIdLst>
   <p:sldIdLst>
     <p:sldId id="417" r:id="rId5"/>
@@ -21,47 +21,51 @@
     <p:sldId id="575" r:id="rId12"/>
     <p:sldId id="504" r:id="rId13"/>
     <p:sldId id="576" r:id="rId14"/>
-    <p:sldId id="441" r:id="rId15"/>
-    <p:sldId id="566" r:id="rId16"/>
-    <p:sldId id="614" r:id="rId17"/>
-    <p:sldId id="615" r:id="rId18"/>
-    <p:sldId id="616" r:id="rId19"/>
-    <p:sldId id="617" r:id="rId20"/>
-    <p:sldId id="618" r:id="rId21"/>
-    <p:sldId id="569" r:id="rId22"/>
-    <p:sldId id="577" r:id="rId23"/>
-    <p:sldId id="568" r:id="rId24"/>
-    <p:sldId id="647" r:id="rId25"/>
-    <p:sldId id="649" r:id="rId26"/>
-    <p:sldId id="651" r:id="rId27"/>
-    <p:sldId id="574" r:id="rId28"/>
-    <p:sldId id="645" r:id="rId29"/>
-    <p:sldId id="538" r:id="rId30"/>
-    <p:sldId id="650" r:id="rId31"/>
+    <p:sldId id="666" r:id="rId15"/>
+    <p:sldId id="441" r:id="rId16"/>
+    <p:sldId id="566" r:id="rId17"/>
+    <p:sldId id="614" r:id="rId18"/>
+    <p:sldId id="615" r:id="rId19"/>
+    <p:sldId id="616" r:id="rId20"/>
+    <p:sldId id="617" r:id="rId21"/>
+    <p:sldId id="618" r:id="rId22"/>
+    <p:sldId id="569" r:id="rId23"/>
+    <p:sldId id="577" r:id="rId24"/>
+    <p:sldId id="568" r:id="rId25"/>
+    <p:sldId id="647" r:id="rId26"/>
+    <p:sldId id="649" r:id="rId27"/>
+    <p:sldId id="651" r:id="rId28"/>
+    <p:sldId id="667" r:id="rId29"/>
+    <p:sldId id="574" r:id="rId30"/>
+    <p:sldId id="645" r:id="rId31"/>
+    <p:sldId id="538" r:id="rId32"/>
+    <p:sldId id="650" r:id="rId33"/>
   </p:sldIdLst>
   <p:sldSz cx="12192000" cy="6858000"/>
   <p:notesSz cx="6858000" cy="9144000"/>
   <p:embeddedFontLst>
     <p:embeddedFont>
       <p:font typeface="Inter" panose="020B0604020202020204" charset="0"/>
-      <p:regular r:id="rId34"/>
-      <p:bold r:id="rId35"/>
+      <p:regular r:id="rId36"/>
+      <p:bold r:id="rId37"/>
+      <p:italic r:id="rId38"/>
+      <p:boldItalic r:id="rId39"/>
     </p:embeddedFont>
     <p:embeddedFont>
       <p:font typeface="Inter Bold" panose="020B0604020202020204" charset="0"/>
-      <p:bold r:id="rId36"/>
+      <p:bold r:id="rId40"/>
     </p:embeddedFont>
     <p:embeddedFont>
       <p:font typeface="Noto Serif" panose="02020600060500020200" pitchFamily="18" charset="0"/>
-      <p:regular r:id="rId37"/>
-      <p:bold r:id="rId38"/>
-      <p:italic r:id="rId39"/>
-      <p:boldItalic r:id="rId40"/>
+      <p:regular r:id="rId41"/>
+      <p:bold r:id="rId42"/>
+      <p:italic r:id="rId43"/>
+      <p:boldItalic r:id="rId44"/>
     </p:embeddedFont>
     <p:embeddedFont>
       <p:font typeface="Poppins SemiBold" panose="00000700000000000000" pitchFamily="2" charset="0"/>
-      <p:bold r:id="rId41"/>
-      <p:boldItalic r:id="rId42"/>
+      <p:bold r:id="rId45"/>
+      <p:boldItalic r:id="rId46"/>
     </p:embeddedFont>
   </p:embeddedFontLst>
   <p:defaultTextStyle>
@@ -173,7 +177,7 @@
 <file path=ppt/revisionInfo.xml><?xml version="1.0" encoding="utf-8"?>
 <p1510:revInfo xmlns:a="http://schemas.openxmlformats.org/drawingml/2006/main" xmlns:r="http://schemas.openxmlformats.org/officeDocument/2006/relationships" xmlns:p1510="http://schemas.microsoft.com/office/powerpoint/2015/10/main">
   <p1510:revLst>
-    <p1510:client id="{1CEC6D2C-2DE5-4622-B5C9-CE21C0F1885C}" v="70" dt="2026-04-14T12:28:30.502"/>
+    <p1510:client id="{1CEC6D2C-2DE5-4622-B5C9-CE21C0F1885C}" v="18" dt="2026-04-17T06:25:19.698"/>
   </p1510:revLst>
 </p1510:revInfo>
 </file>
@@ -183,10 +187,25 @@
   <pc:docChgLst>
     <pc:chgData name="Virve Räni" userId="161a7437-7ef4-49ec-91bf-54882f313dfe" providerId="ADAL" clId="{6D754EED-65AA-4A21-B175-6769012CF487}"/>
     <pc:docChg chg="addSld delSld modSld sldOrd">
-      <pc:chgData name="Virve Räni" userId="161a7437-7ef4-49ec-91bf-54882f313dfe" providerId="ADAL" clId="{6D754EED-65AA-4A21-B175-6769012CF487}" dt="2026-04-14T13:34:56.379" v="457" actId="20577"/>
+      <pc:chgData name="Virve Räni" userId="161a7437-7ef4-49ec-91bf-54882f313dfe" providerId="ADAL" clId="{6D754EED-65AA-4A21-B175-6769012CF487}" dt="2026-04-17T12:04:53.711" v="556" actId="20577"/>
       <pc:docMkLst>
         <pc:docMk/>
       </pc:docMkLst>
+      <pc:sldChg chg="modSp modAnim">
+        <pc:chgData name="Virve Räni" userId="161a7437-7ef4-49ec-91bf-54882f313dfe" providerId="ADAL" clId="{6D754EED-65AA-4A21-B175-6769012CF487}" dt="2026-04-17T06:25:19.679" v="547" actId="255"/>
+        <pc:sldMkLst>
+          <pc:docMk/>
+          <pc:sldMk cId="223049910" sldId="439"/>
+        </pc:sldMkLst>
+        <pc:spChg chg="mod">
+          <ac:chgData name="Virve Räni" userId="161a7437-7ef4-49ec-91bf-54882f313dfe" providerId="ADAL" clId="{6D754EED-65AA-4A21-B175-6769012CF487}" dt="2026-04-17T06:25:19.679" v="547" actId="255"/>
+          <ac:spMkLst>
+            <pc:docMk/>
+            <pc:sldMk cId="223049910" sldId="439"/>
+            <ac:spMk id="3" creationId="{EA490F2F-9A95-2356-2F41-6D1F85E5FA20}"/>
+          </ac:spMkLst>
+        </pc:spChg>
+      </pc:sldChg>
       <pc:sldChg chg="modSp mod">
         <pc:chgData name="Virve Räni" userId="161a7437-7ef4-49ec-91bf-54882f313dfe" providerId="ADAL" clId="{6D754EED-65AA-4A21-B175-6769012CF487}" dt="2026-04-14T07:54:41.652" v="271"/>
         <pc:sldMkLst>
@@ -225,12 +244,20 @@
           </ac:spMkLst>
         </pc:spChg>
       </pc:sldChg>
-      <pc:sldChg chg="add">
-        <pc:chgData name="Virve Räni" userId="161a7437-7ef4-49ec-91bf-54882f313dfe" providerId="ADAL" clId="{6D754EED-65AA-4A21-B175-6769012CF487}" dt="2026-04-14T07:59:42.079" v="308"/>
+      <pc:sldChg chg="modSp add mod">
+        <pc:chgData name="Virve Räni" userId="161a7437-7ef4-49ec-91bf-54882f313dfe" providerId="ADAL" clId="{6D754EED-65AA-4A21-B175-6769012CF487}" dt="2026-04-17T05:48:32.378" v="475" actId="20577"/>
         <pc:sldMkLst>
           <pc:docMk/>
           <pc:sldMk cId="645017635" sldId="574"/>
         </pc:sldMkLst>
+        <pc:spChg chg="mod">
+          <ac:chgData name="Virve Räni" userId="161a7437-7ef4-49ec-91bf-54882f313dfe" providerId="ADAL" clId="{6D754EED-65AA-4A21-B175-6769012CF487}" dt="2026-04-17T05:48:32.378" v="475" actId="20577"/>
+          <ac:spMkLst>
+            <pc:docMk/>
+            <pc:sldMk cId="645017635" sldId="574"/>
+            <ac:spMk id="2" creationId="{D4725537-CB3E-C083-F8A7-F00B6AE12D6E}"/>
+          </ac:spMkLst>
+        </pc:spChg>
       </pc:sldChg>
       <pc:sldChg chg="modSp mod">
         <pc:chgData name="Virve Räni" userId="161a7437-7ef4-49ec-91bf-54882f313dfe" providerId="ADAL" clId="{6D754EED-65AA-4A21-B175-6769012CF487}" dt="2026-03-18T07:09:43.035" v="153" actId="20577"/>
@@ -248,11 +275,19 @@
         </pc:spChg>
       </pc:sldChg>
       <pc:sldChg chg="modSp add mod">
-        <pc:chgData name="Virve Räni" userId="161a7437-7ef4-49ec-91bf-54882f313dfe" providerId="ADAL" clId="{6D754EED-65AA-4A21-B175-6769012CF487}" dt="2026-04-14T13:34:56.379" v="457" actId="20577"/>
+        <pc:chgData name="Virve Räni" userId="161a7437-7ef4-49ec-91bf-54882f313dfe" providerId="ADAL" clId="{6D754EED-65AA-4A21-B175-6769012CF487}" dt="2026-04-17T05:48:38.140" v="484" actId="20577"/>
         <pc:sldMkLst>
           <pc:docMk/>
           <pc:sldMk cId="1674079011" sldId="645"/>
         </pc:sldMkLst>
+        <pc:spChg chg="mod">
+          <ac:chgData name="Virve Räni" userId="161a7437-7ef4-49ec-91bf-54882f313dfe" providerId="ADAL" clId="{6D754EED-65AA-4A21-B175-6769012CF487}" dt="2026-04-17T05:48:38.140" v="484" actId="20577"/>
+          <ac:spMkLst>
+            <pc:docMk/>
+            <pc:sldMk cId="1674079011" sldId="645"/>
+            <ac:spMk id="2" creationId="{EF462382-376F-D403-218E-FAD6D454E702}"/>
+          </ac:spMkLst>
+        </pc:spChg>
         <pc:spChg chg="mod">
           <ac:chgData name="Virve Räni" userId="161a7437-7ef4-49ec-91bf-54882f313dfe" providerId="ADAL" clId="{6D754EED-65AA-4A21-B175-6769012CF487}" dt="2026-04-14T13:34:56.379" v="457" actId="20577"/>
           <ac:spMkLst>
@@ -277,29 +312,14 @@
           </ac:spMkLst>
         </pc:spChg>
       </pc:sldChg>
-      <pc:sldChg chg="modSp new del mod">
-        <pc:chgData name="Virve Räni" userId="161a7437-7ef4-49ec-91bf-54882f313dfe" providerId="ADAL" clId="{6D754EED-65AA-4A21-B175-6769012CF487}" dt="2026-04-14T07:59:46.607" v="309" actId="47"/>
-        <pc:sldMkLst>
-          <pc:docMk/>
-          <pc:sldMk cId="3046746180" sldId="648"/>
-        </pc:sldMkLst>
-        <pc:spChg chg="mod">
-          <ac:chgData name="Virve Räni" userId="161a7437-7ef4-49ec-91bf-54882f313dfe" providerId="ADAL" clId="{6D754EED-65AA-4A21-B175-6769012CF487}" dt="2026-04-14T07:55:26.861" v="307" actId="20577"/>
-          <ac:spMkLst>
-            <pc:docMk/>
-            <pc:sldMk cId="3046746180" sldId="648"/>
-            <ac:spMk id="2" creationId="{6A72FBA8-9375-0A43-3A3A-3ADB365D7C58}"/>
-          </ac:spMkLst>
-        </pc:spChg>
-      </pc:sldChg>
       <pc:sldChg chg="modSp add mod">
-        <pc:chgData name="Virve Räni" userId="161a7437-7ef4-49ec-91bf-54882f313dfe" providerId="ADAL" clId="{6D754EED-65AA-4A21-B175-6769012CF487}" dt="2026-04-14T07:55:19.380" v="284" actId="20577"/>
+        <pc:chgData name="Virve Räni" userId="161a7437-7ef4-49ec-91bf-54882f313dfe" providerId="ADAL" clId="{6D754EED-65AA-4A21-B175-6769012CF487}" dt="2026-04-17T12:04:53.711" v="556" actId="20577"/>
         <pc:sldMkLst>
           <pc:docMk/>
           <pc:sldMk cId="3267241536" sldId="649"/>
         </pc:sldMkLst>
         <pc:spChg chg="mod">
-          <ac:chgData name="Virve Räni" userId="161a7437-7ef4-49ec-91bf-54882f313dfe" providerId="ADAL" clId="{6D754EED-65AA-4A21-B175-6769012CF487}" dt="2026-04-14T07:55:19.380" v="284" actId="20577"/>
+          <ac:chgData name="Virve Räni" userId="161a7437-7ef4-49ec-91bf-54882f313dfe" providerId="ADAL" clId="{6D754EED-65AA-4A21-B175-6769012CF487}" dt="2026-04-17T12:04:53.711" v="556" actId="20577"/>
           <ac:spMkLst>
             <pc:docMk/>
             <pc:sldMk cId="3267241536" sldId="649"/>
@@ -331,17 +351,62 @@
         </pc:spChg>
       </pc:sldChg>
       <pc:sldChg chg="modSp new mod">
-        <pc:chgData name="Virve Räni" userId="161a7437-7ef4-49ec-91bf-54882f313dfe" providerId="ADAL" clId="{6D754EED-65AA-4A21-B175-6769012CF487}" dt="2026-04-14T13:22:02.128" v="455" actId="255"/>
+        <pc:chgData name="Virve Räni" userId="161a7437-7ef4-49ec-91bf-54882f313dfe" providerId="ADAL" clId="{6D754EED-65AA-4A21-B175-6769012CF487}" dt="2026-04-17T05:48:25.580" v="466" actId="20577"/>
         <pc:sldMkLst>
           <pc:docMk/>
           <pc:sldMk cId="4040495421" sldId="651"/>
         </pc:sldMkLst>
         <pc:spChg chg="mod">
-          <ac:chgData name="Virve Räni" userId="161a7437-7ef4-49ec-91bf-54882f313dfe" providerId="ADAL" clId="{6D754EED-65AA-4A21-B175-6769012CF487}" dt="2026-04-14T13:22:02.128" v="455" actId="255"/>
+          <ac:chgData name="Virve Räni" userId="161a7437-7ef4-49ec-91bf-54882f313dfe" providerId="ADAL" clId="{6D754EED-65AA-4A21-B175-6769012CF487}" dt="2026-04-17T05:48:25.580" v="466" actId="20577"/>
           <ac:spMkLst>
             <pc:docMk/>
             <pc:sldMk cId="4040495421" sldId="651"/>
             <ac:spMk id="3" creationId="{50FB47EC-5600-1AFF-8D51-BA5BBCCFFAA5}"/>
+          </ac:spMkLst>
+        </pc:spChg>
+      </pc:sldChg>
+      <pc:sldChg chg="modSp add mod">
+        <pc:chgData name="Virve Räni" userId="161a7437-7ef4-49ec-91bf-54882f313dfe" providerId="ADAL" clId="{6D754EED-65AA-4A21-B175-6769012CF487}" dt="2026-04-17T05:51:47.825" v="486" actId="255"/>
+        <pc:sldMkLst>
+          <pc:docMk/>
+          <pc:sldMk cId="1220852360" sldId="666"/>
+        </pc:sldMkLst>
+        <pc:spChg chg="mod">
+          <ac:chgData name="Virve Räni" userId="161a7437-7ef4-49ec-91bf-54882f313dfe" providerId="ADAL" clId="{6D754EED-65AA-4A21-B175-6769012CF487}" dt="2026-04-17T05:51:47.825" v="486" actId="255"/>
+          <ac:spMkLst>
+            <pc:docMk/>
+            <pc:sldMk cId="1220852360" sldId="666"/>
+            <ac:spMk id="2" creationId="{B3216866-C2D4-7EB2-C742-4CECC0960837}"/>
+          </ac:spMkLst>
+        </pc:spChg>
+      </pc:sldChg>
+      <pc:sldChg chg="modSp new del mod">
+        <pc:chgData name="Virve Räni" userId="161a7437-7ef4-49ec-91bf-54882f313dfe" providerId="ADAL" clId="{6D754EED-65AA-4A21-B175-6769012CF487}" dt="2026-04-17T05:59:54.542" v="490" actId="47"/>
+        <pc:sldMkLst>
+          <pc:docMk/>
+          <pc:sldMk cId="673832288" sldId="667"/>
+        </pc:sldMkLst>
+        <pc:spChg chg="mod">
+          <ac:chgData name="Virve Räni" userId="161a7437-7ef4-49ec-91bf-54882f313dfe" providerId="ADAL" clId="{6D754EED-65AA-4A21-B175-6769012CF487}" dt="2026-04-17T05:59:52.822" v="489" actId="20577"/>
+          <ac:spMkLst>
+            <pc:docMk/>
+            <pc:sldMk cId="673832288" sldId="667"/>
+            <ac:spMk id="3" creationId="{E46C745E-90DC-891C-2C08-BA5ECB58CA53}"/>
+          </ac:spMkLst>
+        </pc:spChg>
+      </pc:sldChg>
+      <pc:sldChg chg="modSp add mod">
+        <pc:chgData name="Virve Räni" userId="161a7437-7ef4-49ec-91bf-54882f313dfe" providerId="ADAL" clId="{6D754EED-65AA-4A21-B175-6769012CF487}" dt="2026-04-17T06:00:08.364" v="532" actId="20577"/>
+        <pc:sldMkLst>
+          <pc:docMk/>
+          <pc:sldMk cId="2662955064" sldId="667"/>
+        </pc:sldMkLst>
+        <pc:spChg chg="mod">
+          <ac:chgData name="Virve Räni" userId="161a7437-7ef4-49ec-91bf-54882f313dfe" providerId="ADAL" clId="{6D754EED-65AA-4A21-B175-6769012CF487}" dt="2026-04-17T06:00:08.364" v="532" actId="20577"/>
+          <ac:spMkLst>
+            <pc:docMk/>
+            <pc:sldMk cId="2662955064" sldId="667"/>
+            <ac:spMk id="3" creationId="{277AB89A-331D-46B7-10E3-87ABBD0779FE}"/>
           </ac:spMkLst>
         </pc:spChg>
       </pc:sldChg>
@@ -444,7 +509,7 @@
           <a:p>
             <a:fld id="{F9D2AD6E-DEDD-49A0-A4BE-7A081A9112DA}" type="datetimeFigureOut">
               <a:rPr lang="en-US" smtClean="0"/>
-              <a:t>4/14/2026</a:t>
+              <a:t>4/17/2026</a:t>
             </a:fld>
             <a:endParaRPr lang="en-US"/>
           </a:p>
@@ -620,7 +685,7 @@
           </a:lstStyle>
           <a:p>
             <a:fld id="{2AF9C1A6-4321-41FA-B001-4140F0E2457F}" type="datetimeFigureOut">
-              <a:t>14.04.2026</a:t>
+              <a:t>17.04.2026</a:t>
             </a:fld>
             <a:endParaRPr lang="en-US"/>
           </a:p>
@@ -4431,6 +4496,174 @@
   <p:cSld>
     <p:spTree>
       <p:nvGrpSpPr>
+        <p:cNvPr id="1" name=""/>
+        <p:cNvGrpSpPr/>
+        <p:nvPr/>
+      </p:nvGrpSpPr>
+      <p:grpSpPr>
+        <a:xfrm>
+          <a:off x="0" y="0"/>
+          <a:ext cx="0" cy="0"/>
+          <a:chOff x="0" y="0"/>
+          <a:chExt cx="0" cy="0"/>
+        </a:xfrm>
+      </p:grpSpPr>
+      <p:sp>
+        <p:nvSpPr>
+          <p:cNvPr id="2" name="Slide Image Placeholder 1"/>
+          <p:cNvSpPr>
+            <a:spLocks noGrp="1" noRot="1" noChangeAspect="1"/>
+          </p:cNvSpPr>
+          <p:nvPr>
+            <p:ph type="sldImg"/>
+          </p:nvPr>
+        </p:nvSpPr>
+        <p:spPr/>
+      </p:sp>
+      <p:sp>
+        <p:nvSpPr>
+          <p:cNvPr id="3" name="Notes Placeholder 2"/>
+          <p:cNvSpPr>
+            <a:spLocks noGrp="1"/>
+          </p:cNvSpPr>
+          <p:nvPr>
+            <p:ph type="body" idx="1"/>
+          </p:nvPr>
+        </p:nvSpPr>
+        <p:spPr/>
+        <p:txBody>
+          <a:bodyPr/>
+          <a:lstStyle/>
+          <a:p>
+            <a:endParaRPr lang="et-EE" dirty="0"/>
+          </a:p>
+        </p:txBody>
+      </p:sp>
+      <p:sp>
+        <p:nvSpPr>
+          <p:cNvPr id="4" name="Slide Number Placeholder 3"/>
+          <p:cNvSpPr>
+            <a:spLocks noGrp="1"/>
+          </p:cNvSpPr>
+          <p:nvPr>
+            <p:ph type="sldNum" sz="quarter" idx="5"/>
+          </p:nvPr>
+        </p:nvSpPr>
+        <p:spPr/>
+        <p:txBody>
+          <a:bodyPr/>
+          <a:lstStyle/>
+          <a:p>
+            <a:fld id="{46699514-027B-49BD-8B49-5054CA40ECF4}" type="slidenum">
+              <a:rPr lang="et-EE" smtClean="0"/>
+              <a:t>23</a:t>
+            </a:fld>
+            <a:endParaRPr lang="et-EE"/>
+          </a:p>
+        </p:txBody>
+      </p:sp>
+    </p:spTree>
+    <p:extLst>
+      <p:ext uri="{BB962C8B-B14F-4D97-AF65-F5344CB8AC3E}">
+        <p14:creationId xmlns:p14="http://schemas.microsoft.com/office/powerpoint/2010/main" val="3510678048"/>
+      </p:ext>
+    </p:extLst>
+  </p:cSld>
+  <p:clrMapOvr>
+    <a:masterClrMapping/>
+  </p:clrMapOvr>
+</p:notes>
+</file>
+
+<file path=ppt/notesSlides/notesSlide7.xml><?xml version="1.0" encoding="utf-8"?>
+<p:notes xmlns:a="http://schemas.openxmlformats.org/drawingml/2006/main" xmlns:r="http://schemas.openxmlformats.org/officeDocument/2006/relationships" xmlns:p="http://schemas.openxmlformats.org/presentationml/2006/main">
+  <p:cSld>
+    <p:spTree>
+      <p:nvGrpSpPr>
+        <p:cNvPr id="1" name=""/>
+        <p:cNvGrpSpPr/>
+        <p:nvPr/>
+      </p:nvGrpSpPr>
+      <p:grpSpPr>
+        <a:xfrm>
+          <a:off x="0" y="0"/>
+          <a:ext cx="0" cy="0"/>
+          <a:chOff x="0" y="0"/>
+          <a:chExt cx="0" cy="0"/>
+        </a:xfrm>
+      </p:grpSpPr>
+      <p:sp>
+        <p:nvSpPr>
+          <p:cNvPr id="2" name="Slide Image Placeholder 1"/>
+          <p:cNvSpPr>
+            <a:spLocks noGrp="1" noRot="1" noChangeAspect="1"/>
+          </p:cNvSpPr>
+          <p:nvPr>
+            <p:ph type="sldImg"/>
+          </p:nvPr>
+        </p:nvSpPr>
+        <p:spPr/>
+      </p:sp>
+      <p:sp>
+        <p:nvSpPr>
+          <p:cNvPr id="3" name="Notes Placeholder 2"/>
+          <p:cNvSpPr>
+            <a:spLocks noGrp="1"/>
+          </p:cNvSpPr>
+          <p:nvPr>
+            <p:ph type="body" idx="1"/>
+          </p:nvPr>
+        </p:nvSpPr>
+        <p:spPr/>
+        <p:txBody>
+          <a:bodyPr/>
+          <a:lstStyle/>
+          <a:p>
+            <a:endParaRPr lang="et-EE" dirty="0"/>
+          </a:p>
+        </p:txBody>
+      </p:sp>
+      <p:sp>
+        <p:nvSpPr>
+          <p:cNvPr id="4" name="Slide Number Placeholder 3"/>
+          <p:cNvSpPr>
+            <a:spLocks noGrp="1"/>
+          </p:cNvSpPr>
+          <p:nvPr>
+            <p:ph type="sldNum" sz="quarter" idx="5"/>
+          </p:nvPr>
+        </p:nvSpPr>
+        <p:spPr/>
+        <p:txBody>
+          <a:bodyPr/>
+          <a:lstStyle/>
+          <a:p>
+            <a:fld id="{46699514-027B-49BD-8B49-5054CA40ECF4}" type="slidenum">
+              <a:rPr lang="et-EE" smtClean="0"/>
+              <a:t>24</a:t>
+            </a:fld>
+            <a:endParaRPr lang="et-EE"/>
+          </a:p>
+        </p:txBody>
+      </p:sp>
+    </p:spTree>
+    <p:extLst>
+      <p:ext uri="{BB962C8B-B14F-4D97-AF65-F5344CB8AC3E}">
+        <p14:creationId xmlns:p14="http://schemas.microsoft.com/office/powerpoint/2010/main" val="61615968"/>
+      </p:ext>
+    </p:extLst>
+  </p:cSld>
+  <p:clrMapOvr>
+    <a:masterClrMapping/>
+  </p:clrMapOvr>
+</p:notes>
+</file>
+
+<file path=ppt/notesSlides/notesSlide8.xml><?xml version="1.0" encoding="utf-8"?>
+<p:notes xmlns:a="http://schemas.openxmlformats.org/drawingml/2006/main" xmlns:r="http://schemas.openxmlformats.org/officeDocument/2006/relationships" xmlns:p="http://schemas.openxmlformats.org/presentationml/2006/main">
+  <p:cSld>
+    <p:spTree>
+      <p:nvGrpSpPr>
         <p:cNvPr id="1" name="">
           <a:extLst>
             <a:ext uri="{FF2B5EF4-FFF2-40B4-BE49-F238E27FC236}">
@@ -4710,7 +4943,7 @@
           <a:p>
             <a:fld id="{46699514-027B-49BD-8B49-5054CA40ECF4}" type="slidenum">
               <a:rPr lang="en-US"/>
-              <a:t>26</a:t>
+              <a:t>28</a:t>
             </a:fld>
             <a:endParaRPr lang="en-US"/>
           </a:p>
@@ -15856,7 +16089,7 @@
           <a:p>
             <a:fld id="{DE840A40-73C8-4048-8140-49F5D65BB431}" type="datetimeFigureOut">
               <a:rPr lang="et-EE" smtClean="0"/>
-              <a:t>14.04.2026</a:t>
+              <a:t>17.04.2026</a:t>
             </a:fld>
             <a:endParaRPr lang="et-EE"/>
           </a:p>
@@ -28865,6 +29098,384 @@
   <p:cSld>
     <p:spTree>
       <p:nvGrpSpPr>
+        <p:cNvPr id="1" name=""/>
+        <p:cNvGrpSpPr/>
+        <p:nvPr/>
+      </p:nvGrpSpPr>
+      <p:grpSpPr>
+        <a:xfrm>
+          <a:off x="0" y="0"/>
+          <a:ext cx="0" cy="0"/>
+          <a:chOff x="0" y="0"/>
+          <a:chExt cx="0" cy="0"/>
+        </a:xfrm>
+      </p:grpSpPr>
+      <p:sp>
+        <p:nvSpPr>
+          <p:cNvPr id="2" name="Title 1">
+            <a:extLst>
+              <a:ext uri="{FF2B5EF4-FFF2-40B4-BE49-F238E27FC236}">
+                <a16:creationId xmlns:a16="http://schemas.microsoft.com/office/drawing/2014/main" id="{B3216866-C2D4-7EB2-C742-4CECC0960837}"/>
+              </a:ext>
+            </a:extLst>
+          </p:cNvPr>
+          <p:cNvSpPr>
+            <a:spLocks noGrp="1"/>
+          </p:cNvSpPr>
+          <p:nvPr>
+            <p:ph type="ctrTitle"/>
+          </p:nvPr>
+        </p:nvSpPr>
+        <p:spPr/>
+        <p:txBody>
+          <a:bodyPr/>
+          <a:lstStyle/>
+          <a:p>
+            <a:r>
+              <a:rPr lang="et-EE" sz="2800" noProof="0" dirty="0"/>
+              <a:t>Kas tegu on isikuandmete töötlemise rikkumisega?</a:t>
+            </a:r>
+          </a:p>
+        </p:txBody>
+      </p:sp>
+      <p:sp>
+        <p:nvSpPr>
+          <p:cNvPr id="3" name="Content Placeholder 2">
+            <a:extLst>
+              <a:ext uri="{FF2B5EF4-FFF2-40B4-BE49-F238E27FC236}">
+                <a16:creationId xmlns:a16="http://schemas.microsoft.com/office/drawing/2014/main" id="{43C5A51D-F719-DB7E-B5A7-4CFB6B8E6B73}"/>
+              </a:ext>
+            </a:extLst>
+          </p:cNvPr>
+          <p:cNvSpPr>
+            <a:spLocks noGrp="1"/>
+          </p:cNvSpPr>
+          <p:nvPr>
+            <p:ph sz="quarter" idx="10"/>
+          </p:nvPr>
+        </p:nvSpPr>
+        <p:spPr/>
+        <p:txBody>
+          <a:bodyPr/>
+          <a:lstStyle/>
+          <a:p>
+            <a:pPr marL="342900" indent="-342900">
+              <a:buFont typeface="+mj-lt"/>
+              <a:buAutoNum type="arabicPeriod"/>
+            </a:pPr>
+            <a:r>
+              <a:rPr lang="et-EE" sz="2000" noProof="0" dirty="0"/>
+              <a:t>Teenusepakkuja kogub kliendi e-posti aadressi, et saata talle arveid. Hiljem hakkab sama ettevõte seda aadressi kasutama ka </a:t>
+            </a:r>
+            <a:r>
+              <a:rPr lang="et-EE" sz="2000" noProof="0" dirty="0" err="1"/>
+              <a:t>poliitreklaamiks</a:t>
+            </a:r>
+            <a:r>
+              <a:rPr lang="et-EE" sz="2000" noProof="0" dirty="0"/>
+              <a:t>, ilma kliendi nõusolekuta.</a:t>
+            </a:r>
+          </a:p>
+          <a:p>
+            <a:pPr marL="342900" indent="-342900">
+              <a:buFont typeface="+mj-lt"/>
+              <a:buAutoNum type="arabicPeriod"/>
+            </a:pPr>
+            <a:endParaRPr lang="et-EE" sz="2000" noProof="0" dirty="0"/>
+          </a:p>
+          <a:p>
+            <a:pPr marL="342900" indent="-342900">
+              <a:buFont typeface="+mj-lt"/>
+              <a:buAutoNum type="arabicPeriod"/>
+            </a:pPr>
+            <a:r>
+              <a:rPr lang="et-EE" sz="2000" noProof="0" dirty="0"/>
+              <a:t>Uue rakenduse kasutaja registreerib end teenusesse ja rakendus küsib temalt suurt hulka isikuandmeid (näiteks usk, poliitilised vaated, laste arv), kuigi teenuse toimimiseks piisaks ainult e-posti aadressist. </a:t>
+            </a:r>
+          </a:p>
+          <a:p>
+            <a:pPr marL="342900" indent="-342900">
+              <a:buFont typeface="+mj-lt"/>
+              <a:buAutoNum type="arabicPeriod"/>
+            </a:pPr>
+            <a:endParaRPr lang="et-EE" sz="2000" noProof="0" dirty="0"/>
+          </a:p>
+          <a:p>
+            <a:pPr marL="342900" indent="-342900">
+              <a:buFont typeface="+mj-lt"/>
+              <a:buAutoNum type="arabicPeriod"/>
+            </a:pPr>
+            <a:r>
+              <a:rPr lang="et-EE" sz="2000" noProof="0" dirty="0"/>
+              <a:t>Ettevõte hakkab saatma klientidele arveid ettevõtte uuelt e-posti aadressilt.</a:t>
+            </a:r>
+          </a:p>
+          <a:p>
+            <a:pPr marL="342900" indent="-342900">
+              <a:buFont typeface="+mj-lt"/>
+              <a:buAutoNum type="arabicPeriod"/>
+            </a:pPr>
+            <a:endParaRPr lang="et-EE" sz="2000" noProof="0" dirty="0"/>
+          </a:p>
+          <a:p>
+            <a:pPr marL="342900" indent="-342900">
+              <a:buFont typeface="+mj-lt"/>
+              <a:buAutoNum type="arabicPeriod"/>
+            </a:pPr>
+            <a:r>
+              <a:rPr lang="et-EE" sz="2000" noProof="0" dirty="0"/>
+              <a:t>Statistikaamet avaldab kokkuvõtlikud tabelid usulise kuuluvuse kohta. </a:t>
+            </a:r>
+          </a:p>
+        </p:txBody>
+      </p:sp>
+    </p:spTree>
+    <p:extLst>
+      <p:ext uri="{BB962C8B-B14F-4D97-AF65-F5344CB8AC3E}">
+        <p14:creationId xmlns:p14="http://schemas.microsoft.com/office/powerpoint/2010/main" val="1220852360"/>
+      </p:ext>
+    </p:extLst>
+  </p:cSld>
+  <p:clrMapOvr>
+    <a:masterClrMapping/>
+  </p:clrMapOvr>
+  <p:timing>
+    <p:tnLst>
+      <p:par>
+        <p:cTn id="1" dur="indefinite" restart="never" nodeType="tmRoot">
+          <p:childTnLst>
+            <p:seq concurrent="1" nextAc="seek">
+              <p:cTn id="2" dur="indefinite" nodeType="mainSeq">
+                <p:childTnLst>
+                  <p:par>
+                    <p:cTn id="3" fill="hold">
+                      <p:stCondLst>
+                        <p:cond delay="indefinite"/>
+                      </p:stCondLst>
+                      <p:childTnLst>
+                        <p:par>
+                          <p:cTn id="4" fill="hold">
+                            <p:stCondLst>
+                              <p:cond delay="0"/>
+                            </p:stCondLst>
+                            <p:childTnLst>
+                              <p:par>
+                                <p:cTn id="5" presetID="1" presetClass="entr" presetSubtype="0" fill="hold" grpId="0" nodeType="clickEffect">
+                                  <p:stCondLst>
+                                    <p:cond delay="0"/>
+                                  </p:stCondLst>
+                                  <p:childTnLst>
+                                    <p:set>
+                                      <p:cBhvr>
+                                        <p:cTn id="6" dur="1" fill="hold">
+                                          <p:stCondLst>
+                                            <p:cond delay="0"/>
+                                          </p:stCondLst>
+                                        </p:cTn>
+                                        <p:tgtEl>
+                                          <p:spTgt spid="3">
+                                            <p:txEl>
+                                              <p:pRg st="0" end="0"/>
+                                            </p:txEl>
+                                          </p:spTgt>
+                                        </p:tgtEl>
+                                        <p:attrNameLst>
+                                          <p:attrName>style.visibility</p:attrName>
+                                        </p:attrNameLst>
+                                      </p:cBhvr>
+                                      <p:to>
+                                        <p:strVal val="visible"/>
+                                      </p:to>
+                                    </p:set>
+                                  </p:childTnLst>
+                                </p:cTn>
+                              </p:par>
+                            </p:childTnLst>
+                          </p:cTn>
+                        </p:par>
+                      </p:childTnLst>
+                    </p:cTn>
+                  </p:par>
+                  <p:par>
+                    <p:cTn id="7" fill="hold">
+                      <p:stCondLst>
+                        <p:cond delay="indefinite"/>
+                      </p:stCondLst>
+                      <p:childTnLst>
+                        <p:par>
+                          <p:cTn id="8" fill="hold">
+                            <p:stCondLst>
+                              <p:cond delay="0"/>
+                            </p:stCondLst>
+                            <p:childTnLst>
+                              <p:par>
+                                <p:cTn id="9" presetID="1" presetClass="entr" presetSubtype="0" fill="hold" grpId="0" nodeType="clickEffect">
+                                  <p:stCondLst>
+                                    <p:cond delay="0"/>
+                                  </p:stCondLst>
+                                  <p:childTnLst>
+                                    <p:set>
+                                      <p:cBhvr>
+                                        <p:cTn id="10" dur="1" fill="hold">
+                                          <p:stCondLst>
+                                            <p:cond delay="0"/>
+                                          </p:stCondLst>
+                                        </p:cTn>
+                                        <p:tgtEl>
+                                          <p:spTgt spid="3">
+                                            <p:txEl>
+                                              <p:pRg st="2" end="2"/>
+                                            </p:txEl>
+                                          </p:spTgt>
+                                        </p:tgtEl>
+                                        <p:attrNameLst>
+                                          <p:attrName>style.visibility</p:attrName>
+                                        </p:attrNameLst>
+                                      </p:cBhvr>
+                                      <p:to>
+                                        <p:strVal val="visible"/>
+                                      </p:to>
+                                    </p:set>
+                                  </p:childTnLst>
+                                </p:cTn>
+                              </p:par>
+                            </p:childTnLst>
+                          </p:cTn>
+                        </p:par>
+                      </p:childTnLst>
+                    </p:cTn>
+                  </p:par>
+                  <p:par>
+                    <p:cTn id="11" fill="hold">
+                      <p:stCondLst>
+                        <p:cond delay="indefinite"/>
+                      </p:stCondLst>
+                      <p:childTnLst>
+                        <p:par>
+                          <p:cTn id="12" fill="hold">
+                            <p:stCondLst>
+                              <p:cond delay="0"/>
+                            </p:stCondLst>
+                            <p:childTnLst>
+                              <p:par>
+                                <p:cTn id="13" presetID="1" presetClass="entr" presetSubtype="0" fill="hold" grpId="0" nodeType="clickEffect">
+                                  <p:stCondLst>
+                                    <p:cond delay="0"/>
+                                  </p:stCondLst>
+                                  <p:childTnLst>
+                                    <p:set>
+                                      <p:cBhvr>
+                                        <p:cTn id="14" dur="1" fill="hold">
+                                          <p:stCondLst>
+                                            <p:cond delay="0"/>
+                                          </p:stCondLst>
+                                        </p:cTn>
+                                        <p:tgtEl>
+                                          <p:spTgt spid="3">
+                                            <p:txEl>
+                                              <p:pRg st="4" end="4"/>
+                                            </p:txEl>
+                                          </p:spTgt>
+                                        </p:tgtEl>
+                                        <p:attrNameLst>
+                                          <p:attrName>style.visibility</p:attrName>
+                                        </p:attrNameLst>
+                                      </p:cBhvr>
+                                      <p:to>
+                                        <p:strVal val="visible"/>
+                                      </p:to>
+                                    </p:set>
+                                  </p:childTnLst>
+                                </p:cTn>
+                              </p:par>
+                            </p:childTnLst>
+                          </p:cTn>
+                        </p:par>
+                      </p:childTnLst>
+                    </p:cTn>
+                  </p:par>
+                  <p:par>
+                    <p:cTn id="15" fill="hold">
+                      <p:stCondLst>
+                        <p:cond delay="indefinite"/>
+                      </p:stCondLst>
+                      <p:childTnLst>
+                        <p:par>
+                          <p:cTn id="16" fill="hold">
+                            <p:stCondLst>
+                              <p:cond delay="0"/>
+                            </p:stCondLst>
+                            <p:childTnLst>
+                              <p:par>
+                                <p:cTn id="17" presetID="1" presetClass="entr" presetSubtype="0" fill="hold" grpId="0" nodeType="clickEffect">
+                                  <p:stCondLst>
+                                    <p:cond delay="0"/>
+                                  </p:stCondLst>
+                                  <p:childTnLst>
+                                    <p:set>
+                                      <p:cBhvr>
+                                        <p:cTn id="18" dur="1" fill="hold">
+                                          <p:stCondLst>
+                                            <p:cond delay="0"/>
+                                          </p:stCondLst>
+                                        </p:cTn>
+                                        <p:tgtEl>
+                                          <p:spTgt spid="3">
+                                            <p:txEl>
+                                              <p:pRg st="6" end="6"/>
+                                            </p:txEl>
+                                          </p:spTgt>
+                                        </p:tgtEl>
+                                        <p:attrNameLst>
+                                          <p:attrName>style.visibility</p:attrName>
+                                        </p:attrNameLst>
+                                      </p:cBhvr>
+                                      <p:to>
+                                        <p:strVal val="visible"/>
+                                      </p:to>
+                                    </p:set>
+                                  </p:childTnLst>
+                                </p:cTn>
+                              </p:par>
+                            </p:childTnLst>
+                          </p:cTn>
+                        </p:par>
+                      </p:childTnLst>
+                    </p:cTn>
+                  </p:par>
+                </p:childTnLst>
+              </p:cTn>
+              <p:prevCondLst>
+                <p:cond evt="onPrev" delay="0">
+                  <p:tgtEl>
+                    <p:sldTgt/>
+                  </p:tgtEl>
+                </p:cond>
+              </p:prevCondLst>
+              <p:nextCondLst>
+                <p:cond evt="onNext" delay="0">
+                  <p:tgtEl>
+                    <p:sldTgt/>
+                  </p:tgtEl>
+                </p:cond>
+              </p:nextCondLst>
+            </p:seq>
+          </p:childTnLst>
+        </p:cTn>
+      </p:par>
+    </p:tnLst>
+    <p:bldLst>
+      <p:bldP spid="3" grpId="0" build="p"/>
+    </p:bldLst>
+  </p:timing>
+</p:sld>
+</file>
+
+<file path=ppt/slides/slide12.xml><?xml version="1.0" encoding="utf-8"?>
+<p:sld xmlns:a="http://schemas.openxmlformats.org/drawingml/2006/main" xmlns:r="http://schemas.openxmlformats.org/officeDocument/2006/relationships" xmlns:p="http://schemas.openxmlformats.org/presentationml/2006/main">
+  <p:cSld>
+    <p:spTree>
+      <p:nvGrpSpPr>
         <p:cNvPr id="1" name="">
           <a:extLst>
             <a:ext uri="{FF2B5EF4-FFF2-40B4-BE49-F238E27FC236}">
@@ -30793,7 +31404,7 @@
 </p:sld>
 </file>
 
-<file path=ppt/slides/slide12.xml><?xml version="1.0" encoding="utf-8"?>
+<file path=ppt/slides/slide13.xml><?xml version="1.0" encoding="utf-8"?>
 <p:sld xmlns:a="http://schemas.openxmlformats.org/drawingml/2006/main" xmlns:r="http://schemas.openxmlformats.org/officeDocument/2006/relationships" xmlns:p="http://schemas.openxmlformats.org/presentationml/2006/main">
   <p:cSld>
     <p:spTree>
@@ -30906,7 +31517,7 @@
 </p:sld>
 </file>
 
-<file path=ppt/slides/slide13.xml><?xml version="1.0" encoding="utf-8"?>
+<file path=ppt/slides/slide14.xml><?xml version="1.0" encoding="utf-8"?>
 <p:sld xmlns:a="http://schemas.openxmlformats.org/drawingml/2006/main" xmlns:r="http://schemas.openxmlformats.org/officeDocument/2006/relationships" xmlns:p="http://schemas.openxmlformats.org/presentationml/2006/main">
   <p:cSld>
     <p:spTree>
@@ -32829,7 +33440,7 @@
 </p:sld>
 </file>
 
-<file path=ppt/slides/slide14.xml><?xml version="1.0" encoding="utf-8"?>
+<file path=ppt/slides/slide15.xml><?xml version="1.0" encoding="utf-8"?>
 <p:sld xmlns:a="http://schemas.openxmlformats.org/drawingml/2006/main" xmlns:r="http://schemas.openxmlformats.org/officeDocument/2006/relationships" xmlns:p="http://schemas.openxmlformats.org/presentationml/2006/main">
   <p:cSld>
     <p:spTree>
@@ -33686,7 +34297,7 @@
 </p:sld>
 </file>
 
-<file path=ppt/slides/slide15.xml><?xml version="1.0" encoding="utf-8"?>
+<file path=ppt/slides/slide16.xml><?xml version="1.0" encoding="utf-8"?>
 <p:sld xmlns:a="http://schemas.openxmlformats.org/drawingml/2006/main" xmlns:r="http://schemas.openxmlformats.org/officeDocument/2006/relationships" xmlns:p="http://schemas.openxmlformats.org/presentationml/2006/main">
   <p:cSld>
     <p:spTree>
@@ -34885,7 +35496,7 @@
 </p:sld>
 </file>
 
-<file path=ppt/slides/slide16.xml><?xml version="1.0" encoding="utf-8"?>
+<file path=ppt/slides/slide17.xml><?xml version="1.0" encoding="utf-8"?>
 <p:sld xmlns:a="http://schemas.openxmlformats.org/drawingml/2006/main" xmlns:r="http://schemas.openxmlformats.org/officeDocument/2006/relationships" xmlns:p="http://schemas.openxmlformats.org/presentationml/2006/main">
   <p:cSld>
     <p:spTree>
@@ -35783,7 +36394,7 @@
 </p:sld>
 </file>
 
-<file path=ppt/slides/slide17.xml><?xml version="1.0" encoding="utf-8"?>
+<file path=ppt/slides/slide18.xml><?xml version="1.0" encoding="utf-8"?>
 <p:sld xmlns:a="http://schemas.openxmlformats.org/drawingml/2006/main" xmlns:r="http://schemas.openxmlformats.org/officeDocument/2006/relationships" xmlns:p="http://schemas.openxmlformats.org/presentationml/2006/main">
   <p:cSld>
     <p:spTree>
@@ -37002,7 +37613,7 @@
 </p:sld>
 </file>
 
-<file path=ppt/slides/slide18.xml><?xml version="1.0" encoding="utf-8"?>
+<file path=ppt/slides/slide19.xml><?xml version="1.0" encoding="utf-8"?>
 <p:sld xmlns:a="http://schemas.openxmlformats.org/drawingml/2006/main" xmlns:r="http://schemas.openxmlformats.org/officeDocument/2006/relationships" xmlns:p="http://schemas.openxmlformats.org/presentationml/2006/main">
   <p:cSld>
     <p:spTree>
@@ -37291,222 +37902,6 @@
     <p:extLst>
       <p:ext uri="{BB962C8B-B14F-4D97-AF65-F5344CB8AC3E}">
         <p14:creationId xmlns:p14="http://schemas.microsoft.com/office/powerpoint/2010/main" val="4104031404"/>
-      </p:ext>
-    </p:extLst>
-  </p:cSld>
-  <p:clrMapOvr>
-    <a:masterClrMapping/>
-  </p:clrMapOvr>
-</p:sld>
-</file>
-
-<file path=ppt/slides/slide19.xml><?xml version="1.0" encoding="utf-8"?>
-<p:sld xmlns:a="http://schemas.openxmlformats.org/drawingml/2006/main" xmlns:r="http://schemas.openxmlformats.org/officeDocument/2006/relationships" xmlns:p="http://schemas.openxmlformats.org/presentationml/2006/main">
-  <p:cSld>
-    <p:spTree>
-      <p:nvGrpSpPr>
-        <p:cNvPr id="1" name="">
-          <a:extLst>
-            <a:ext uri="{FF2B5EF4-FFF2-40B4-BE49-F238E27FC236}">
-              <a16:creationId xmlns:a16="http://schemas.microsoft.com/office/drawing/2014/main" id="{C83E9D1A-D010-A2FD-742D-5F5DB359D99A}"/>
-            </a:ext>
-          </a:extLst>
-        </p:cNvPr>
-        <p:cNvGrpSpPr/>
-        <p:nvPr/>
-      </p:nvGrpSpPr>
-      <p:grpSpPr>
-        <a:xfrm>
-          <a:off x="0" y="0"/>
-          <a:ext cx="0" cy="0"/>
-          <a:chOff x="0" y="0"/>
-          <a:chExt cx="0" cy="0"/>
-        </a:xfrm>
-      </p:grpSpPr>
-      <p:sp>
-        <p:nvSpPr>
-          <p:cNvPr id="2" name="Title 1">
-            <a:extLst>
-              <a:ext uri="{FF2B5EF4-FFF2-40B4-BE49-F238E27FC236}">
-                <a16:creationId xmlns:a16="http://schemas.microsoft.com/office/drawing/2014/main" id="{41C315A1-2EB7-0018-E763-B73E36760418}"/>
-              </a:ext>
-            </a:extLst>
-          </p:cNvPr>
-          <p:cNvSpPr>
-            <a:spLocks noGrp="1"/>
-          </p:cNvSpPr>
-          <p:nvPr>
-            <p:ph type="ctrTitle"/>
-          </p:nvPr>
-        </p:nvSpPr>
-        <p:spPr/>
-        <p:txBody>
-          <a:bodyPr/>
-          <a:lstStyle/>
-          <a:p>
-            <a:r>
-              <a:rPr lang="en-US" sz="2800" err="1"/>
-              <a:t>Lisamaterjale</a:t>
-            </a:r>
-            <a:r>
-              <a:rPr lang="en-US" sz="2800"/>
-              <a:t> </a:t>
-            </a:r>
-            <a:r>
-              <a:rPr lang="en-US" sz="2800" err="1"/>
-              <a:t>andmekaitse</a:t>
-            </a:r>
-            <a:r>
-              <a:rPr lang="en-US" sz="2800"/>
-              <a:t> </a:t>
-            </a:r>
-            <a:r>
-              <a:rPr lang="en-US" sz="2800" err="1"/>
-              <a:t>kohta</a:t>
-            </a:r>
-          </a:p>
-        </p:txBody>
-      </p:sp>
-      <p:sp>
-        <p:nvSpPr>
-          <p:cNvPr id="3" name="Content Placeholder 2">
-            <a:extLst>
-              <a:ext uri="{FF2B5EF4-FFF2-40B4-BE49-F238E27FC236}">
-                <a16:creationId xmlns:a16="http://schemas.microsoft.com/office/drawing/2014/main" id="{E72E086A-9AC8-70D7-09C0-66D170C0AB74}"/>
-              </a:ext>
-            </a:extLst>
-          </p:cNvPr>
-          <p:cNvSpPr>
-            <a:spLocks noGrp="1"/>
-          </p:cNvSpPr>
-          <p:nvPr>
-            <p:ph sz="quarter" idx="10"/>
-          </p:nvPr>
-        </p:nvSpPr>
-        <p:spPr/>
-        <p:txBody>
-          <a:bodyPr/>
-          <a:lstStyle/>
-          <a:p>
-            <a:pPr>
-              <a:lnSpc>
-                <a:spcPct val="150000"/>
-              </a:lnSpc>
-            </a:pPr>
-            <a:endParaRPr lang="en-US" sz="2000">
-              <a:ea typeface="Inter"/>
-            </a:endParaRPr>
-          </a:p>
-          <a:p>
-            <a:pPr>
-              <a:lnSpc>
-                <a:spcPct val="150000"/>
-              </a:lnSpc>
-            </a:pPr>
-            <a:endParaRPr lang="en-US" sz="2000">
-              <a:ea typeface="Inter"/>
-            </a:endParaRPr>
-          </a:p>
-        </p:txBody>
-      </p:sp>
-      <p:sp>
-        <p:nvSpPr>
-          <p:cNvPr id="4" name="TextBox 3">
-            <a:extLst>
-              <a:ext uri="{FF2B5EF4-FFF2-40B4-BE49-F238E27FC236}">
-                <a16:creationId xmlns:a16="http://schemas.microsoft.com/office/drawing/2014/main" id="{498E1D98-B1F7-F3A1-53F6-04E762FE62F5}"/>
-              </a:ext>
-            </a:extLst>
-          </p:cNvPr>
-          <p:cNvSpPr txBox="1"/>
-          <p:nvPr/>
-        </p:nvSpPr>
-        <p:spPr>
-          <a:xfrm>
-            <a:off x="635431" y="1149828"/>
-            <a:ext cx="11034325" cy="1135504"/>
-          </a:xfrm>
-          <a:prstGeom prst="rect">
-            <a:avLst/>
-          </a:prstGeom>
-          <a:noFill/>
-        </p:spPr>
-        <p:txBody>
-          <a:bodyPr rot="0" spcFirstLastPara="0" vertOverflow="overflow" horzOverflow="overflow" vert="horz" wrap="square" lIns="91440" tIns="45720" rIns="91440" bIns="45720" numCol="1" spcCol="0" rtlCol="0" fromWordArt="0" anchor="t" anchorCtr="0" forceAA="0" compatLnSpc="1">
-            <a:prstTxWarp prst="textNoShape">
-              <a:avLst/>
-            </a:prstTxWarp>
-            <a:spAutoFit/>
-          </a:bodyPr>
-          <a:lstStyle/>
-          <a:p>
-            <a:pPr marL="285750" indent="-285750">
-              <a:lnSpc>
-                <a:spcPct val="150000"/>
-              </a:lnSpc>
-              <a:buFont typeface="Arial"/>
-              <a:buChar char="•"/>
-            </a:pPr>
-            <a:r>
-              <a:rPr lang="en-US" sz="2400" dirty="0" err="1">
-                <a:ea typeface="Inter"/>
-              </a:rPr>
-              <a:t>Andmekaitse</a:t>
-            </a:r>
-            <a:r>
-              <a:rPr lang="en-US" sz="2400" dirty="0">
-                <a:ea typeface="Inter"/>
-              </a:rPr>
-              <a:t> </a:t>
-            </a:r>
-            <a:r>
-              <a:rPr lang="en-US" sz="2400" dirty="0" err="1">
-                <a:ea typeface="Inter"/>
-              </a:rPr>
-              <a:t>inspektsioon</a:t>
-            </a:r>
-            <a:r>
-              <a:rPr lang="en-US" sz="2400" dirty="0">
-                <a:ea typeface="Inter"/>
-              </a:rPr>
-              <a:t>:</a:t>
-            </a:r>
-            <a:r>
-              <a:rPr lang="en-US" sz="2000" dirty="0">
-                <a:ea typeface="Inter"/>
-              </a:rPr>
-              <a:t> </a:t>
-            </a:r>
-            <a:r>
-              <a:rPr lang="en-US" sz="2000" dirty="0">
-                <a:ea typeface="Inter"/>
-                <a:hlinkClick r:id="rId2"/>
-              </a:rPr>
-              <a:t>Andmekaitse ABC</a:t>
-            </a:r>
-          </a:p>
-          <a:p>
-            <a:pPr marL="742950" lvl="1" indent="-285750">
-              <a:lnSpc>
-                <a:spcPct val="150000"/>
-              </a:lnSpc>
-              <a:buFont typeface="Courier New"/>
-              <a:buChar char="o"/>
-            </a:pPr>
-            <a:r>
-              <a:rPr lang="en-US" sz="2400" dirty="0">
-                <a:ea typeface="Inter"/>
-                <a:hlinkClick r:id="rId3"/>
-              </a:rPr>
-              <a:t>Isikuandmete töötleja üldjuhend</a:t>
-            </a:r>
-          </a:p>
-        </p:txBody>
-      </p:sp>
-    </p:spTree>
-    <p:extLst>
-      <p:ext uri="{BB962C8B-B14F-4D97-AF65-F5344CB8AC3E}">
-        <p14:creationId xmlns:p14="http://schemas.microsoft.com/office/powerpoint/2010/main" val="2968960742"/>
       </p:ext>
     </p:extLst>
   </p:cSld>
@@ -38376,6 +38771,222 @@
         <p:cNvPr id="1" name="">
           <a:extLst>
             <a:ext uri="{FF2B5EF4-FFF2-40B4-BE49-F238E27FC236}">
+              <a16:creationId xmlns:a16="http://schemas.microsoft.com/office/drawing/2014/main" id="{C83E9D1A-D010-A2FD-742D-5F5DB359D99A}"/>
+            </a:ext>
+          </a:extLst>
+        </p:cNvPr>
+        <p:cNvGrpSpPr/>
+        <p:nvPr/>
+      </p:nvGrpSpPr>
+      <p:grpSpPr>
+        <a:xfrm>
+          <a:off x="0" y="0"/>
+          <a:ext cx="0" cy="0"/>
+          <a:chOff x="0" y="0"/>
+          <a:chExt cx="0" cy="0"/>
+        </a:xfrm>
+      </p:grpSpPr>
+      <p:sp>
+        <p:nvSpPr>
+          <p:cNvPr id="2" name="Title 1">
+            <a:extLst>
+              <a:ext uri="{FF2B5EF4-FFF2-40B4-BE49-F238E27FC236}">
+                <a16:creationId xmlns:a16="http://schemas.microsoft.com/office/drawing/2014/main" id="{41C315A1-2EB7-0018-E763-B73E36760418}"/>
+              </a:ext>
+            </a:extLst>
+          </p:cNvPr>
+          <p:cNvSpPr>
+            <a:spLocks noGrp="1"/>
+          </p:cNvSpPr>
+          <p:nvPr>
+            <p:ph type="ctrTitle"/>
+          </p:nvPr>
+        </p:nvSpPr>
+        <p:spPr/>
+        <p:txBody>
+          <a:bodyPr/>
+          <a:lstStyle/>
+          <a:p>
+            <a:r>
+              <a:rPr lang="en-US" sz="2800" err="1"/>
+              <a:t>Lisamaterjale</a:t>
+            </a:r>
+            <a:r>
+              <a:rPr lang="en-US" sz="2800"/>
+              <a:t> </a:t>
+            </a:r>
+            <a:r>
+              <a:rPr lang="en-US" sz="2800" err="1"/>
+              <a:t>andmekaitse</a:t>
+            </a:r>
+            <a:r>
+              <a:rPr lang="en-US" sz="2800"/>
+              <a:t> </a:t>
+            </a:r>
+            <a:r>
+              <a:rPr lang="en-US" sz="2800" err="1"/>
+              <a:t>kohta</a:t>
+            </a:r>
+          </a:p>
+        </p:txBody>
+      </p:sp>
+      <p:sp>
+        <p:nvSpPr>
+          <p:cNvPr id="3" name="Content Placeholder 2">
+            <a:extLst>
+              <a:ext uri="{FF2B5EF4-FFF2-40B4-BE49-F238E27FC236}">
+                <a16:creationId xmlns:a16="http://schemas.microsoft.com/office/drawing/2014/main" id="{E72E086A-9AC8-70D7-09C0-66D170C0AB74}"/>
+              </a:ext>
+            </a:extLst>
+          </p:cNvPr>
+          <p:cNvSpPr>
+            <a:spLocks noGrp="1"/>
+          </p:cNvSpPr>
+          <p:nvPr>
+            <p:ph sz="quarter" idx="10"/>
+          </p:nvPr>
+        </p:nvSpPr>
+        <p:spPr/>
+        <p:txBody>
+          <a:bodyPr/>
+          <a:lstStyle/>
+          <a:p>
+            <a:pPr>
+              <a:lnSpc>
+                <a:spcPct val="150000"/>
+              </a:lnSpc>
+            </a:pPr>
+            <a:endParaRPr lang="en-US" sz="2000">
+              <a:ea typeface="Inter"/>
+            </a:endParaRPr>
+          </a:p>
+          <a:p>
+            <a:pPr>
+              <a:lnSpc>
+                <a:spcPct val="150000"/>
+              </a:lnSpc>
+            </a:pPr>
+            <a:endParaRPr lang="en-US" sz="2000">
+              <a:ea typeface="Inter"/>
+            </a:endParaRPr>
+          </a:p>
+        </p:txBody>
+      </p:sp>
+      <p:sp>
+        <p:nvSpPr>
+          <p:cNvPr id="4" name="TextBox 3">
+            <a:extLst>
+              <a:ext uri="{FF2B5EF4-FFF2-40B4-BE49-F238E27FC236}">
+                <a16:creationId xmlns:a16="http://schemas.microsoft.com/office/drawing/2014/main" id="{498E1D98-B1F7-F3A1-53F6-04E762FE62F5}"/>
+              </a:ext>
+            </a:extLst>
+          </p:cNvPr>
+          <p:cNvSpPr txBox="1"/>
+          <p:nvPr/>
+        </p:nvSpPr>
+        <p:spPr>
+          <a:xfrm>
+            <a:off x="635431" y="1149828"/>
+            <a:ext cx="11034325" cy="1135504"/>
+          </a:xfrm>
+          <a:prstGeom prst="rect">
+            <a:avLst/>
+          </a:prstGeom>
+          <a:noFill/>
+        </p:spPr>
+        <p:txBody>
+          <a:bodyPr rot="0" spcFirstLastPara="0" vertOverflow="overflow" horzOverflow="overflow" vert="horz" wrap="square" lIns="91440" tIns="45720" rIns="91440" bIns="45720" numCol="1" spcCol="0" rtlCol="0" fromWordArt="0" anchor="t" anchorCtr="0" forceAA="0" compatLnSpc="1">
+            <a:prstTxWarp prst="textNoShape">
+              <a:avLst/>
+            </a:prstTxWarp>
+            <a:spAutoFit/>
+          </a:bodyPr>
+          <a:lstStyle/>
+          <a:p>
+            <a:pPr marL="285750" indent="-285750">
+              <a:lnSpc>
+                <a:spcPct val="150000"/>
+              </a:lnSpc>
+              <a:buFont typeface="Arial"/>
+              <a:buChar char="•"/>
+            </a:pPr>
+            <a:r>
+              <a:rPr lang="en-US" sz="2400" dirty="0" err="1">
+                <a:ea typeface="Inter"/>
+              </a:rPr>
+              <a:t>Andmekaitse</a:t>
+            </a:r>
+            <a:r>
+              <a:rPr lang="en-US" sz="2400" dirty="0">
+                <a:ea typeface="Inter"/>
+              </a:rPr>
+              <a:t> </a:t>
+            </a:r>
+            <a:r>
+              <a:rPr lang="en-US" sz="2400" dirty="0" err="1">
+                <a:ea typeface="Inter"/>
+              </a:rPr>
+              <a:t>inspektsioon</a:t>
+            </a:r>
+            <a:r>
+              <a:rPr lang="en-US" sz="2400" dirty="0">
+                <a:ea typeface="Inter"/>
+              </a:rPr>
+              <a:t>:</a:t>
+            </a:r>
+            <a:r>
+              <a:rPr lang="en-US" sz="2000" dirty="0">
+                <a:ea typeface="Inter"/>
+              </a:rPr>
+              <a:t> </a:t>
+            </a:r>
+            <a:r>
+              <a:rPr lang="en-US" sz="2000" dirty="0">
+                <a:ea typeface="Inter"/>
+                <a:hlinkClick r:id="rId2"/>
+              </a:rPr>
+              <a:t>Andmekaitse ABC</a:t>
+            </a:r>
+          </a:p>
+          <a:p>
+            <a:pPr marL="742950" lvl="1" indent="-285750">
+              <a:lnSpc>
+                <a:spcPct val="150000"/>
+              </a:lnSpc>
+              <a:buFont typeface="Courier New"/>
+              <a:buChar char="o"/>
+            </a:pPr>
+            <a:r>
+              <a:rPr lang="en-US" sz="2400" dirty="0">
+                <a:ea typeface="Inter"/>
+                <a:hlinkClick r:id="rId3"/>
+              </a:rPr>
+              <a:t>Isikuandmete töötleja üldjuhend</a:t>
+            </a:r>
+          </a:p>
+        </p:txBody>
+      </p:sp>
+    </p:spTree>
+    <p:extLst>
+      <p:ext uri="{BB962C8B-B14F-4D97-AF65-F5344CB8AC3E}">
+        <p14:creationId xmlns:p14="http://schemas.microsoft.com/office/powerpoint/2010/main" val="2968960742"/>
+      </p:ext>
+    </p:extLst>
+  </p:cSld>
+  <p:clrMapOvr>
+    <a:masterClrMapping/>
+  </p:clrMapOvr>
+</p:sld>
+</file>
+
+<file path=ppt/slides/slide21.xml><?xml version="1.0" encoding="utf-8"?>
+<p:sld xmlns:a="http://schemas.openxmlformats.org/drawingml/2006/main" xmlns:r="http://schemas.openxmlformats.org/officeDocument/2006/relationships" xmlns:p="http://schemas.openxmlformats.org/presentationml/2006/main">
+  <p:cSld>
+    <p:spTree>
+      <p:nvGrpSpPr>
+        <p:cNvPr id="1" name="">
+          <a:extLst>
+            <a:ext uri="{FF2B5EF4-FFF2-40B4-BE49-F238E27FC236}">
               <a16:creationId xmlns:a16="http://schemas.microsoft.com/office/drawing/2014/main" id="{400DB218-5E3A-367F-021B-630DDB201B49}"/>
             </a:ext>
           </a:extLst>
@@ -38485,7 +39096,7 @@
 </p:sld>
 </file>
 
-<file path=ppt/slides/slide21.xml><?xml version="1.0" encoding="utf-8"?>
+<file path=ppt/slides/slide22.xml><?xml version="1.0" encoding="utf-8"?>
 <p:sld xmlns:a="http://schemas.openxmlformats.org/drawingml/2006/main" xmlns:r="http://schemas.openxmlformats.org/officeDocument/2006/relationships" xmlns:p="http://schemas.openxmlformats.org/presentationml/2006/main">
   <p:cSld>
     <p:spTree>
@@ -38572,7 +39183,7 @@
 </p:sld>
 </file>
 
-<file path=ppt/slides/slide22.xml><?xml version="1.0" encoding="utf-8"?>
+<file path=ppt/slides/slide23.xml><?xml version="1.0" encoding="utf-8"?>
 <p:sld xmlns:a="http://schemas.openxmlformats.org/drawingml/2006/main" xmlns:r="http://schemas.openxmlformats.org/officeDocument/2006/relationships" xmlns:p="http://schemas.openxmlformats.org/presentationml/2006/main">
   <p:cSld>
     <p:spTree>
@@ -38622,7 +39233,7 @@
               </a:lnSpc>
               <a:buNone/>
             </a:pPr>
-            <a:endParaRPr lang="en-US" sz="2800">
+            <a:endParaRPr lang="en-US" sz="2800" dirty="0">
               <a:ea typeface="Inter"/>
             </a:endParaRPr>
           </a:p>
@@ -38633,7 +39244,7 @@
               </a:lnSpc>
               <a:buNone/>
             </a:pPr>
-            <a:endParaRPr lang="en-US" sz="2000">
+            <a:endParaRPr lang="en-US" sz="2000" dirty="0">
               <a:ea typeface="Inter"/>
             </a:endParaRPr>
           </a:p>
@@ -38657,7 +39268,7 @@
         </p:nvSpPr>
         <p:spPr>
           <a:xfrm>
-            <a:off x="3461336" y="2675333"/>
+            <a:off x="3488768" y="2657045"/>
             <a:ext cx="6575007" cy="357043"/>
           </a:xfrm>
         </p:spPr>
@@ -38667,7 +39278,7 @@
           <a:p>
             <a:r>
               <a:rPr lang="en-US" dirty="0"/>
-              <a:t>Paus 15:15-15:30</a:t>
+              <a:t>Paus 15:00-15:15</a:t>
             </a:r>
           </a:p>
         </p:txBody>
@@ -38685,7 +39296,7 @@
 </p:sld>
 </file>
 
-<file path=ppt/slides/slide23.xml><?xml version="1.0" encoding="utf-8"?>
+<file path=ppt/slides/slide24.xml><?xml version="1.0" encoding="utf-8"?>
 <p:sld xmlns:a="http://schemas.openxmlformats.org/drawingml/2006/main" xmlns:r="http://schemas.openxmlformats.org/officeDocument/2006/relationships" xmlns:p="http://schemas.openxmlformats.org/presentationml/2006/main">
   <p:cSld>
     <p:spTree>
@@ -38759,7 +39370,7 @@
           <a:p>
             <a:r>
               <a:rPr lang="en-US" sz="3200" dirty="0" err="1"/>
-              <a:t>Grupitööde</a:t>
+              <a:t>Lõputööde</a:t>
             </a:r>
             <a:r>
               <a:rPr lang="en-US" sz="3200" dirty="0"/>
@@ -38794,7 +39405,130 @@
 </p:sld>
 </file>
 
-<file path=ppt/slides/slide24.xml><?xml version="1.0" encoding="utf-8"?>
+<file path=ppt/slides/slide25.xml><?xml version="1.0" encoding="utf-8"?>
+<p:sld xmlns:a="http://schemas.openxmlformats.org/drawingml/2006/main" xmlns:r="http://schemas.openxmlformats.org/officeDocument/2006/relationships" xmlns:p="http://schemas.openxmlformats.org/presentationml/2006/main">
+  <p:cSld>
+    <p:spTree>
+      <p:nvGrpSpPr>
+        <p:cNvPr id="1" name="">
+          <a:extLst>
+            <a:ext uri="{FF2B5EF4-FFF2-40B4-BE49-F238E27FC236}">
+              <a16:creationId xmlns:a16="http://schemas.microsoft.com/office/drawing/2014/main" id="{CD16A996-23D2-B576-6510-367A1360466B}"/>
+            </a:ext>
+          </a:extLst>
+        </p:cNvPr>
+        <p:cNvGrpSpPr/>
+        <p:nvPr/>
+      </p:nvGrpSpPr>
+      <p:grpSpPr>
+        <a:xfrm>
+          <a:off x="0" y="0"/>
+          <a:ext cx="0" cy="0"/>
+          <a:chOff x="0" y="0"/>
+          <a:chExt cx="0" cy="0"/>
+        </a:xfrm>
+      </p:grpSpPr>
+      <p:sp>
+        <p:nvSpPr>
+          <p:cNvPr id="2" name="Title 1">
+            <a:extLst>
+              <a:ext uri="{FF2B5EF4-FFF2-40B4-BE49-F238E27FC236}">
+                <a16:creationId xmlns:a16="http://schemas.microsoft.com/office/drawing/2014/main" id="{9361C437-2748-44B4-FECA-B0781AA35998}"/>
+              </a:ext>
+            </a:extLst>
+          </p:cNvPr>
+          <p:cNvSpPr>
+            <a:spLocks noGrp="1"/>
+          </p:cNvSpPr>
+          <p:nvPr>
+            <p:ph type="ctrTitle"/>
+          </p:nvPr>
+        </p:nvSpPr>
+        <p:spPr/>
+        <p:txBody>
+          <a:bodyPr/>
+          <a:lstStyle/>
+          <a:p>
+            <a:endParaRPr lang="et-EE"/>
+          </a:p>
+        </p:txBody>
+      </p:sp>
+      <p:sp>
+        <p:nvSpPr>
+          <p:cNvPr id="3" name="Content Placeholder 2">
+            <a:extLst>
+              <a:ext uri="{FF2B5EF4-FFF2-40B4-BE49-F238E27FC236}">
+                <a16:creationId xmlns:a16="http://schemas.microsoft.com/office/drawing/2014/main" id="{277AB89A-331D-46B7-10E3-87ABBD0779FE}"/>
+              </a:ext>
+            </a:extLst>
+          </p:cNvPr>
+          <p:cNvSpPr>
+            <a:spLocks noGrp="1"/>
+          </p:cNvSpPr>
+          <p:nvPr>
+            <p:ph sz="quarter" idx="10"/>
+          </p:nvPr>
+        </p:nvSpPr>
+        <p:spPr/>
+        <p:txBody>
+          <a:bodyPr/>
+          <a:lstStyle/>
+          <a:p>
+            <a:endParaRPr lang="en-US" dirty="0"/>
+          </a:p>
+          <a:p>
+            <a:endParaRPr lang="en-US" dirty="0"/>
+          </a:p>
+          <a:p>
+            <a:endParaRPr lang="en-US" dirty="0"/>
+          </a:p>
+          <a:p>
+            <a:r>
+              <a:rPr lang="en-US" sz="3200" dirty="0" err="1"/>
+              <a:t>Kliendiga</a:t>
+            </a:r>
+            <a:r>
+              <a:rPr lang="en-US" sz="3200" dirty="0"/>
+              <a:t> </a:t>
+            </a:r>
+            <a:r>
+              <a:rPr lang="en-US" sz="3200" dirty="0" err="1"/>
+              <a:t>kohtumise</a:t>
+            </a:r>
+            <a:r>
+              <a:rPr lang="en-US" sz="3200" dirty="0"/>
+              <a:t> </a:t>
+            </a:r>
+            <a:r>
+              <a:rPr lang="en-US" sz="3200" dirty="0" err="1"/>
+              <a:t>ajad</a:t>
+            </a:r>
+            <a:r>
+              <a:rPr lang="en-US" sz="3200" dirty="0"/>
+              <a:t> </a:t>
+            </a:r>
+            <a:r>
+              <a:rPr lang="en-US" sz="3200" dirty="0" err="1"/>
+              <a:t>teisipäevaks</a:t>
+            </a:r>
+            <a:endParaRPr lang="et-EE" sz="3200" dirty="0"/>
+          </a:p>
+        </p:txBody>
+      </p:sp>
+    </p:spTree>
+    <p:extLst>
+      <p:ext uri="{BB962C8B-B14F-4D97-AF65-F5344CB8AC3E}">
+        <p14:creationId xmlns:p14="http://schemas.microsoft.com/office/powerpoint/2010/main" val="2662955064"/>
+      </p:ext>
+    </p:extLst>
+  </p:cSld>
+  <p:clrMapOvr>
+    <a:masterClrMapping/>
+  </p:clrMapOvr>
+</p:sld>
+</file>
+
+<file path=ppt/slides/slide26.xml><?xml version="1.0" encoding="utf-8"?>
 <p:sld xmlns:a="http://schemas.openxmlformats.org/drawingml/2006/main" xmlns:r="http://schemas.openxmlformats.org/officeDocument/2006/relationships" xmlns:p="http://schemas.openxmlformats.org/presentationml/2006/main">
   <p:cSld>
     <p:spTree>
@@ -38844,18 +39578,18 @@
           <a:lstStyle/>
           <a:p>
             <a:r>
-              <a:rPr lang="en-US" b="1" err="1"/>
-              <a:t>Grupitöö</a:t>
-            </a:r>
-            <a:r>
-              <a:rPr lang="en-US" b="1"/>
-              <a:t> </a:t>
-            </a:r>
-            <a:r>
-              <a:rPr lang="en-US" b="1" err="1"/>
+              <a:rPr lang="en-US" b="1" dirty="0" err="1"/>
+              <a:t>Lõputöö</a:t>
+            </a:r>
+            <a:r>
+              <a:rPr lang="en-US" b="1" dirty="0"/>
+              <a:t> </a:t>
+            </a:r>
+            <a:r>
+              <a:rPr lang="en-US" b="1" dirty="0" err="1"/>
               <a:t>osad</a:t>
             </a:r>
-            <a:endParaRPr lang="en-US" err="1"/>
+            <a:endParaRPr lang="en-US" dirty="0"/>
           </a:p>
         </p:txBody>
       </p:sp>
@@ -39454,7 +40188,7 @@
 </p:sld>
 </file>
 
-<file path=ppt/slides/slide25.xml><?xml version="1.0" encoding="utf-8"?>
+<file path=ppt/slides/slide27.xml><?xml version="1.0" encoding="utf-8"?>
 <p:sld xmlns:a="http://schemas.openxmlformats.org/drawingml/2006/main" xmlns:r="http://schemas.openxmlformats.org/officeDocument/2006/relationships" xmlns:p="http://schemas.openxmlformats.org/presentationml/2006/main">
   <p:cSld>
     <p:spTree>
@@ -39505,7 +40239,7 @@
           <a:p>
             <a:r>
               <a:rPr lang="en-US" b="1" dirty="0" err="1"/>
-              <a:t>Grupitöö</a:t>
+              <a:t>Lõputöö</a:t>
             </a:r>
             <a:r>
               <a:rPr lang="en-US" b="1" dirty="0"/>
@@ -40164,7 +40898,7 @@
 </p:sld>
 </file>
 
-<file path=ppt/slides/slide26.xml><?xml version="1.0" encoding="utf-8"?>
+<file path=ppt/slides/slide28.xml><?xml version="1.0" encoding="utf-8"?>
 <p:sld xmlns:a="http://schemas.openxmlformats.org/drawingml/2006/main" xmlns:r="http://schemas.openxmlformats.org/officeDocument/2006/relationships" xmlns:p="http://schemas.openxmlformats.org/presentationml/2006/main">
   <p:cSld>
     <p:spTree>
@@ -41033,7 +41767,7 @@
 </p:sld>
 </file>
 
-<file path=ppt/slides/slide27.xml><?xml version="1.0" encoding="utf-8"?>
+<file path=ppt/slides/slide29.xml><?xml version="1.0" encoding="utf-8"?>
 <p:sld xmlns:a="http://schemas.openxmlformats.org/drawingml/2006/main" xmlns:r="http://schemas.openxmlformats.org/officeDocument/2006/relationships" xmlns:p="http://schemas.openxmlformats.org/presentationml/2006/main">
   <p:cSld>
     <p:spTree>
@@ -41248,174 +41982,174 @@
               <a:buChar char="•"/>
             </a:pPr>
             <a:r>
-              <a:rPr lang="en-US" sz="2000" err="1">
+              <a:rPr lang="en-US" sz="2000" dirty="0" err="1">
                 <a:ea typeface="Inter"/>
                 <a:cs typeface="Arial"/>
               </a:rPr>
               <a:t>Andmesubjekt</a:t>
             </a:r>
             <a:r>
-              <a:rPr lang="en-US" sz="2000">
+              <a:rPr lang="en-US" sz="2000" dirty="0">
                 <a:ea typeface="Inter"/>
                 <a:cs typeface="Arial"/>
               </a:rPr>
               <a:t> </a:t>
             </a:r>
             <a:r>
-              <a:rPr lang="en-US" sz="2000" err="1">
+              <a:rPr lang="en-US" sz="2000" dirty="0" err="1">
                 <a:ea typeface="Inter"/>
                 <a:cs typeface="Arial"/>
               </a:rPr>
               <a:t>peab</a:t>
             </a:r>
             <a:r>
-              <a:rPr lang="en-US" sz="2000">
+              <a:rPr lang="en-US" sz="2000" dirty="0">
                 <a:ea typeface="Inter"/>
                 <a:cs typeface="Arial"/>
               </a:rPr>
               <a:t> </a:t>
             </a:r>
             <a:r>
-              <a:rPr lang="en-US" sz="2000" err="1">
+              <a:rPr lang="en-US" sz="2000" dirty="0" err="1">
                 <a:ea typeface="Inter"/>
                 <a:cs typeface="Arial"/>
               </a:rPr>
               <a:t>teadma</a:t>
             </a:r>
             <a:r>
-              <a:rPr lang="en-US" sz="2000">
+              <a:rPr lang="en-US" sz="2000" dirty="0">
                 <a:ea typeface="Inter"/>
                 <a:cs typeface="Arial"/>
               </a:rPr>
               <a:t>, mis </a:t>
             </a:r>
             <a:r>
-              <a:rPr lang="en-US" sz="2000" err="1">
+              <a:rPr lang="en-US" sz="2000" dirty="0" err="1">
                 <a:ea typeface="Inter"/>
                 <a:cs typeface="Arial"/>
               </a:rPr>
               <a:t>andmeid</a:t>
             </a:r>
             <a:r>
-              <a:rPr lang="en-US" sz="2000">
+              <a:rPr lang="en-US" sz="2000" dirty="0">
                 <a:ea typeface="Inter"/>
                 <a:cs typeface="Arial"/>
               </a:rPr>
               <a:t>, mis </a:t>
             </a:r>
             <a:r>
-              <a:rPr lang="en-US" sz="2000" err="1">
+              <a:rPr lang="en-US" sz="2000" dirty="0" err="1">
                 <a:ea typeface="Inter"/>
                 <a:cs typeface="Arial"/>
               </a:rPr>
               <a:t>eesmärgiga</a:t>
             </a:r>
             <a:r>
-              <a:rPr lang="en-US" sz="2000">
+              <a:rPr lang="en-US" sz="2000" dirty="0">
                 <a:ea typeface="Inter"/>
                 <a:cs typeface="Arial"/>
               </a:rPr>
               <a:t> ja </a:t>
             </a:r>
             <a:r>
-              <a:rPr lang="en-US" sz="2000" err="1">
+              <a:rPr lang="en-US" sz="2000" dirty="0" err="1">
                 <a:ea typeface="Inter"/>
                 <a:cs typeface="Arial"/>
               </a:rPr>
               <a:t>kui</a:t>
             </a:r>
             <a:r>
-              <a:rPr lang="en-US" sz="2000">
+              <a:rPr lang="en-US" sz="2000" dirty="0">
                 <a:ea typeface="Inter"/>
                 <a:cs typeface="Arial"/>
               </a:rPr>
               <a:t> </a:t>
             </a:r>
             <a:r>
-              <a:rPr lang="en-US" sz="2000" err="1">
+              <a:rPr lang="en-US" sz="2000" dirty="0" err="1">
                 <a:ea typeface="Inter"/>
                 <a:cs typeface="Arial"/>
               </a:rPr>
               <a:t>kaua</a:t>
             </a:r>
             <a:r>
-              <a:rPr lang="en-US" sz="2000">
+              <a:rPr lang="en-US" sz="2000" dirty="0">
                 <a:ea typeface="Inter"/>
                 <a:cs typeface="Arial"/>
               </a:rPr>
               <a:t> </a:t>
             </a:r>
             <a:r>
-              <a:rPr lang="en-US" sz="2000" err="1">
+              <a:rPr lang="en-US" sz="2000" dirty="0" err="1">
                 <a:ea typeface="Inter"/>
                 <a:cs typeface="Arial"/>
               </a:rPr>
               <a:t>kogutakse</a:t>
             </a:r>
             <a:r>
-              <a:rPr lang="en-US" sz="2000">
+              <a:rPr lang="en-US" sz="2000" dirty="0">
                 <a:ea typeface="Inter"/>
                 <a:cs typeface="Arial"/>
               </a:rPr>
               <a:t>, </a:t>
             </a:r>
             <a:r>
-              <a:rPr lang="en-US" sz="2000" err="1">
+              <a:rPr lang="en-US" sz="2000" dirty="0" err="1">
                 <a:ea typeface="Inter"/>
                 <a:cs typeface="Arial"/>
               </a:rPr>
               <a:t>töödeldakse</a:t>
             </a:r>
             <a:r>
-              <a:rPr lang="en-US" sz="2000">
+              <a:rPr lang="en-US" sz="2000" dirty="0">
                 <a:ea typeface="Inter"/>
                 <a:cs typeface="Arial"/>
               </a:rPr>
               <a:t> (</a:t>
             </a:r>
             <a:r>
-              <a:rPr lang="en-US" sz="2000" err="1">
+              <a:rPr lang="en-US" sz="2000" dirty="0" err="1">
                 <a:ea typeface="Inter"/>
                 <a:cs typeface="Arial"/>
               </a:rPr>
               <a:t>sh</a:t>
             </a:r>
             <a:r>
-              <a:rPr lang="en-US" sz="2000">
+              <a:rPr lang="en-US" sz="2000" dirty="0">
                 <a:ea typeface="Inter"/>
                 <a:cs typeface="Arial"/>
               </a:rPr>
               <a:t> </a:t>
             </a:r>
             <a:r>
-              <a:rPr lang="en-US" sz="2000" err="1">
+              <a:rPr lang="en-US" sz="2000" dirty="0" err="1">
                 <a:ea typeface="Inter"/>
                 <a:cs typeface="Arial"/>
               </a:rPr>
               <a:t>vaadatakse</a:t>
             </a:r>
             <a:r>
-              <a:rPr lang="en-US" sz="2000">
+              <a:rPr lang="en-US" sz="2000" dirty="0">
                 <a:ea typeface="Inter"/>
                 <a:cs typeface="Arial"/>
               </a:rPr>
               <a:t>) ja </a:t>
             </a:r>
             <a:r>
-              <a:rPr lang="en-US" sz="2000" err="1">
+              <a:rPr lang="en-US" sz="2000" dirty="0" err="1">
                 <a:ea typeface="Inter"/>
                 <a:cs typeface="Arial"/>
               </a:rPr>
               <a:t>hoiustatakse</a:t>
             </a:r>
             <a:r>
-              <a:rPr lang="en-US" sz="2000">
+              <a:rPr lang="en-US" sz="2000" dirty="0">
                 <a:ea typeface="Inter"/>
                 <a:cs typeface="Arial"/>
               </a:rPr>
               <a:t>.</a:t>
             </a:r>
-            <a:endParaRPr lang="en-US" sz="2000">
+            <a:endParaRPr lang="en-US" sz="2000" dirty="0">
               <a:cs typeface="Arial"/>
             </a:endParaRPr>
           </a:p>
@@ -41428,118 +42162,118 @@
               <a:buChar char="o"/>
             </a:pPr>
             <a:r>
-              <a:rPr lang="en-US" sz="2000" err="1">
+              <a:rPr lang="en-US" sz="2000" dirty="0" err="1">
                 <a:ea typeface="Inter"/>
                 <a:cs typeface="Arial"/>
               </a:rPr>
               <a:t>Andmesubjekt</a:t>
             </a:r>
             <a:r>
-              <a:rPr lang="en-US" sz="2000">
+              <a:rPr lang="en-US" sz="2000" dirty="0">
                 <a:ea typeface="Inter"/>
                 <a:cs typeface="Arial"/>
               </a:rPr>
               <a:t> - </a:t>
             </a:r>
             <a:r>
-              <a:rPr lang="en-US" sz="2000" err="1">
+              <a:rPr lang="en-US" sz="2000" dirty="0" err="1">
                 <a:ea typeface="Inter"/>
                 <a:cs typeface="Arial"/>
               </a:rPr>
               <a:t>füüsiline</a:t>
             </a:r>
             <a:r>
-              <a:rPr lang="en-US" sz="2000">
+              <a:rPr lang="en-US" sz="2000" dirty="0">
                 <a:ea typeface="Inter"/>
                 <a:cs typeface="Arial"/>
               </a:rPr>
               <a:t> </a:t>
             </a:r>
             <a:r>
-              <a:rPr lang="en-US" sz="2000" err="1">
+              <a:rPr lang="en-US" sz="2000" dirty="0" err="1">
                 <a:ea typeface="Inter"/>
                 <a:cs typeface="Arial"/>
               </a:rPr>
               <a:t>isik</a:t>
             </a:r>
             <a:r>
-              <a:rPr lang="en-US" sz="2000">
+              <a:rPr lang="en-US" sz="2000" dirty="0">
                 <a:ea typeface="Inter"/>
                 <a:cs typeface="Arial"/>
               </a:rPr>
               <a:t> </a:t>
             </a:r>
             <a:r>
-              <a:rPr lang="en-US" sz="2000" err="1">
+              <a:rPr lang="en-US" sz="2000" dirty="0" err="1">
                 <a:ea typeface="Inter"/>
                 <a:cs typeface="Arial"/>
               </a:rPr>
               <a:t>ehk</a:t>
             </a:r>
             <a:r>
-              <a:rPr lang="en-US" sz="2000">
+              <a:rPr lang="en-US" sz="2000" dirty="0">
                 <a:ea typeface="Inter"/>
                 <a:cs typeface="Arial"/>
               </a:rPr>
               <a:t> </a:t>
             </a:r>
             <a:r>
-              <a:rPr lang="en-US" sz="2000" err="1">
+              <a:rPr lang="en-US" sz="2000" dirty="0" err="1">
                 <a:ea typeface="Inter"/>
                 <a:cs typeface="Arial"/>
               </a:rPr>
               <a:t>inimene</a:t>
             </a:r>
             <a:r>
-              <a:rPr lang="en-US" sz="2000">
+              <a:rPr lang="en-US" sz="2000" dirty="0">
                 <a:ea typeface="Inter"/>
                 <a:cs typeface="Arial"/>
               </a:rPr>
               <a:t>, </a:t>
             </a:r>
             <a:r>
-              <a:rPr lang="en-US" sz="2000" err="1">
+              <a:rPr lang="en-US" sz="2000" dirty="0" err="1">
                 <a:ea typeface="Inter"/>
                 <a:cs typeface="Arial"/>
               </a:rPr>
               <a:t>kelle</a:t>
             </a:r>
             <a:r>
-              <a:rPr lang="en-US" sz="2000">
+              <a:rPr lang="en-US" sz="2000" dirty="0">
                 <a:ea typeface="Inter"/>
                 <a:cs typeface="Arial"/>
               </a:rPr>
               <a:t> </a:t>
             </a:r>
             <a:r>
-              <a:rPr lang="en-US" sz="2000" err="1">
+              <a:rPr lang="en-US" sz="2000" dirty="0" err="1">
                 <a:ea typeface="Inter"/>
                 <a:cs typeface="Arial"/>
               </a:rPr>
               <a:t>andmeid</a:t>
             </a:r>
             <a:r>
-              <a:rPr lang="en-US" sz="2000">
+              <a:rPr lang="en-US" sz="2000" dirty="0">
                 <a:ea typeface="Inter"/>
                 <a:cs typeface="Arial"/>
               </a:rPr>
               <a:t> </a:t>
             </a:r>
             <a:r>
-              <a:rPr lang="en-US" sz="2000" err="1">
+              <a:rPr lang="en-US" sz="2000" dirty="0" err="1">
                 <a:ea typeface="Inter"/>
                 <a:cs typeface="Arial"/>
               </a:rPr>
               <a:t>töödeldakse</a:t>
             </a:r>
             <a:r>
-              <a:rPr lang="en-US" sz="2000">
+              <a:rPr lang="en-US" sz="2000" dirty="0">
                 <a:ea typeface="Inter"/>
                 <a:cs typeface="Arial"/>
               </a:rPr>
               <a:t>.</a:t>
             </a:r>
-            <a:endParaRPr lang="en-US" sz="2000">
+            <a:endParaRPr lang="en-US" sz="2000" dirty="0">
               <a:solidFill>
                 <a:srgbClr val="121212"/>
               </a:solidFill>
@@ -41557,14 +42291,54 @@
               <a:buChar char="•"/>
             </a:pPr>
             <a:r>
-              <a:rPr lang="en-US" sz="2000">
+              <a:rPr lang="en-US" sz="2000" dirty="0" err="1">
                 <a:ea typeface="Inter"/>
                 <a:cs typeface="Arial"/>
                 <a:hlinkClick r:id="rId3"/>
               </a:rPr>
-              <a:t>Isikuandmete üldkaitse määrus (IKÜM)</a:t>
-            </a:r>
-            <a:endParaRPr lang="en-US" sz="2000">
+              <a:t>Isikuandmete</a:t>
+            </a:r>
+            <a:r>
+              <a:rPr lang="en-US" sz="2000" dirty="0">
+                <a:ea typeface="Inter"/>
+                <a:cs typeface="Arial"/>
+                <a:hlinkClick r:id="rId3"/>
+              </a:rPr>
+              <a:t> </a:t>
+            </a:r>
+            <a:r>
+              <a:rPr lang="en-US" sz="2000" dirty="0" err="1">
+                <a:ea typeface="Inter"/>
+                <a:cs typeface="Arial"/>
+                <a:hlinkClick r:id="rId3"/>
+              </a:rPr>
+              <a:t>üldkaitse</a:t>
+            </a:r>
+            <a:r>
+              <a:rPr lang="en-US" sz="2000" dirty="0">
+                <a:ea typeface="Inter"/>
+                <a:cs typeface="Arial"/>
+                <a:hlinkClick r:id="rId3"/>
+              </a:rPr>
+              <a:t> </a:t>
+            </a:r>
+            <a:r>
+              <a:rPr lang="en-US" sz="2000" dirty="0" err="1">
+                <a:ea typeface="Inter"/>
+                <a:cs typeface="Arial"/>
+                <a:hlinkClick r:id="rId3"/>
+              </a:rPr>
+              <a:t>määrus</a:t>
+            </a:r>
+            <a:r>
+              <a:rPr lang="en-US" sz="2000" dirty="0">
+                <a:ea typeface="Inter"/>
+                <a:cs typeface="Arial"/>
+                <a:hlinkClick r:id="rId3"/>
+              </a:rPr>
+              <a:t> (IKÜM)</a:t>
+            </a:r>
+            <a:endParaRPr lang="en-US" sz="2000" dirty="0">
               <a:ea typeface="Inter"/>
               <a:cs typeface="Arial"/>
             </a:endParaRPr>
@@ -41578,97 +42352,97 @@
               <a:buChar char="o"/>
             </a:pPr>
             <a:r>
-              <a:rPr lang="en-US" sz="2000" err="1">
+              <a:rPr lang="en-US" sz="2000" dirty="0" err="1">
                 <a:ea typeface="Inter"/>
                 <a:cs typeface="Arial"/>
               </a:rPr>
               <a:t>Euroopa</a:t>
             </a:r>
             <a:r>
-              <a:rPr lang="en-US" sz="2000">
+              <a:rPr lang="en-US" sz="2000" dirty="0">
                 <a:ea typeface="Inter"/>
                 <a:cs typeface="Arial"/>
               </a:rPr>
               <a:t> </a:t>
             </a:r>
             <a:r>
-              <a:rPr lang="en-US" sz="2000" err="1">
+              <a:rPr lang="en-US" sz="2000" dirty="0" err="1">
                 <a:ea typeface="Inter"/>
                 <a:cs typeface="Arial"/>
               </a:rPr>
               <a:t>Liidu</a:t>
             </a:r>
             <a:r>
-              <a:rPr lang="en-US" sz="2000">
+              <a:rPr lang="en-US" sz="2000" dirty="0">
                 <a:ea typeface="Inter"/>
                 <a:cs typeface="Arial"/>
               </a:rPr>
               <a:t> </a:t>
             </a:r>
             <a:r>
-              <a:rPr lang="en-US" sz="2000" err="1">
+              <a:rPr lang="en-US" sz="2000" dirty="0" err="1">
                 <a:ea typeface="Inter"/>
                 <a:cs typeface="Arial"/>
               </a:rPr>
               <a:t>määrus</a:t>
             </a:r>
             <a:r>
-              <a:rPr lang="en-US" sz="2000">
+              <a:rPr lang="en-US" sz="2000" dirty="0">
                 <a:ea typeface="Inter"/>
                 <a:cs typeface="Arial"/>
               </a:rPr>
               <a:t>, </a:t>
             </a:r>
             <a:r>
-              <a:rPr lang="en-US" sz="2000" err="1">
+              <a:rPr lang="en-US" sz="2000" dirty="0" err="1">
                 <a:ea typeface="Inter"/>
                 <a:cs typeface="Arial"/>
               </a:rPr>
               <a:t>mida</a:t>
             </a:r>
             <a:r>
-              <a:rPr lang="en-US" sz="2000">
+              <a:rPr lang="en-US" sz="2000" dirty="0">
                 <a:ea typeface="Inter"/>
                 <a:cs typeface="Arial"/>
               </a:rPr>
               <a:t> </a:t>
             </a:r>
             <a:r>
-              <a:rPr lang="en-US" sz="2000" err="1">
+              <a:rPr lang="en-US" sz="2000" dirty="0" err="1">
                 <a:ea typeface="Inter"/>
                 <a:cs typeface="Arial"/>
               </a:rPr>
               <a:t>kohaldatakse</a:t>
             </a:r>
             <a:r>
-              <a:rPr lang="en-US" sz="2000">
+              <a:rPr lang="en-US" sz="2000" dirty="0">
                 <a:ea typeface="Inter"/>
                 <a:cs typeface="Arial"/>
               </a:rPr>
               <a:t> </a:t>
             </a:r>
             <a:r>
-              <a:rPr lang="en-US" sz="2000" err="1">
+              <a:rPr lang="en-US" sz="2000" dirty="0" err="1">
                 <a:ea typeface="Inter"/>
                 <a:cs typeface="Arial"/>
               </a:rPr>
               <a:t>Eestis</a:t>
             </a:r>
             <a:r>
-              <a:rPr lang="en-US" sz="2000">
+              <a:rPr lang="en-US" sz="2000" dirty="0">
                 <a:ea typeface="Inter"/>
                 <a:cs typeface="Arial"/>
               </a:rPr>
               <a:t> 2018. </a:t>
             </a:r>
             <a:r>
-              <a:rPr lang="en-US" sz="2000" err="1">
+              <a:rPr lang="en-US" sz="2000" dirty="0" err="1">
                 <a:ea typeface="Inter"/>
                 <a:cs typeface="Arial"/>
               </a:rPr>
               <a:t>aastast</a:t>
             </a:r>
-            <a:endParaRPr lang="en-US" sz="2000">
+            <a:endParaRPr lang="en-US" sz="2000" dirty="0">
               <a:cs typeface="Arial"/>
             </a:endParaRPr>
           </a:p>
@@ -41681,181 +42455,223 @@
               <a:buChar char="o"/>
             </a:pPr>
             <a:r>
-              <a:rPr lang="en-US" sz="2000" err="1">
+              <a:rPr lang="en-US" sz="2000" dirty="0" err="1">
                 <a:ea typeface="Inter"/>
                 <a:cs typeface="Arial"/>
               </a:rPr>
               <a:t>Isikuandmed</a:t>
             </a:r>
             <a:r>
-              <a:rPr lang="en-US" sz="2000">
+              <a:rPr lang="en-US" sz="2000" dirty="0">
                 <a:ea typeface="Inter"/>
                 <a:cs typeface="Arial"/>
               </a:rPr>
               <a:t> – </a:t>
             </a:r>
             <a:r>
-              <a:rPr lang="en-US" sz="2000" err="1">
+              <a:rPr lang="en-US" sz="2000" dirty="0" err="1">
                 <a:ea typeface="Inter"/>
                 <a:cs typeface="Arial"/>
               </a:rPr>
               <a:t>andmed</a:t>
             </a:r>
             <a:r>
-              <a:rPr lang="en-US" sz="2000">
+              <a:rPr lang="en-US" sz="2000" dirty="0">
                 <a:ea typeface="Inter"/>
                 <a:cs typeface="Arial"/>
               </a:rPr>
               <a:t> </a:t>
             </a:r>
             <a:r>
-              <a:rPr lang="en-US" sz="2000" b="1" err="1">
+              <a:rPr lang="en-US" sz="2000" b="1" dirty="0" err="1">
                 <a:ea typeface="Inter"/>
                 <a:cs typeface="Arial"/>
               </a:rPr>
               <a:t>füüsilise</a:t>
             </a:r>
             <a:r>
-              <a:rPr lang="en-US" sz="2000" b="1">
+              <a:rPr lang="en-US" sz="2000" b="1" dirty="0">
                 <a:ea typeface="Inter"/>
                 <a:cs typeface="Arial"/>
               </a:rPr>
               <a:t> </a:t>
             </a:r>
             <a:r>
-              <a:rPr lang="en-US" sz="2000" b="1" err="1">
+              <a:rPr lang="en-US" sz="2000" b="1" dirty="0" err="1">
                 <a:ea typeface="Inter"/>
                 <a:cs typeface="Arial"/>
               </a:rPr>
               <a:t>isiku</a:t>
             </a:r>
             <a:r>
-              <a:rPr lang="en-US" sz="2000" b="1">
+              <a:rPr lang="en-US" sz="2000" b="1" dirty="0">
                 <a:ea typeface="Inter"/>
                 <a:cs typeface="Arial"/>
               </a:rPr>
               <a:t> </a:t>
             </a:r>
             <a:r>
-              <a:rPr lang="en-US" sz="2000" b="1" err="1">
+              <a:rPr lang="en-US" sz="2000" b="1" dirty="0" err="1">
                 <a:ea typeface="Inter"/>
                 <a:cs typeface="Arial"/>
               </a:rPr>
               <a:t>kohta</a:t>
             </a:r>
             <a:r>
-              <a:rPr lang="en-US" sz="2000">
+              <a:rPr lang="en-US" sz="2000" dirty="0">
                 <a:ea typeface="Inter"/>
                 <a:cs typeface="Arial"/>
               </a:rPr>
               <a:t>, </a:t>
             </a:r>
             <a:r>
-              <a:rPr lang="en-US" sz="2000" err="1">
+              <a:rPr lang="en-US" sz="2000" dirty="0" err="1">
                 <a:ea typeface="Inter"/>
                 <a:cs typeface="Arial"/>
               </a:rPr>
               <a:t>mille</a:t>
             </a:r>
             <a:r>
-              <a:rPr lang="en-US" sz="2000">
+              <a:rPr lang="en-US" sz="2000" dirty="0">
                 <a:ea typeface="Inter"/>
                 <a:cs typeface="Arial"/>
               </a:rPr>
               <a:t> </a:t>
             </a:r>
             <a:r>
-              <a:rPr lang="en-US" sz="2000" err="1">
+              <a:rPr lang="en-US" sz="2000" dirty="0" err="1">
                 <a:ea typeface="Inter"/>
                 <a:cs typeface="Arial"/>
               </a:rPr>
               <a:t>abil</a:t>
             </a:r>
             <a:r>
-              <a:rPr lang="en-US" sz="2000">
+              <a:rPr lang="en-US" sz="2000" dirty="0">
                 <a:ea typeface="Inter"/>
                 <a:cs typeface="Arial"/>
               </a:rPr>
               <a:t> on </a:t>
             </a:r>
             <a:r>
-              <a:rPr lang="en-US" sz="2000" err="1">
+              <a:rPr lang="en-US" sz="2000" dirty="0" err="1">
                 <a:ea typeface="Inter"/>
                 <a:cs typeface="Arial"/>
               </a:rPr>
               <a:t>isikut</a:t>
             </a:r>
             <a:r>
-              <a:rPr lang="en-US" sz="2000">
+              <a:rPr lang="en-US" sz="2000" dirty="0">
                 <a:ea typeface="Inter"/>
                 <a:cs typeface="Arial"/>
               </a:rPr>
               <a:t> </a:t>
             </a:r>
             <a:r>
-              <a:rPr lang="en-US" sz="2000" err="1">
+              <a:rPr lang="en-US" sz="2000" dirty="0" err="1">
                 <a:ea typeface="Inter"/>
                 <a:cs typeface="Arial"/>
               </a:rPr>
               <a:t>otseselt</a:t>
             </a:r>
             <a:r>
-              <a:rPr lang="en-US" sz="2000">
+              <a:rPr lang="en-US" sz="2000" dirty="0">
                 <a:ea typeface="Inter"/>
                 <a:cs typeface="Arial"/>
               </a:rPr>
               <a:t> </a:t>
             </a:r>
             <a:r>
-              <a:rPr lang="en-US" sz="2000" err="1">
+              <a:rPr lang="en-US" sz="2000" dirty="0" err="1">
                 <a:ea typeface="Inter"/>
                 <a:cs typeface="Arial"/>
               </a:rPr>
               <a:t>või</a:t>
             </a:r>
             <a:r>
-              <a:rPr lang="en-US" sz="2000">
+              <a:rPr lang="en-US" sz="2000" dirty="0">
                 <a:ea typeface="Inter"/>
                 <a:cs typeface="Arial"/>
               </a:rPr>
               <a:t> </a:t>
             </a:r>
             <a:r>
-              <a:rPr lang="en-US" sz="2000" err="1">
+              <a:rPr lang="en-US" sz="2000" dirty="0" err="1">
                 <a:ea typeface="Inter"/>
                 <a:cs typeface="Arial"/>
               </a:rPr>
               <a:t>kaudselt</a:t>
             </a:r>
             <a:r>
-              <a:rPr lang="en-US" sz="2000">
+              <a:rPr lang="en-US" sz="2000" dirty="0">
                 <a:ea typeface="Inter"/>
                 <a:cs typeface="Arial"/>
               </a:rPr>
               <a:t> </a:t>
             </a:r>
             <a:r>
-              <a:rPr lang="en-US" sz="2000" err="1">
+              <a:rPr lang="en-US" sz="2000" dirty="0" err="1">
                 <a:ea typeface="Inter"/>
                 <a:cs typeface="Arial"/>
               </a:rPr>
               <a:t>võimalik</a:t>
             </a:r>
             <a:r>
-              <a:rPr lang="en-US" sz="2000">
+              <a:rPr lang="en-US" sz="2000" dirty="0">
                 <a:ea typeface="Inter"/>
                 <a:cs typeface="Arial"/>
               </a:rPr>
               <a:t> </a:t>
             </a:r>
             <a:r>
-              <a:rPr lang="en-US" sz="2000" err="1">
+              <a:rPr lang="en-US" sz="2000" dirty="0" err="1">
                 <a:ea typeface="Inter"/>
                 <a:cs typeface="Arial"/>
               </a:rPr>
               <a:t>tuvastada</a:t>
             </a:r>
-            <a:endParaRPr lang="en-US" sz="2000" err="1">
+            <a:endParaRPr lang="en-US" sz="2000" dirty="0">
+              <a:ea typeface="Inter"/>
+              <a:cs typeface="Arial"/>
+            </a:endParaRPr>
+          </a:p>
+          <a:p>
+            <a:pPr marL="857250" lvl="1" indent="-228600">
+              <a:lnSpc>
+                <a:spcPct val="150000"/>
+              </a:lnSpc>
+              <a:buFont typeface="Courier New" panose="020B0502030000000004" pitchFamily="34" charset="0"/>
+              <a:buChar char="o"/>
+            </a:pPr>
+            <a:r>
+              <a:rPr lang="en-US" dirty="0" err="1">
+                <a:ea typeface="Inter"/>
+                <a:cs typeface="Arial"/>
+              </a:rPr>
+              <a:t>Lisainfo</a:t>
+            </a:r>
+            <a:r>
+              <a:rPr lang="en-US" dirty="0">
+                <a:ea typeface="Inter"/>
+                <a:cs typeface="Arial"/>
+              </a:rPr>
+              <a:t>: </a:t>
+            </a:r>
+            <a:r>
+              <a:rPr lang="en-US" dirty="0">
+                <a:ea typeface="Inter"/>
+                <a:cs typeface="Arial"/>
+                <a:hlinkClick r:id="rId4"/>
+              </a:rPr>
+              <a:t>https://www.edpb.europa.eu/sme-data-protection-guide/faq-frequently-asked-questions_en</a:t>
+            </a:r>
+            <a:r>
+              <a:rPr lang="en-US" dirty="0">
+                <a:ea typeface="Inter"/>
+                <a:cs typeface="Arial"/>
+              </a:rPr>
+              <a:t> </a:t>
+            </a:r>
+            <a:endParaRPr lang="en-US" dirty="0">
               <a:cs typeface="Arial"/>
             </a:endParaRPr>
           </a:p>
@@ -41871,14 +42687,46 @@
               <a:buChar char="•"/>
             </a:pPr>
             <a:r>
-              <a:rPr lang="en-US" sz="2000">
+              <a:rPr lang="en-US" sz="2000" dirty="0" err="1">
                 <a:ea typeface="Inter"/>
                 <a:cs typeface="Arial"/>
-                <a:hlinkClick r:id="rId4"/>
-              </a:rPr>
-              <a:t>Isikuandmete kaitse seadus</a:t>
-            </a:r>
-            <a:endParaRPr lang="en-US" sz="2000">
+                <a:hlinkClick r:id="rId5"/>
+              </a:rPr>
+              <a:t>Isikuandmete</a:t>
+            </a:r>
+            <a:r>
+              <a:rPr lang="en-US" sz="2000" dirty="0">
+                <a:ea typeface="Inter"/>
+                <a:cs typeface="Arial"/>
+                <a:hlinkClick r:id="rId5"/>
+              </a:rPr>
+              <a:t> </a:t>
+            </a:r>
+            <a:r>
+              <a:rPr lang="en-US" sz="2000" dirty="0" err="1">
+                <a:ea typeface="Inter"/>
+                <a:cs typeface="Arial"/>
+                <a:hlinkClick r:id="rId5"/>
+              </a:rPr>
+              <a:t>kaitse</a:t>
+            </a:r>
+            <a:r>
+              <a:rPr lang="en-US" sz="2000" dirty="0">
+                <a:ea typeface="Inter"/>
+                <a:cs typeface="Arial"/>
+                <a:hlinkClick r:id="rId5"/>
+              </a:rPr>
+              <a:t> </a:t>
+            </a:r>
+            <a:r>
+              <a:rPr lang="en-US" sz="2000" dirty="0" err="1">
+                <a:ea typeface="Inter"/>
+                <a:cs typeface="Arial"/>
+                <a:hlinkClick r:id="rId5"/>
+              </a:rPr>
+              <a:t>seadus</a:t>
+            </a:r>
+            <a:endParaRPr lang="en-US" sz="2000" dirty="0">
               <a:ea typeface="Inter"/>
               <a:cs typeface="Arial"/>
             </a:endParaRPr>
@@ -41892,128 +42740,35 @@
               <a:buChar char="o"/>
             </a:pPr>
             <a:r>
-              <a:rPr lang="en-US" sz="2000" err="1">
+              <a:rPr lang="en-US" sz="2000" dirty="0">
                 <a:ea typeface="Inter"/>
                 <a:cs typeface="Arial"/>
               </a:rPr>
-              <a:t>Täpsustab</a:t>
-            </a:r>
-            <a:r>
-              <a:rPr lang="en-US" sz="2000">
+              <a:t>Täpsustab ja </a:t>
+            </a:r>
+            <a:r>
+              <a:rPr lang="en-US" sz="2000" dirty="0" err="1">
                 <a:ea typeface="Inter"/>
                 <a:cs typeface="Arial"/>
               </a:rPr>
-              <a:t> ja </a:t>
-            </a:r>
-            <a:r>
-              <a:rPr lang="en-US" sz="2000" err="1">
+              <a:t>täiendab</a:t>
+            </a:r>
+            <a:r>
+              <a:rPr lang="en-US" sz="2000" dirty="0">
                 <a:ea typeface="Inter"/>
                 <a:cs typeface="Arial"/>
               </a:rPr>
-              <a:t>täiendab</a:t>
-            </a:r>
-            <a:r>
-              <a:rPr lang="en-US" sz="2000">
+              <a:t> IKÜM-</a:t>
+            </a:r>
+            <a:r>
+              <a:rPr lang="en-US" sz="2000" dirty="0" err="1">
                 <a:ea typeface="Inter"/>
                 <a:cs typeface="Arial"/>
               </a:rPr>
-              <a:t> IKÜM-</a:t>
-            </a:r>
-            <a:r>
-              <a:rPr lang="en-US" sz="2000" err="1">
-                <a:ea typeface="Inter"/>
-                <a:cs typeface="Arial"/>
-              </a:rPr>
               <a:t>i</a:t>
             </a:r>
-          </a:p>
-          <a:p>
-            <a:pPr marL="342900" indent="-342900">
-              <a:lnSpc>
-                <a:spcPct val="150000"/>
-              </a:lnSpc>
-              <a:buClr>
-                <a:srgbClr val="121212"/>
-              </a:buClr>
-              <a:buFont typeface="Arial" panose="020B0502030000000004" pitchFamily="34" charset="0"/>
-              <a:buChar char="•"/>
-            </a:pPr>
-            <a:r>
-              <a:rPr lang="en-US" sz="2000" err="1">
-                <a:ea typeface="Inter"/>
-                <a:cs typeface="Arial"/>
-              </a:rPr>
-              <a:t>Eestis</a:t>
-            </a:r>
-            <a:r>
-              <a:rPr lang="en-US" sz="2000">
-                <a:ea typeface="Inter"/>
-                <a:cs typeface="Arial"/>
-              </a:rPr>
-              <a:t> </a:t>
-            </a:r>
-            <a:r>
-              <a:rPr lang="en-US" sz="2000" err="1">
-                <a:ea typeface="Inter"/>
-                <a:cs typeface="Arial"/>
-              </a:rPr>
-              <a:t>teostab</a:t>
-            </a:r>
-            <a:r>
-              <a:rPr lang="en-US" sz="2000">
-                <a:ea typeface="Inter"/>
-                <a:cs typeface="Arial"/>
-              </a:rPr>
-              <a:t> </a:t>
-            </a:r>
-            <a:r>
-              <a:rPr lang="en-US" sz="2000" err="1">
-                <a:ea typeface="Inter"/>
-                <a:cs typeface="Arial"/>
-              </a:rPr>
-              <a:t>järelvalvet</a:t>
-            </a:r>
-            <a:r>
-              <a:rPr lang="en-US" sz="2000">
-                <a:ea typeface="Inter"/>
-                <a:cs typeface="Arial"/>
-              </a:rPr>
-              <a:t> </a:t>
-            </a:r>
-            <a:r>
-              <a:rPr lang="en-US" sz="2000" err="1">
-                <a:ea typeface="Inter"/>
-                <a:cs typeface="Arial"/>
-              </a:rPr>
-              <a:t>Andmekaitse</a:t>
-            </a:r>
-            <a:r>
-              <a:rPr lang="en-US" sz="2000">
-                <a:ea typeface="Inter"/>
-                <a:cs typeface="Arial"/>
-              </a:rPr>
-              <a:t> </a:t>
-            </a:r>
-            <a:r>
-              <a:rPr lang="en-US" sz="2000" err="1">
-                <a:ea typeface="Inter"/>
-                <a:cs typeface="Arial"/>
-              </a:rPr>
-              <a:t>Inspektsioon</a:t>
-            </a:r>
-            <a:endParaRPr lang="en-US" sz="2000" err="1">
-              <a:cs typeface="Arial"/>
-            </a:endParaRPr>
-          </a:p>
-          <a:p>
-            <a:pPr marL="857250" lvl="1" indent="-342900">
-              <a:lnSpc>
-                <a:spcPct val="150000"/>
-              </a:lnSpc>
-              <a:buFont typeface="Courier New" panose="020B0502030000000004" pitchFamily="34" charset="0"/>
-              <a:buChar char="o"/>
-            </a:pPr>
-            <a:endParaRPr lang="en-US" sz="2400">
+            <a:endParaRPr lang="en-US" sz="2000" dirty="0">
+              <a:ea typeface="Inter"/>
               <a:cs typeface="Arial"/>
             </a:endParaRPr>
           </a:p>
@@ -42028,7 +42783,97 @@
               <a:buFont typeface="Arial" panose="020B0502030000000004" pitchFamily="34" charset="0"/>
               <a:buChar char="•"/>
             </a:pPr>
-            <a:endParaRPr lang="en-US" sz="2400">
+            <a:r>
+              <a:rPr lang="en-US" sz="2000" dirty="0" err="1">
+                <a:ea typeface="Inter"/>
+                <a:cs typeface="Arial"/>
+              </a:rPr>
+              <a:t>Eestis</a:t>
+            </a:r>
+            <a:r>
+              <a:rPr lang="en-US" sz="2000" dirty="0">
+                <a:ea typeface="Inter"/>
+                <a:cs typeface="Arial"/>
+              </a:rPr>
+              <a:t> </a:t>
+            </a:r>
+            <a:r>
+              <a:rPr lang="en-US" sz="2000" dirty="0" err="1">
+                <a:ea typeface="Inter"/>
+                <a:cs typeface="Arial"/>
+              </a:rPr>
+              <a:t>teostab</a:t>
+            </a:r>
+            <a:r>
+              <a:rPr lang="en-US" sz="2000" dirty="0">
+                <a:ea typeface="Inter"/>
+                <a:cs typeface="Arial"/>
+              </a:rPr>
+              <a:t> </a:t>
+            </a:r>
+            <a:r>
+              <a:rPr lang="en-US" sz="2000" dirty="0" err="1">
+                <a:ea typeface="Inter"/>
+                <a:cs typeface="Arial"/>
+              </a:rPr>
+              <a:t>järelvalvet</a:t>
+            </a:r>
+            <a:r>
+              <a:rPr lang="en-US" sz="2000" dirty="0">
+                <a:ea typeface="Inter"/>
+                <a:cs typeface="Arial"/>
+              </a:rPr>
+              <a:t> </a:t>
+            </a:r>
+            <a:r>
+              <a:rPr lang="en-US" sz="2000" dirty="0" err="1">
+                <a:ea typeface="Inter"/>
+                <a:cs typeface="Arial"/>
+              </a:rPr>
+              <a:t>Andmekaitse</a:t>
+            </a:r>
+            <a:r>
+              <a:rPr lang="en-US" sz="2000" dirty="0">
+                <a:ea typeface="Inter"/>
+                <a:cs typeface="Arial"/>
+              </a:rPr>
+              <a:t> </a:t>
+            </a:r>
+            <a:r>
+              <a:rPr lang="en-US" sz="2000" dirty="0" err="1">
+                <a:ea typeface="Inter"/>
+                <a:cs typeface="Arial"/>
+              </a:rPr>
+              <a:t>Inspektsioon</a:t>
+            </a:r>
+            <a:endParaRPr lang="en-US" sz="2000" dirty="0">
+              <a:cs typeface="Arial"/>
+            </a:endParaRPr>
+          </a:p>
+          <a:p>
+            <a:pPr marL="857250" lvl="1" indent="-342900">
+              <a:lnSpc>
+                <a:spcPct val="150000"/>
+              </a:lnSpc>
+              <a:buFont typeface="Courier New" panose="020B0502030000000004" pitchFamily="34" charset="0"/>
+              <a:buChar char="o"/>
+            </a:pPr>
+            <a:endParaRPr lang="en-US" sz="2400" dirty="0">
+              <a:cs typeface="Arial"/>
+            </a:endParaRPr>
+          </a:p>
+          <a:p>
+            <a:pPr marL="342900" indent="-342900">
+              <a:lnSpc>
+                <a:spcPct val="150000"/>
+              </a:lnSpc>
+              <a:buClr>
+                <a:srgbClr val="121212"/>
+              </a:buClr>
+              <a:buFont typeface="Arial" panose="020B0502030000000004" pitchFamily="34" charset="0"/>
+              <a:buChar char="•"/>
+            </a:pPr>
+            <a:endParaRPr lang="en-US" sz="2400" dirty="0">
               <a:cs typeface="Arial"/>
             </a:endParaRPr>
           </a:p>
@@ -42040,7 +42885,7 @@
               <a:buFont typeface="Arial" panose="020B0502030000000004" pitchFamily="34" charset="0"/>
               <a:buChar char="•"/>
             </a:pPr>
-            <a:endParaRPr lang="en-US" sz="2800">
+            <a:endParaRPr lang="en-US" sz="2800" dirty="0">
               <a:cs typeface="Arial"/>
             </a:endParaRPr>
           </a:p>
@@ -42051,7 +42896,7 @@
               </a:lnSpc>
               <a:buNone/>
             </a:pPr>
-            <a:endParaRPr lang="en-US" sz="2800"/>
+            <a:endParaRPr lang="en-US" sz="2800" dirty="0"/>
           </a:p>
         </p:txBody>
       </p:sp>
@@ -42276,33 +43121,15 @@
                                   </p:childTnLst>
                                 </p:cTn>
                               </p:par>
-                            </p:childTnLst>
-                          </p:cTn>
-                        </p:par>
-                      </p:childTnLst>
-                    </p:cTn>
-                  </p:par>
-                  <p:par>
-                    <p:cTn id="19" fill="hold">
-                      <p:stCondLst>
-                        <p:cond delay="indefinite"/>
-                      </p:stCondLst>
-                      <p:childTnLst>
-                        <p:par>
-                          <p:cTn id="20" fill="hold">
-                            <p:stCondLst>
-                              <p:cond delay="0"/>
-                            </p:stCondLst>
-                            <p:childTnLst>
                               <p:par>
-                                <p:cTn id="21" presetID="1" presetClass="entr" presetSubtype="0" fill="hold" grpId="0" nodeType="clickEffect">
+                                <p:cTn id="19" presetID="1" presetClass="entr" presetSubtype="0" fill="hold" grpId="0" nodeType="withEffect">
                                   <p:stCondLst>
                                     <p:cond delay="0"/>
                                   </p:stCondLst>
                                   <p:childTnLst>
                                     <p:set>
                                       <p:cBhvr>
-                                        <p:cTn id="22" dur="1" fill="hold">
+                                        <p:cTn id="20" dur="1" fill="hold">
                                           <p:stCondLst>
                                             <p:cond delay="0"/>
                                           </p:stCondLst>
@@ -42325,8 +43152,26 @@
                                   </p:childTnLst>
                                 </p:cTn>
                               </p:par>
+                            </p:childTnLst>
+                          </p:cTn>
+                        </p:par>
+                      </p:childTnLst>
+                    </p:cTn>
+                  </p:par>
+                  <p:par>
+                    <p:cTn id="21" fill="hold">
+                      <p:stCondLst>
+                        <p:cond delay="indefinite"/>
+                      </p:stCondLst>
+                      <p:childTnLst>
+                        <p:par>
+                          <p:cTn id="22" fill="hold">
+                            <p:stCondLst>
+                              <p:cond delay="0"/>
+                            </p:stCondLst>
+                            <p:childTnLst>
                               <p:par>
-                                <p:cTn id="23" presetID="1" presetClass="entr" presetSubtype="0" fill="hold" grpId="0" nodeType="withEffect">
+                                <p:cTn id="23" presetID="1" presetClass="entr" presetSubtype="0" fill="hold" grpId="0" nodeType="clickEffect">
                                   <p:stCondLst>
                                     <p:cond delay="0"/>
                                   </p:stCondLst>
@@ -42356,33 +43201,15 @@
                                   </p:childTnLst>
                                 </p:cTn>
                               </p:par>
-                            </p:childTnLst>
-                          </p:cTn>
-                        </p:par>
-                      </p:childTnLst>
-                    </p:cTn>
-                  </p:par>
-                  <p:par>
-                    <p:cTn id="25" fill="hold">
-                      <p:stCondLst>
-                        <p:cond delay="indefinite"/>
-                      </p:stCondLst>
-                      <p:childTnLst>
-                        <p:par>
-                          <p:cTn id="26" fill="hold">
-                            <p:stCondLst>
-                              <p:cond delay="0"/>
-                            </p:stCondLst>
-                            <p:childTnLst>
                               <p:par>
-                                <p:cTn id="27" presetID="1" presetClass="entr" presetSubtype="0" fill="hold" grpId="0" nodeType="clickEffect">
+                                <p:cTn id="25" presetID="1" presetClass="entr" presetSubtype="0" fill="hold" grpId="0" nodeType="withEffect">
                                   <p:stCondLst>
                                     <p:cond delay="0"/>
                                   </p:stCondLst>
                                   <p:childTnLst>
                                     <p:set>
                                       <p:cBhvr>
-                                        <p:cTn id="28" dur="1" fill="hold">
+                                        <p:cTn id="26" dur="1" fill="hold">
                                           <p:stCondLst>
                                             <p:cond delay="0"/>
                                           </p:stCondLst>
@@ -42391,6 +43218,55 @@
                                           <p:spTgt spid="3">
                                             <p:txEl>
                                               <p:pRg st="7" end="7"/>
+                                            </p:txEl>
+                                          </p:spTgt>
+                                        </p:tgtEl>
+                                        <p:attrNameLst>
+                                          <p:attrName>style.visibility</p:attrName>
+                                        </p:attrNameLst>
+                                      </p:cBhvr>
+                                      <p:to>
+                                        <p:strVal val="visible"/>
+                                      </p:to>
+                                    </p:set>
+                                  </p:childTnLst>
+                                </p:cTn>
+                              </p:par>
+                            </p:childTnLst>
+                          </p:cTn>
+                        </p:par>
+                      </p:childTnLst>
+                    </p:cTn>
+                  </p:par>
+                  <p:par>
+                    <p:cTn id="27" fill="hold">
+                      <p:stCondLst>
+                        <p:cond delay="indefinite"/>
+                      </p:stCondLst>
+                      <p:childTnLst>
+                        <p:par>
+                          <p:cTn id="28" fill="hold">
+                            <p:stCondLst>
+                              <p:cond delay="0"/>
+                            </p:stCondLst>
+                            <p:childTnLst>
+                              <p:par>
+                                <p:cTn id="29" presetID="1" presetClass="entr" presetSubtype="0" fill="hold" grpId="0" nodeType="clickEffect">
+                                  <p:stCondLst>
+                                    <p:cond delay="0"/>
+                                  </p:stCondLst>
+                                  <p:childTnLst>
+                                    <p:set>
+                                      <p:cBhvr>
+                                        <p:cTn id="30" dur="1" fill="hold">
+                                          <p:stCondLst>
+                                            <p:cond delay="0"/>
+                                          </p:stCondLst>
+                                        </p:cTn>
+                                        <p:tgtEl>
+                                          <p:spTgt spid="3">
+                                            <p:txEl>
+                                              <p:pRg st="8" end="8"/>
                                             </p:txEl>
                                           </p:spTgt>
                                         </p:tgtEl>
@@ -48569,18 +49445,18 @@
 </file>
 
 <file path=customXml/item2.xml><?xml version="1.0" encoding="utf-8"?>
-<p:properties xmlns:p="http://schemas.microsoft.com/office/2006/metadata/properties" xmlns:xsi="http://www.w3.org/2001/XMLSchema-instance" xmlns:pc="http://schemas.microsoft.com/office/infopath/2007/PartnerControls">
-  <documentManagement/>
-</p:properties>
-</file>
-
-<file path=customXml/item3.xml><?xml version="1.0" encoding="utf-8"?>
 <?mso-contentType ?>
 <FormTemplates xmlns="http://schemas.microsoft.com/sharepoint/v3/contenttype/forms">
   <Display>DocumentLibraryForm</Display>
   <Edit>DocumentLibraryForm</Edit>
   <New>DocumentLibraryForm</New>
 </FormTemplates>
+</file>
+
+<file path=customXml/item3.xml><?xml version="1.0" encoding="utf-8"?>
+<p:properties xmlns:p="http://schemas.microsoft.com/office/2006/metadata/properties" xmlns:xsi="http://www.w3.org/2001/XMLSchema-instance" xmlns:pc="http://schemas.microsoft.com/office/infopath/2007/PartnerControls">
+  <documentManagement/>
+</p:properties>
 </file>
 
 <file path=customXml/itemProps1.xml><?xml version="1.0" encoding="utf-8"?>
@@ -48602,18 +49478,18 @@
 </file>
 
 <file path=customXml/itemProps2.xml><?xml version="1.0" encoding="utf-8"?>
+<ds:datastoreItem xmlns:ds="http://schemas.openxmlformats.org/officeDocument/2006/customXml" ds:itemID="{9DC439CA-6F1C-4005-ACA6-A52E04DEE0A7}">
+  <ds:schemaRefs>
+    <ds:schemaRef ds:uri="http://schemas.microsoft.com/sharepoint/v3/contenttype/forms"/>
+  </ds:schemaRefs>
+</ds:datastoreItem>
+</file>
+
+<file path=customXml/itemProps3.xml><?xml version="1.0" encoding="utf-8"?>
 <ds:datastoreItem xmlns:ds="http://schemas.openxmlformats.org/officeDocument/2006/customXml" ds:itemID="{5BDF4908-A52A-47DD-A794-6E02D71942FC}">
   <ds:schemaRefs>
     <ds:schemaRef ds:uri="http://schemas.microsoft.com/office/2006/metadata/properties"/>
     <ds:schemaRef ds:uri="http://schemas.microsoft.com/office/infopath/2007/PartnerControls"/>
   </ds:schemaRefs>
 </ds:datastoreItem>
-</file>
-
-<file path=customXml/itemProps3.xml><?xml version="1.0" encoding="utf-8"?>
-<ds:datastoreItem xmlns:ds="http://schemas.openxmlformats.org/officeDocument/2006/customXml" ds:itemID="{9DC439CA-6F1C-4005-ACA6-A52E04DEE0A7}">
-  <ds:schemaRefs>
-    <ds:schemaRef ds:uri="http://schemas.microsoft.com/sharepoint/v3/contenttype/forms"/>
-  </ds:schemaRefs>
-</ds:datastoreItem>
 </file>